--- a/slides/10-classification-metrics.pptx
+++ b/slides/10-classification-metrics.pptx
@@ -5,7 +5,7 @@
     <p:sldMasterId id="2147483686" r:id="rId1"/>
   </p:sldMasterIdLst>
   <p:notesMasterIdLst>
-    <p:notesMasterId r:id="rId23"/>
+    <p:notesMasterId r:id="rId26"/>
   </p:notesMasterIdLst>
   <p:sldIdLst>
     <p:sldId id="256" r:id="rId2"/>
@@ -17,18 +17,21 @@
     <p:sldId id="306" r:id="rId8"/>
     <p:sldId id="307" r:id="rId9"/>
     <p:sldId id="308" r:id="rId10"/>
-    <p:sldId id="310" r:id="rId11"/>
-    <p:sldId id="312" r:id="rId12"/>
-    <p:sldId id="313" r:id="rId13"/>
-    <p:sldId id="314" r:id="rId14"/>
-    <p:sldId id="315" r:id="rId15"/>
-    <p:sldId id="316" r:id="rId16"/>
-    <p:sldId id="317" r:id="rId17"/>
-    <p:sldId id="318" r:id="rId18"/>
-    <p:sldId id="319" r:id="rId19"/>
-    <p:sldId id="320" r:id="rId20"/>
-    <p:sldId id="321" r:id="rId21"/>
-    <p:sldId id="322" r:id="rId22"/>
+    <p:sldId id="323" r:id="rId11"/>
+    <p:sldId id="310" r:id="rId12"/>
+    <p:sldId id="312" r:id="rId13"/>
+    <p:sldId id="324" r:id="rId14"/>
+    <p:sldId id="325" r:id="rId15"/>
+    <p:sldId id="313" r:id="rId16"/>
+    <p:sldId id="315" r:id="rId17"/>
+    <p:sldId id="314" r:id="rId18"/>
+    <p:sldId id="316" r:id="rId19"/>
+    <p:sldId id="317" r:id="rId20"/>
+    <p:sldId id="318" r:id="rId21"/>
+    <p:sldId id="319" r:id="rId22"/>
+    <p:sldId id="320" r:id="rId23"/>
+    <p:sldId id="321" r:id="rId24"/>
+    <p:sldId id="322" r:id="rId25"/>
   </p:sldIdLst>
   <p:sldSz cx="12192000" cy="6858000"/>
   <p:notesSz cx="6858000" cy="9144000"/>
@@ -160,7 +163,7 @@
     </p:spTree>
     <p:extLst>
       <p:ext uri="{BB962C8B-B14F-4D97-AF65-F5344CB8AC3E}">
-        <p14:creationId xmlns:p14="http://schemas.microsoft.com/office/powerpoint/2010/main" val="1844896805"/>
+        <p14:creationId xmlns:p14="http://schemas.microsoft.com/office/powerpoint/2010/main" val="661544176"/>
       </p:ext>
     </p:extLst>
   </p:cSld>
@@ -784,7 +787,7 @@
           <a:p>
             <a:fld id="{D1D1EADE-8E88-4C7C-8AC5-FB148DE4940E}" type="datetime1">
               <a:rPr lang="en-US" smtClean="0"/>
-              <a:t>10/5/2026</a:t>
+              <a:t>10/8/2026</a:t>
             </a:fld>
             <a:endParaRPr lang="en-US"/>
           </a:p>
@@ -984,7 +987,7 @@
           <a:p>
             <a:fld id="{EC3C8B9C-477D-492A-96AD-1FC2CC997A73}" type="datetime1">
               <a:rPr lang="en-US" smtClean="0"/>
-              <a:t>10/5/2026</a:t>
+              <a:t>10/8/2026</a:t>
             </a:fld>
             <a:endParaRPr lang="en-US"/>
           </a:p>
@@ -1194,7 +1197,7 @@
           <a:p>
             <a:fld id="{42D3AED5-E26D-4E29-B1B3-7847B6779594}" type="datetime1">
               <a:rPr lang="en-US" smtClean="0"/>
-              <a:t>10/5/2026</a:t>
+              <a:t>10/8/2026</a:t>
             </a:fld>
             <a:endParaRPr lang="en-US"/>
           </a:p>
@@ -1654,7 +1657,7 @@
           <a:p>
             <a:fld id="{157B6794-849E-4626-908B-D15793550EFB}" type="datetime1">
               <a:rPr lang="en-US" smtClean="0"/>
-              <a:t>10/5/2026</a:t>
+              <a:t>10/8/2026</a:t>
             </a:fld>
             <a:endParaRPr lang="en-US"/>
           </a:p>
@@ -1930,7 +1933,7 @@
           <a:p>
             <a:fld id="{63DB64E7-5594-42A3-ADBF-E95A7ACEAD64}" type="datetime1">
               <a:rPr lang="en-US" smtClean="0"/>
-              <a:t>10/5/2026</a:t>
+              <a:t>10/8/2026</a:t>
             </a:fld>
             <a:endParaRPr lang="en-US"/>
           </a:p>
@@ -2203,7 +2206,7 @@
           <a:p>
             <a:fld id="{18462B0B-D248-4FFB-8695-AD7FA4B1284A}" type="datetime1">
               <a:rPr lang="en-US" smtClean="0"/>
-              <a:t>10/5/2026</a:t>
+              <a:t>10/8/2026</a:t>
             </a:fld>
             <a:endParaRPr lang="en-US"/>
           </a:p>
@@ -2626,7 +2629,7 @@
           <a:p>
             <a:fld id="{D0378EFB-9159-4510-B73F-4F0409ADE937}" type="datetime1">
               <a:rPr lang="en-US" smtClean="0"/>
-              <a:t>10/5/2026</a:t>
+              <a:t>10/8/2026</a:t>
             </a:fld>
             <a:endParaRPr lang="en-US"/>
           </a:p>
@@ -2768,7 +2771,7 @@
           <a:p>
             <a:fld id="{89BC9412-2452-4BED-A324-9D8C115361AD}" type="datetime1">
               <a:rPr lang="en-US" smtClean="0"/>
-              <a:t>10/5/2026</a:t>
+              <a:t>10/8/2026</a:t>
             </a:fld>
             <a:endParaRPr lang="en-US"/>
           </a:p>
@@ -2881,7 +2884,7 @@
           <a:p>
             <a:fld id="{F5318F62-D251-40E8-A23C-F4CFE9FEAB41}" type="datetime1">
               <a:rPr lang="en-US" smtClean="0"/>
-              <a:t>10/5/2026</a:t>
+              <a:t>10/8/2026</a:t>
             </a:fld>
             <a:endParaRPr lang="en-US"/>
           </a:p>
@@ -3194,7 +3197,7 @@
           <a:p>
             <a:fld id="{44F76144-149E-4874-93A5-554A0357CF82}" type="datetime1">
               <a:rPr lang="en-US" smtClean="0"/>
-              <a:t>10/5/2026</a:t>
+              <a:t>10/8/2026</a:t>
             </a:fld>
             <a:endParaRPr lang="en-US"/>
           </a:p>
@@ -3487,7 +3490,7 @@
           <a:p>
             <a:fld id="{50BA65D8-0540-4835-AE5C-25D29DBA01BE}" type="datetime1">
               <a:rPr lang="en-US" smtClean="0"/>
-              <a:t>10/5/2026</a:t>
+              <a:t>10/8/2026</a:t>
             </a:fld>
             <a:endParaRPr lang="en-US"/>
           </a:p>
@@ -3729,7 +3732,7 @@
           <a:p>
             <a:fld id="{E31BA835-12AC-4E8F-955A-EA3F4DE2791F}" type="datetime1">
               <a:rPr lang="en-US" smtClean="0"/>
-              <a:t>10/5/2026</a:t>
+              <a:t>10/8/2026</a:t>
             </a:fld>
             <a:endParaRPr lang="en-US"/>
           </a:p>
@@ -4548,11 +4551,11 @@
           </a:prstGeom>
         </p:spPr>
         <p:txBody>
-          <a:bodyPr/>
+          <a:bodyPr wrap="square"/>
           <a:lstStyle/>
           <a:p>
             <a:r>
-              <a:t>ROC Curve and AUC</a:t>
+              <a:t>Classification Thresholds</a:t>
             </a:r>
           </a:p>
         </p:txBody>
@@ -4574,11 +4577,11 @@
         </p:spPr>
         <p:txBody>
           <a:bodyPr wrap="square">
-            <a:normAutofit/>
+            <a:normAutofit lnSpcReduction="10000"/>
           </a:bodyPr>
           <a:lstStyle/>
           <a:p>
-            <a:pPr marL="196446" indent="-196446" defTabSz="156458">
+            <a:pPr marL="196446" lvl="0" indent="-196446" defTabSz="156458">
               <a:spcBef>
                 <a:spcPts val="0"/>
               </a:spcBef>
@@ -4588,87 +4591,8 @@
               <a:defRPr sz="2464"/>
             </a:pPr>
             <a:r>
-              <a:rPr lang="en-US"/>
+              <a:rPr dirty="0"/>
               <a:t>A threshold converts a predicted probability or score into a class label.</a:t>
-            </a:r>
-          </a:p>
-          <a:p>
-            <a:pPr lvl="1">
-              <a:spcBef>
-                <a:spcPts val="0"/>
-              </a:spcBef>
-              <a:spcAft>
-                <a:spcPts val="1400"/>
-              </a:spcAft>
-            </a:pPr>
-            <a:r>
-              <a:rPr lang="en-US"/>
-              <a:t>Predict positive if </a:t>
-            </a:r>
-            <a:r>
-              <a:rPr lang="en-US" i="1">
-                <a:latin typeface="Graphik"/>
-                <a:ea typeface="Graphik"/>
-                <a:cs typeface="Graphik"/>
-                <a:sym typeface="Graphik"/>
-              </a:rPr>
-              <a:t>P(y</a:t>
-            </a:r>
-            <a:r>
-              <a:rPr lang="en-US" i="1" baseline="-5999">
-                <a:latin typeface="Graphik"/>
-                <a:ea typeface="Graphik"/>
-                <a:cs typeface="Graphik"/>
-                <a:sym typeface="Graphik"/>
-              </a:rPr>
-              <a:t>i </a:t>
-            </a:r>
-            <a:r>
-              <a:rPr lang="en-US" i="1">
-                <a:latin typeface="Graphik"/>
-                <a:ea typeface="Graphik"/>
-                <a:cs typeface="Graphik"/>
-                <a:sym typeface="Graphik"/>
-              </a:rPr>
-              <a:t>= positive) &gt; p</a:t>
-            </a:r>
-            <a:r>
-              <a:rPr lang="en-US"/>
-              <a:t> (</a:t>
-            </a:r>
-            <a:r>
-              <a:rPr lang="en-US" i="1">
-                <a:latin typeface="Graphik"/>
-                <a:ea typeface="Graphik"/>
-                <a:cs typeface="Graphik"/>
-                <a:sym typeface="Graphik"/>
-              </a:rPr>
-              <a:t>0 &lt; p &lt; 1)</a:t>
-            </a:r>
-          </a:p>
-          <a:p>
-            <a:pPr marL="196446" indent="-196446" defTabSz="156458">
-              <a:spcBef>
-                <a:spcPts val="0"/>
-              </a:spcBef>
-              <a:spcAft>
-                <a:spcPts val="1400"/>
-              </a:spcAft>
-              <a:defRPr sz="2464"/>
-            </a:pPr>
-            <a:r>
-              <a:t>ROC </a:t>
-            </a:r>
-            <a:r>
-              <a:rPr lang="en-US"/>
-              <a:t>plots true positive rate vs. </a:t>
-            </a:r>
-            <a:r>
-              <a:t>false positive </a:t>
-            </a:r>
-            <a:r>
-              <a:rPr lang="en-US"/>
-              <a:t>rate as the threshold varies.</a:t>
             </a:r>
           </a:p>
           <a:p>
@@ -4682,43 +4606,32 @@
               <a:defRPr sz="2464"/>
             </a:pPr>
             <a:r>
-              <a:t>True </a:t>
-            </a:r>
-            <a:r>
-              <a:rPr lang="en-US"/>
-              <a:t>positive rate = </a:t>
-            </a:r>
-            <a:r>
-              <a:t>sensitivity</a:t>
-            </a:r>
-            <a:r>
-              <a:rPr lang="en-US"/>
+              <a:rPr lang="en-US" dirty="0"/>
+              <a:t>Probability above </a:t>
+            </a:r>
+            <a:r>
+              <a:rPr dirty="0"/>
+              <a:t>the threshold</a:t>
+            </a:r>
+            <a:r>
+              <a:rPr lang="en-US" dirty="0"/>
+              <a:t>: positive</a:t>
+            </a:r>
+            <a:r>
+              <a:rPr dirty="0"/>
               <a:t>. </a:t>
             </a:r>
             <a:r>
-              <a:t>False </a:t>
-            </a:r>
-            <a:r>
-              <a:rPr lang="en-US"/>
-              <a:t>positive rate = </a:t>
-            </a:r>
-            <a:r>
-              <a:t>1 </a:t>
-            </a:r>
-            <a:r>
-              <a:rPr lang="en-US"/>
-              <a:t>− </a:t>
-            </a:r>
-            <a:r>
-              <a:t>specificity</a:t>
-            </a:r>
-            <a:r>
-              <a:rPr lang="en-US"/>
-              <a:t>.</a:t>
-            </a:r>
-          </a:p>
-          <a:p>
-            <a:pPr marL="196446" indent="-196446" defTabSz="156458">
+              <a:rPr lang="en-US" dirty="0"/>
+              <a:t>At or below: </a:t>
+            </a:r>
+            <a:r>
+              <a:rPr dirty="0"/>
+              <a:t>negative.</a:t>
+            </a:r>
+          </a:p>
+          <a:p>
+            <a:pPr marL="196446" lvl="0" indent="-196446" defTabSz="156458">
               <a:spcBef>
                 <a:spcPts val="0"/>
               </a:spcBef>
@@ -4728,22 +4641,16 @@
               <a:defRPr sz="2464"/>
             </a:pPr>
             <a:r>
-              <a:t>AUC (</a:t>
-            </a:r>
-            <a:r>
-              <a:rPr lang="en-US"/>
-              <a:t>area under </a:t>
-            </a:r>
-            <a:r>
-              <a:t>the ROC curve</a:t>
-            </a:r>
-            <a:r>
-              <a:rPr lang="en-US"/>
-              <a:t>) summarizes performance.</a:t>
-            </a:r>
-          </a:p>
-          <a:p>
-            <a:pPr marL="590910" lvl="1" indent="-198018" defTabSz="156458">
+              <a:rPr lang="en-US" dirty="0"/>
+              <a:t>E</a:t>
+            </a:r>
+            <a:r>
+              <a:rPr dirty="0"/>
+              <a:t>xample: A spam filter assigns an email P(spam) = 0.65.</a:t>
+            </a:r>
+          </a:p>
+          <a:p>
+            <a:pPr marL="394464" lvl="1" indent="-198018" defTabSz="156458">
               <a:spcBef>
                 <a:spcPts val="0"/>
               </a:spcBef>
@@ -4753,39 +4660,54 @@
               <a:defRPr sz="2464"/>
             </a:pPr>
             <a:r>
-              <a:t>AUC =</a:t>
-            </a:r>
-            <a:r>
-              <a:rPr lang="en-US"/>
-              <a:t> </a:t>
-            </a:r>
-            <a:r>
-              <a:t>1</a:t>
-            </a:r>
-            <a:r>
-              <a:rPr lang="en-US"/>
-              <a:t>:</a:t>
-            </a:r>
-            <a:r>
-              <a:t> perfect model</a:t>
-            </a:r>
-            <a:r>
-              <a:rPr lang="en-US"/>
-              <a:t>. </a:t>
-            </a:r>
-            <a:r>
-              <a:t>AUC = 0.5</a:t>
-            </a:r>
-            <a:r>
-              <a:rPr lang="en-US"/>
-              <a:t>:</a:t>
-            </a:r>
-            <a:r>
-              <a:t> random </a:t>
-            </a:r>
-            <a:r>
-              <a:rPr lang="en-US"/>
-              <a:t>performance.</a:t>
+              <a:rPr dirty="0"/>
+              <a:t>Threshold 0.50: predict spam. Threshold 0.80: predict not spam.</a:t>
+            </a:r>
+          </a:p>
+          <a:p>
+            <a:pPr marL="196446" lvl="0" indent="-196446" defTabSz="156458">
+              <a:spcBef>
+                <a:spcPts val="0"/>
+              </a:spcBef>
+              <a:spcAft>
+                <a:spcPts val="1400"/>
+              </a:spcAft>
+              <a:defRPr sz="2464"/>
+            </a:pPr>
+            <a:r>
+              <a:rPr dirty="0"/>
+              <a:t>Lower thresholds predict more positives, </a:t>
+            </a:r>
+            <a:r>
+              <a:rPr lang="en-US" dirty="0"/>
+              <a:t>with fewer </a:t>
+            </a:r>
+            <a:r>
+              <a:rPr dirty="0"/>
+              <a:t>misses but more false alarms.</a:t>
+            </a:r>
+          </a:p>
+          <a:p>
+            <a:pPr marL="196446" lvl="0" indent="-196446" defTabSz="156458">
+              <a:spcBef>
+                <a:spcPts val="0"/>
+              </a:spcBef>
+              <a:spcAft>
+                <a:spcPts val="1400"/>
+              </a:spcAft>
+              <a:defRPr sz="2464"/>
+            </a:pPr>
+            <a:r>
+              <a:rPr dirty="0"/>
+              <a:t>ROC curves </a:t>
+            </a:r>
+            <a:r>
+              <a:rPr lang="en-US" dirty="0"/>
+              <a:t>compare </a:t>
+            </a:r>
+            <a:r>
+              <a:rPr dirty="0"/>
+              <a:t>true and false positive rates across thresholds.</a:t>
             </a:r>
           </a:p>
         </p:txBody>
@@ -4795,7 +4717,6 @@
   <p:clrMapOvr>
     <a:masterClrMapping/>
   </p:clrMapOvr>
-  <p:transition spd="med"/>
 </p:sld>
 </file>
 
@@ -4818,7 +4739,7 @@
       </p:grpSpPr>
       <p:sp>
         <p:nvSpPr>
-          <p:cNvPr id="591" name="Example ROC Curve"/>
+          <p:cNvPr id="583" name="ROC Curve and AUC"/>
           <p:cNvSpPr txBox="1">
             <a:spLocks noGrp="1"/>
           </p:cNvSpPr>
@@ -4836,41 +4757,14 @@
           <a:lstStyle/>
           <a:p>
             <a:r>
-              <a:t>Example ROC Curve</a:t>
-            </a:r>
-          </a:p>
-        </p:txBody>
-      </p:sp>
-      <p:pic>
-        <p:nvPicPr>
-          <p:cNvPr id="592" name="unknown.png" descr="unknown.png"/>
-          <p:cNvPicPr>
-            <a:picLocks noChangeAspect="1"/>
-          </p:cNvPicPr>
-          <p:nvPr/>
-        </p:nvPicPr>
-        <p:blipFill>
-          <a:blip r:embed="rId2"/>
-          <a:stretch>
-            <a:fillRect/>
-          </a:stretch>
-        </p:blipFill>
-        <p:spPr>
-          <a:xfrm>
-            <a:off x="731520" y="1856231"/>
-            <a:ext cx="5715000" cy="4115984"/>
-          </a:xfrm>
-          <a:prstGeom prst="rect">
-            <a:avLst/>
-          </a:prstGeom>
-          <a:ln w="3175">
-            <a:miter lim="400000"/>
-          </a:ln>
-        </p:spPr>
-      </p:pic>
-      <p:sp>
-        <p:nvSpPr>
-          <p:cNvPr id="593" name="How thresholds affect TPR and FPR"/>
+              <a:t>ROC Curve and AUC</a:t>
+            </a:r>
+          </a:p>
+        </p:txBody>
+      </p:sp>
+      <p:sp>
+        <p:nvSpPr>
+          <p:cNvPr id="584" name="ROC stands for Receiver Operating Curve…"/>
           <p:cNvSpPr txBox="1">
             <a:spLocks noGrp="1"/>
           </p:cNvSpPr>
@@ -4879,135 +4773,224 @@
           </p:nvPr>
         </p:nvSpPr>
         <p:spPr>
-          <a:xfrm>
-            <a:off x="6812280" y="1993392"/>
-            <a:ext cx="4526280" cy="4069080"/>
-          </a:xfrm>
           <a:prstGeom prst="rect">
             <a:avLst/>
           </a:prstGeom>
         </p:spPr>
         <p:txBody>
           <a:bodyPr wrap="square">
-            <a:normAutofit fontScale="92500" lnSpcReduction="10000"/>
+            <a:normAutofit/>
           </a:bodyPr>
           <a:lstStyle/>
           <a:p>
             <a:pPr marL="196446" indent="-196446" defTabSz="156458">
-              <a:lnSpc>
-                <a:spcPct val="105000"/>
-              </a:lnSpc>
               <a:spcBef>
                 <a:spcPts val="0"/>
               </a:spcBef>
               <a:spcAft>
-                <a:spcPts val="1700"/>
+                <a:spcPts val="1400"/>
               </a:spcAft>
               <a:defRPr sz="2464"/>
             </a:pPr>
             <a:r>
-              <a:rPr sz="2200" b="1"/>
-              <a:t>Each point uses a threshold.</a:t>
-            </a:r>
-            <a:r>
-              <a:rPr sz="2200"/>
-              <a:t> Predict positive when the score exceeds it.</a:t>
-            </a:r>
-          </a:p>
-          <a:p>
-            <a:pPr>
-              <a:lnSpc>
-                <a:spcPct val="105000"/>
-              </a:lnSpc>
+              <a:rPr lang="en-US"/>
+              <a:t>A threshold converts a predicted probability or score into a class label.</a:t>
+            </a:r>
+          </a:p>
+          <a:p>
+            <a:pPr lvl="1">
               <a:spcBef>
                 <a:spcPts val="0"/>
               </a:spcBef>
               <a:spcAft>
-                <a:spcPts val="1700"/>
+                <a:spcPts val="1400"/>
               </a:spcAft>
             </a:pPr>
             <a:r>
-              <a:rPr sz="2200" b="1"/>
-              <a:t>Lower threshold:</a:t>
-            </a:r>
-            <a:r>
-              <a:rPr sz="2200"/>
-              <a:t> </a:t>
-            </a:r>
-            <a:r>
-              <a:rPr lang="en-US" sz="2200"/>
-              <a:t>More positives</a:t>
-            </a:r>
-            <a:r>
-              <a:rPr sz="2200"/>
-              <a:t>. TPR and FPR </a:t>
-            </a:r>
-            <a:r>
-              <a:rPr lang="en-US" sz="2200"/>
-              <a:t>cannot decrease. Move </a:t>
-            </a:r>
-            <a:r>
-              <a:rPr sz="2200"/>
-              <a:t>up/right toward (1, 1).</a:t>
-            </a:r>
-          </a:p>
-          <a:p>
-            <a:pPr>
-              <a:lnSpc>
-                <a:spcPct val="105000"/>
-              </a:lnSpc>
+              <a:rPr lang="en-US"/>
+              <a:t>Predict positive if </a:t>
+            </a:r>
+            <a:r>
+              <a:rPr lang="en-US" i="1">
+                <a:latin typeface="Graphik"/>
+                <a:ea typeface="Graphik"/>
+                <a:cs typeface="Graphik"/>
+                <a:sym typeface="Graphik"/>
+              </a:rPr>
+              <a:t>P(y</a:t>
+            </a:r>
+            <a:r>
+              <a:rPr lang="en-US" i="1" baseline="-5999">
+                <a:latin typeface="Graphik"/>
+                <a:ea typeface="Graphik"/>
+                <a:cs typeface="Graphik"/>
+                <a:sym typeface="Graphik"/>
+              </a:rPr>
+              <a:t>i </a:t>
+            </a:r>
+            <a:r>
+              <a:rPr lang="en-US" i="1">
+                <a:latin typeface="Graphik"/>
+                <a:ea typeface="Graphik"/>
+                <a:cs typeface="Graphik"/>
+                <a:sym typeface="Graphik"/>
+              </a:rPr>
+              <a:t>= positive) &gt; p</a:t>
+            </a:r>
+            <a:r>
+              <a:rPr lang="en-US"/>
+              <a:t> (</a:t>
+            </a:r>
+            <a:r>
+              <a:rPr lang="en-US" i="1">
+                <a:latin typeface="Graphik"/>
+                <a:ea typeface="Graphik"/>
+                <a:cs typeface="Graphik"/>
+                <a:sym typeface="Graphik"/>
+              </a:rPr>
+              <a:t>0 &lt; p &lt; 1)</a:t>
+            </a:r>
+          </a:p>
+          <a:p>
+            <a:pPr marL="196446" indent="-196446" defTabSz="156458">
               <a:spcBef>
                 <a:spcPts val="0"/>
               </a:spcBef>
               <a:spcAft>
-                <a:spcPts val="1700"/>
+                <a:spcPts val="1400"/>
               </a:spcAft>
+              <a:defRPr sz="2464"/>
             </a:pPr>
             <a:r>
-              <a:rPr sz="2200" b="1"/>
-              <a:t>Higher threshold:</a:t>
-            </a:r>
-            <a:r>
-              <a:rPr sz="2200"/>
-              <a:t> </a:t>
-            </a:r>
-            <a:r>
-              <a:rPr lang="en-US" sz="2200"/>
-              <a:t>Fewer positives</a:t>
-            </a:r>
-            <a:r>
-              <a:rPr sz="2200"/>
-              <a:t>. TPR and FPR </a:t>
-            </a:r>
-            <a:r>
-              <a:rPr lang="en-US" sz="2200"/>
-              <a:t>cannot increase. Move</a:t>
-            </a:r>
-            <a:r>
-              <a:rPr sz="2200"/>
-              <a:t> down/left toward (0, 0).</a:t>
-            </a:r>
-          </a:p>
-          <a:p>
-            <a:pPr marL="196446" indent="-196446" defTabSz="156458">
-              <a:lnSpc>
-                <a:spcPct val="105000"/>
-              </a:lnSpc>
+              <a:t>ROC </a:t>
+            </a:r>
+            <a:r>
+              <a:rPr lang="en-US"/>
+              <a:t>plots true positive rate vs. </a:t>
+            </a:r>
+            <a:r>
+              <a:t>false positive </a:t>
+            </a:r>
+            <a:r>
+              <a:rPr lang="en-US"/>
+              <a:t>rate as the threshold varies.</a:t>
+            </a:r>
+          </a:p>
+          <a:p>
+            <a:pPr marL="394464" lvl="1" indent="-198018" defTabSz="156458">
               <a:spcBef>
                 <a:spcPts val="0"/>
               </a:spcBef>
               <a:spcAft>
-                <a:spcPts val="1700"/>
+                <a:spcPts val="1400"/>
               </a:spcAft>
               <a:defRPr sz="2464"/>
             </a:pPr>
             <a:r>
-              <a:rPr lang="en-US" sz="2200" b="1"/>
-              <a:t>Tradeoff:</a:t>
-            </a:r>
-            <a:r>
-              <a:rPr lang="en-US" sz="2200"/>
-              <a:t> Lower thresholds miss fewer positives but raise false alarms. Higher thresholds do the reverse.</a:t>
+              <a:t>True </a:t>
+            </a:r>
+            <a:r>
+              <a:rPr lang="en-US"/>
+              <a:t>positive rate = </a:t>
+            </a:r>
+            <a:r>
+              <a:t>sensitivity</a:t>
+            </a:r>
+            <a:r>
+              <a:rPr lang="en-US"/>
+              <a:t>. </a:t>
+            </a:r>
+            <a:r>
+              <a:t>False </a:t>
+            </a:r>
+            <a:r>
+              <a:rPr lang="en-US"/>
+              <a:t>positive rate = </a:t>
+            </a:r>
+            <a:r>
+              <a:t>1 </a:t>
+            </a:r>
+            <a:r>
+              <a:rPr lang="en-US"/>
+              <a:t>− </a:t>
+            </a:r>
+            <a:r>
+              <a:t>specificity</a:t>
+            </a:r>
+            <a:r>
+              <a:rPr lang="en-US"/>
+              <a:t>.</a:t>
+            </a:r>
+          </a:p>
+          <a:p>
+            <a:pPr marL="196446" indent="-196446" defTabSz="156458">
+              <a:spcBef>
+                <a:spcPts val="0"/>
+              </a:spcBef>
+              <a:spcAft>
+                <a:spcPts val="1400"/>
+              </a:spcAft>
+              <a:defRPr sz="2464"/>
+            </a:pPr>
+            <a:r>
+              <a:t>AUC (</a:t>
+            </a:r>
+            <a:r>
+              <a:rPr lang="en-US"/>
+              <a:t>area under </a:t>
+            </a:r>
+            <a:r>
+              <a:t>the ROC curve</a:t>
+            </a:r>
+            <a:r>
+              <a:rPr lang="en-US"/>
+              <a:t>) summarizes performance.</a:t>
+            </a:r>
+          </a:p>
+          <a:p>
+            <a:pPr marL="590910" lvl="1" indent="-198018" defTabSz="156458">
+              <a:spcBef>
+                <a:spcPts val="0"/>
+              </a:spcBef>
+              <a:spcAft>
+                <a:spcPts val="1400"/>
+              </a:spcAft>
+              <a:defRPr sz="2464"/>
+            </a:pPr>
+            <a:r>
+              <a:t>AUC =</a:t>
+            </a:r>
+            <a:r>
+              <a:rPr lang="en-US"/>
+              <a:t> </a:t>
+            </a:r>
+            <a:r>
+              <a:t>1</a:t>
+            </a:r>
+            <a:r>
+              <a:rPr lang="en-US"/>
+              <a:t>:</a:t>
+            </a:r>
+            <a:r>
+              <a:t> perfect model</a:t>
+            </a:r>
+            <a:r>
+              <a:rPr lang="en-US"/>
+              <a:t>. </a:t>
+            </a:r>
+            <a:r>
+              <a:t>AUC = 0.5</a:t>
+            </a:r>
+            <a:r>
+              <a:rPr lang="en-US"/>
+              <a:t>:</a:t>
+            </a:r>
+            <a:r>
+              <a:t> random </a:t>
+            </a:r>
+            <a:r>
+              <a:rPr lang="en-US"/>
+              <a:t>performance.</a:t>
             </a:r>
           </a:p>
         </p:txBody>
@@ -5040,7 +5023,7 @@
       </p:grpSpPr>
       <p:sp>
         <p:nvSpPr>
-          <p:cNvPr id="594" name="Metrics in Scikit-Learn"/>
+          <p:cNvPr id="591" name="Example ROC Curve"/>
           <p:cNvSpPr txBox="1">
             <a:spLocks noGrp="1"/>
           </p:cNvSpPr>
@@ -5058,7 +5041,231 @@
           <a:lstStyle/>
           <a:p>
             <a:r>
-              <a:t>Metrics in Scikit-Learn</a:t>
+              <a:t>Example ROC Curve</a:t>
+            </a:r>
+          </a:p>
+        </p:txBody>
+      </p:sp>
+      <p:pic>
+        <p:nvPicPr>
+          <p:cNvPr id="592" name="unknown.png" descr="unknown.png"/>
+          <p:cNvPicPr>
+            <a:picLocks noChangeAspect="1"/>
+          </p:cNvPicPr>
+          <p:nvPr/>
+        </p:nvPicPr>
+        <p:blipFill>
+          <a:blip r:embed="rId2"/>
+          <a:stretch>
+            <a:fillRect/>
+          </a:stretch>
+        </p:blipFill>
+        <p:spPr>
+          <a:xfrm>
+            <a:off x="1367159" y="1783080"/>
+            <a:ext cx="4443721" cy="3200400"/>
+          </a:xfrm>
+          <a:prstGeom prst="rect">
+            <a:avLst/>
+          </a:prstGeom>
+          <a:ln w="3175">
+            <a:miter lim="400000"/>
+          </a:ln>
+        </p:spPr>
+      </p:pic>
+      <p:sp>
+        <p:nvSpPr>
+          <p:cNvPr id="593" name="How thresholds affect TPR and FPR"/>
+          <p:cNvSpPr txBox="1">
+            <a:spLocks noGrp="1"/>
+          </p:cNvSpPr>
+          <p:nvPr>
+            <p:ph type="body" idx="1"/>
+          </p:nvPr>
+        </p:nvSpPr>
+        <p:spPr>
+          <a:xfrm>
+            <a:off x="6812280" y="1993392"/>
+            <a:ext cx="4526280" cy="4069080"/>
+          </a:xfrm>
+          <a:prstGeom prst="rect">
+            <a:avLst/>
+          </a:prstGeom>
+        </p:spPr>
+        <p:txBody>
+          <a:bodyPr wrap="square">
+            <a:normAutofit fontScale="92500" lnSpcReduction="10000"/>
+          </a:bodyPr>
+          <a:lstStyle/>
+          <a:p>
+            <a:pPr marL="196446" indent="-196446" defTabSz="156458">
+              <a:lnSpc>
+                <a:spcPct val="105000"/>
+              </a:lnSpc>
+              <a:spcBef>
+                <a:spcPts val="0"/>
+              </a:spcBef>
+              <a:spcAft>
+                <a:spcPts val="1700"/>
+              </a:spcAft>
+              <a:defRPr sz="2464"/>
+            </a:pPr>
+            <a:r>
+              <a:rPr sz="2200" b="1"/>
+              <a:t>Each point uses a threshold.</a:t>
+            </a:r>
+            <a:r>
+              <a:rPr sz="2200"/>
+              <a:t> Predict positive when the score exceeds it.</a:t>
+            </a:r>
+          </a:p>
+          <a:p>
+            <a:pPr>
+              <a:lnSpc>
+                <a:spcPct val="105000"/>
+              </a:lnSpc>
+              <a:spcBef>
+                <a:spcPts val="0"/>
+              </a:spcBef>
+              <a:spcAft>
+                <a:spcPts val="1700"/>
+              </a:spcAft>
+            </a:pPr>
+            <a:r>
+              <a:rPr sz="2200" b="1"/>
+              <a:t>Lower threshold:</a:t>
+            </a:r>
+            <a:r>
+              <a:rPr sz="2200"/>
+              <a:t> </a:t>
+            </a:r>
+            <a:r>
+              <a:rPr lang="en-US" sz="2200"/>
+              <a:t>More positives</a:t>
+            </a:r>
+            <a:r>
+              <a:rPr sz="2200"/>
+              <a:t>. TPR and FPR </a:t>
+            </a:r>
+            <a:r>
+              <a:rPr lang="en-US" sz="2200"/>
+              <a:t>cannot decrease. Move </a:t>
+            </a:r>
+            <a:r>
+              <a:rPr sz="2200"/>
+              <a:t>up/right toward (1, 1).</a:t>
+            </a:r>
+          </a:p>
+          <a:p>
+            <a:pPr>
+              <a:lnSpc>
+                <a:spcPct val="105000"/>
+              </a:lnSpc>
+              <a:spcBef>
+                <a:spcPts val="0"/>
+              </a:spcBef>
+              <a:spcAft>
+                <a:spcPts val="1700"/>
+              </a:spcAft>
+            </a:pPr>
+            <a:r>
+              <a:rPr sz="2200" b="1"/>
+              <a:t>Higher threshold:</a:t>
+            </a:r>
+            <a:r>
+              <a:rPr sz="2200"/>
+              <a:t> </a:t>
+            </a:r>
+            <a:r>
+              <a:rPr lang="en-US" sz="2200"/>
+              <a:t>Fewer positives</a:t>
+            </a:r>
+            <a:r>
+              <a:rPr sz="2200"/>
+              <a:t>. TPR and FPR </a:t>
+            </a:r>
+            <a:r>
+              <a:rPr lang="en-US" sz="2200"/>
+              <a:t>cannot increase. Move</a:t>
+            </a:r>
+            <a:r>
+              <a:rPr sz="2200"/>
+              <a:t> down/left toward (0, 0).</a:t>
+            </a:r>
+          </a:p>
+          <a:p>
+            <a:pPr marL="196446" indent="-196446" defTabSz="156458">
+              <a:lnSpc>
+                <a:spcPct val="105000"/>
+              </a:lnSpc>
+              <a:spcBef>
+                <a:spcPts val="0"/>
+              </a:spcBef>
+              <a:spcAft>
+                <a:spcPts val="1700"/>
+              </a:spcAft>
+              <a:defRPr sz="2464"/>
+            </a:pPr>
+            <a:r>
+              <a:rPr lang="en-US" sz="2200" b="1"/>
+              <a:t>Tradeoff:</a:t>
+            </a:r>
+            <a:r>
+              <a:rPr lang="en-US" sz="2200"/>
+              <a:t> Lower thresholds miss fewer positives but raise false alarms. Higher thresholds do the reverse.</a:t>
+            </a:r>
+          </a:p>
+        </p:txBody>
+      </p:sp>
+      <p:sp>
+        <p:nvSpPr>
+          <p:cNvPr id="594" name="TextBox 593"/>
+          <p:cNvSpPr txBox="1"/>
+          <p:nvPr/>
+        </p:nvSpPr>
+        <p:spPr>
+          <a:xfrm>
+            <a:off x="731520" y="5074920"/>
+            <a:ext cx="5715000" cy="960120"/>
+          </a:xfrm>
+          <a:prstGeom prst="rect">
+            <a:avLst/>
+          </a:prstGeom>
+          <a:noFill/>
+        </p:spPr>
+        <p:txBody>
+          <a:bodyPr wrap="square">
+            <a:spAutoFit/>
+          </a:bodyPr>
+          <a:lstStyle/>
+          <a:p>
+            <a:pPr>
+              <a:lnSpc>
+                <a:spcPct val="100000"/>
+              </a:lnSpc>
+              <a:spcAft>
+                <a:spcPts val="400"/>
+              </a:spcAft>
+              <a:buNone/>
+            </a:pPr>
+            <a:r>
+              <a:rPr sz="2000"/>
+              <a:t>TPR = sensitivity. FPR = 1 − specificity.</a:t>
+            </a:r>
+          </a:p>
+          <a:p>
+            <a:pPr>
+              <a:lnSpc>
+                <a:spcPct val="100000"/>
+              </a:lnSpc>
+              <a:spcAft>
+                <a:spcPts val="400"/>
+              </a:spcAft>
+              <a:buNone/>
+            </a:pPr>
+            <a:r>
+              <a:rPr sz="2000"/>
+              <a:t>AUC (area under the ROC curve) summarizes performance. 1 = perfect, 0.5 = random.</a:t>
             </a:r>
           </a:p>
         </p:txBody>
@@ -5077,7 +5284,13 @@
   <p:cSld>
     <p:spTree>
       <p:nvGrpSpPr>
-        <p:cNvPr id="1" name=""/>
+        <p:cNvPr id="1" name="">
+          <a:extLst>
+            <a:ext uri="{FF2B5EF4-FFF2-40B4-BE49-F238E27FC236}">
+              <a16:creationId xmlns:a16="http://schemas.microsoft.com/office/drawing/2014/main" id="{C0F5C874-3179-27A7-3C51-8CDA32FA6283}"/>
+            </a:ext>
+          </a:extLst>
+        </p:cNvPr>
         <p:cNvGrpSpPr/>
         <p:nvPr/>
       </p:nvGrpSpPr>
@@ -5091,7 +5304,13 @@
       </p:grpSpPr>
       <p:sp>
         <p:nvSpPr>
-          <p:cNvPr id="596" name="Function names"/>
+          <p:cNvPr id="591" name="Example ROC Curve">
+            <a:extLst>
+              <a:ext uri="{FF2B5EF4-FFF2-40B4-BE49-F238E27FC236}">
+                <a16:creationId xmlns:a16="http://schemas.microsoft.com/office/drawing/2014/main" id="{5F064997-FA39-43C4-B790-91661897DBE8}"/>
+              </a:ext>
+            </a:extLst>
+          </p:cNvPr>
           <p:cNvSpPr txBox="1">
             <a:spLocks noGrp="1"/>
           </p:cNvSpPr>
@@ -5100,391 +5319,87 @@
           </p:nvPr>
         </p:nvSpPr>
         <p:spPr>
+          <a:prstGeom prst="rect">
+            <a:avLst/>
+          </a:prstGeom>
+        </p:spPr>
+        <p:txBody>
+          <a:bodyPr/>
+          <a:lstStyle/>
+          <a:p>
+            <a:r>
+              <a:t>Example ROC Curve</a:t>
+            </a:r>
+          </a:p>
+        </p:txBody>
+      </p:sp>
+      <p:sp>
+        <p:nvSpPr>
+          <p:cNvPr id="3" name="Text Placeholder 2">
+            <a:extLst>
+              <a:ext uri="{FF2B5EF4-FFF2-40B4-BE49-F238E27FC236}">
+                <a16:creationId xmlns:a16="http://schemas.microsoft.com/office/drawing/2014/main" id="{76D189AC-0723-8E37-8665-DEF5ED3E4F21}"/>
+              </a:ext>
+            </a:extLst>
+          </p:cNvPr>
+          <p:cNvSpPr>
+            <a:spLocks noGrp="1"/>
+          </p:cNvSpPr>
+          <p:nvPr>
+            <p:ph type="body" idx="1"/>
+          </p:nvPr>
+        </p:nvSpPr>
+        <p:spPr/>
+        <p:txBody>
+          <a:bodyPr/>
+          <a:lstStyle/>
+          <a:p>
+            <a:endParaRPr lang="en-US"/>
+          </a:p>
+        </p:txBody>
+      </p:sp>
+      <p:pic>
+        <p:nvPicPr>
+          <p:cNvPr id="5" name="Picture 4">
+            <a:extLst>
+              <a:ext uri="{FF2B5EF4-FFF2-40B4-BE49-F238E27FC236}">
+                <a16:creationId xmlns:a16="http://schemas.microsoft.com/office/drawing/2014/main" id="{A62BD1A9-FCB3-0CB5-2058-9F285817DAFF}"/>
+              </a:ext>
+            </a:extLst>
+          </p:cNvPr>
+          <p:cNvPicPr>
+            <a:picLocks noChangeAspect="1"/>
+          </p:cNvPicPr>
+          <p:nvPr/>
+        </p:nvPicPr>
+        <p:blipFill>
+          <a:blip r:embed="rId2">
+            <a:extLst>
+              <a:ext uri="{28A0092B-C50C-407E-A947-70E740481C1C}">
+                <a14:useLocalDpi xmlns:a14="http://schemas.microsoft.com/office/drawing/2010/main" val="0"/>
+              </a:ext>
+            </a:extLst>
+          </a:blip>
+          <a:stretch>
+            <a:fillRect/>
+          </a:stretch>
+        </p:blipFill>
+        <p:spPr>
           <a:xfrm>
-            <a:off x="767358" y="776403"/>
-            <a:ext cx="8161734" cy="803673"/>
+            <a:off x="2846241" y="2221992"/>
+            <a:ext cx="5241628" cy="3958147"/>
           </a:xfrm>
           <a:prstGeom prst="rect">
             <a:avLst/>
           </a:prstGeom>
         </p:spPr>
-        <p:txBody>
-          <a:bodyPr/>
-          <a:lstStyle/>
-          <a:p>
-            <a:r>
-              <a:rPr dirty="0"/>
-              <a:t>Function names</a:t>
-            </a:r>
-          </a:p>
-        </p:txBody>
-      </p:sp>
-      <p:sp>
-        <p:nvSpPr>
-          <p:cNvPr id="597" name="accuracy_score(y_true, y_pred)  (default for many functions)…"/>
-          <p:cNvSpPr txBox="1">
-            <a:spLocks noGrp="1"/>
-          </p:cNvSpPr>
-          <p:nvPr>
-            <p:ph type="body" idx="1"/>
-          </p:nvPr>
-        </p:nvSpPr>
-        <p:spPr>
-          <a:xfrm>
-            <a:off x="1757958" y="1580076"/>
-            <a:ext cx="8161734" cy="4672878"/>
-          </a:xfrm>
-          <a:prstGeom prst="rect">
-            <a:avLst/>
-          </a:prstGeom>
-        </p:spPr>
-        <p:txBody>
-          <a:bodyPr>
-            <a:normAutofit fontScale="85000" lnSpcReduction="20000"/>
-          </a:bodyPr>
-          <a:lstStyle/>
-          <a:p>
-            <a:pPr marL="200911" indent="-200911" defTabSz="160014">
-              <a:spcBef>
-                <a:spcPts val="2039"/>
-              </a:spcBef>
-              <a:defRPr sz="2520">
-                <a:latin typeface="Courier New"/>
-                <a:ea typeface="Courier New"/>
-                <a:cs typeface="Courier New"/>
-                <a:sym typeface="Courier New"/>
-              </a:defRPr>
-            </a:pPr>
-            <a:r>
-              <a:rPr dirty="0" err="1"/>
-              <a:t>accuracy_score</a:t>
-            </a:r>
-            <a:r>
-              <a:rPr dirty="0"/>
-              <a:t>(</a:t>
-            </a:r>
-            <a:r>
-              <a:rPr dirty="0" err="1"/>
-              <a:t>y_true</a:t>
-            </a:r>
-            <a:r>
-              <a:rPr dirty="0"/>
-              <a:t>, </a:t>
-            </a:r>
-            <a:r>
-              <a:rPr dirty="0" err="1"/>
-              <a:t>y_pred</a:t>
-            </a:r>
-            <a:r>
-              <a:rPr dirty="0"/>
-              <a:t>) </a:t>
-            </a:r>
-            <a:br>
-              <a:rPr dirty="0"/>
-            </a:br>
-            <a:r>
-              <a:rPr dirty="0">
-                <a:latin typeface="Graphik"/>
-                <a:ea typeface="Graphik"/>
-                <a:cs typeface="Graphik"/>
-                <a:sym typeface="Graphik"/>
-              </a:rPr>
-              <a:t>(default for many functions)</a:t>
-            </a:r>
-          </a:p>
-          <a:p>
-            <a:pPr marL="200911" indent="-200911" defTabSz="160014">
-              <a:spcBef>
-                <a:spcPts val="2039"/>
-              </a:spcBef>
-              <a:defRPr sz="2520">
-                <a:latin typeface="Courier New"/>
-                <a:ea typeface="Courier New"/>
-                <a:cs typeface="Courier New"/>
-                <a:sym typeface="Courier New"/>
-              </a:defRPr>
-            </a:pPr>
-            <a:r>
-              <a:rPr dirty="0" err="1"/>
-              <a:t>classification_report</a:t>
-            </a:r>
-            <a:r>
-              <a:rPr dirty="0"/>
-              <a:t>(</a:t>
-            </a:r>
-            <a:r>
-              <a:rPr dirty="0" err="1"/>
-              <a:t>y_true</a:t>
-            </a:r>
-            <a:r>
-              <a:rPr dirty="0"/>
-              <a:t>, </a:t>
-            </a:r>
-            <a:r>
-              <a:rPr dirty="0" err="1"/>
-              <a:t>y_pred</a:t>
-            </a:r>
-            <a:r>
-              <a:rPr dirty="0"/>
-              <a:t>)</a:t>
-            </a:r>
-          </a:p>
-          <a:p>
-            <a:pPr marL="200911" indent="-200911" defTabSz="160014">
-              <a:spcBef>
-                <a:spcPts val="2039"/>
-              </a:spcBef>
-              <a:defRPr sz="2520">
-                <a:latin typeface="Courier New"/>
-                <a:ea typeface="Courier New"/>
-                <a:cs typeface="Courier New"/>
-                <a:sym typeface="Courier New"/>
-              </a:defRPr>
-            </a:pPr>
-            <a:r>
-              <a:rPr dirty="0" err="1"/>
-              <a:t>confusion_matrix</a:t>
-            </a:r>
-            <a:r>
-              <a:rPr dirty="0"/>
-              <a:t>(</a:t>
-            </a:r>
-            <a:r>
-              <a:rPr dirty="0" err="1"/>
-              <a:t>y_true</a:t>
-            </a:r>
-            <a:r>
-              <a:rPr dirty="0"/>
-              <a:t>, </a:t>
-            </a:r>
-            <a:r>
-              <a:rPr dirty="0" err="1"/>
-              <a:t>y_pred</a:t>
-            </a:r>
-            <a:r>
-              <a:rPr dirty="0"/>
-              <a:t>)</a:t>
-            </a:r>
-          </a:p>
-          <a:p>
-            <a:pPr marL="200911" indent="-200911" defTabSz="160014">
-              <a:spcBef>
-                <a:spcPts val="2039"/>
-              </a:spcBef>
-              <a:defRPr sz="2520">
-                <a:latin typeface="Courier New"/>
-                <a:ea typeface="Courier New"/>
-                <a:cs typeface="Courier New"/>
-                <a:sym typeface="Courier New"/>
-              </a:defRPr>
-            </a:pPr>
-            <a:r>
-              <a:rPr dirty="0"/>
-              <a:t>f1_score(</a:t>
-            </a:r>
-            <a:r>
-              <a:rPr dirty="0" err="1"/>
-              <a:t>y_true</a:t>
-            </a:r>
-            <a:r>
-              <a:rPr dirty="0"/>
-              <a:t>, </a:t>
-            </a:r>
-            <a:r>
-              <a:rPr dirty="0" err="1"/>
-              <a:t>y_pred</a:t>
-            </a:r>
-            <a:r>
-              <a:rPr dirty="0"/>
-              <a:t>)</a:t>
-            </a:r>
-          </a:p>
-          <a:p>
-            <a:pPr marL="200911" indent="-200911" defTabSz="160014">
-              <a:spcBef>
-                <a:spcPts val="2039"/>
-              </a:spcBef>
-              <a:defRPr sz="2520">
-                <a:latin typeface="Courier New"/>
-                <a:ea typeface="Courier New"/>
-                <a:cs typeface="Courier New"/>
-                <a:sym typeface="Courier New"/>
-              </a:defRPr>
-            </a:pPr>
-            <a:r>
-              <a:rPr dirty="0" err="1"/>
-              <a:t>precision_score</a:t>
-            </a:r>
-            <a:r>
-              <a:rPr dirty="0"/>
-              <a:t>(</a:t>
-            </a:r>
-            <a:r>
-              <a:rPr dirty="0" err="1"/>
-              <a:t>y_true</a:t>
-            </a:r>
-            <a:r>
-              <a:rPr dirty="0"/>
-              <a:t>, </a:t>
-            </a:r>
-            <a:r>
-              <a:rPr dirty="0" err="1"/>
-              <a:t>y_pred</a:t>
-            </a:r>
-            <a:r>
-              <a:rPr dirty="0"/>
-              <a:t>)</a:t>
-            </a:r>
-          </a:p>
-          <a:p>
-            <a:pPr marL="200911" indent="-200911" defTabSz="160014">
-              <a:spcBef>
-                <a:spcPts val="2039"/>
-              </a:spcBef>
-              <a:defRPr sz="2520">
-                <a:latin typeface="Courier New"/>
-                <a:ea typeface="Courier New"/>
-                <a:cs typeface="Courier New"/>
-                <a:sym typeface="Courier New"/>
-              </a:defRPr>
-            </a:pPr>
-            <a:r>
-              <a:rPr dirty="0" err="1"/>
-              <a:t>recall_score</a:t>
-            </a:r>
-            <a:r>
-              <a:rPr dirty="0"/>
-              <a:t>(</a:t>
-            </a:r>
-            <a:r>
-              <a:rPr dirty="0" err="1"/>
-              <a:t>y_true</a:t>
-            </a:r>
-            <a:r>
-              <a:rPr dirty="0"/>
-              <a:t>, </a:t>
-            </a:r>
-            <a:r>
-              <a:rPr dirty="0" err="1"/>
-              <a:t>y_pred</a:t>
-            </a:r>
-            <a:r>
-              <a:rPr dirty="0"/>
-              <a:t>)</a:t>
-            </a:r>
-          </a:p>
-          <a:p>
-            <a:pPr marL="200911" indent="-200911" defTabSz="160014">
-              <a:spcBef>
-                <a:spcPts val="2039"/>
-              </a:spcBef>
-              <a:defRPr sz="2520">
-                <a:latin typeface="Courier New"/>
-                <a:ea typeface="Courier New"/>
-                <a:cs typeface="Courier New"/>
-                <a:sym typeface="Courier New"/>
-              </a:defRPr>
-            </a:pPr>
-            <a:r>
-              <a:rPr dirty="0" err="1"/>
-              <a:t>roc_auc_score</a:t>
-            </a:r>
-            <a:r>
-              <a:rPr dirty="0"/>
-              <a:t>(</a:t>
-            </a:r>
-            <a:r>
-              <a:rPr dirty="0" err="1"/>
-              <a:t>y_true</a:t>
-            </a:r>
-            <a:r>
-              <a:rPr dirty="0"/>
-              <a:t>, </a:t>
-            </a:r>
-            <a:r>
-              <a:rPr b="1" dirty="0" err="1"/>
-              <a:t>y_score</a:t>
-            </a:r>
-            <a:r>
-              <a:rPr lang="en-US" b="1" dirty="0"/>
-              <a:t>) Note:(</a:t>
-            </a:r>
-            <a:r>
-              <a:rPr lang="en-US" dirty="0"/>
-              <a:t>The </a:t>
-            </a:r>
-            <a:r>
-              <a:rPr lang="en-US" dirty="0">
-                <a:latin typeface="Graphik"/>
-                <a:sym typeface="Graphik"/>
-              </a:rPr>
-              <a:t>s</a:t>
-            </a:r>
-            <a:r>
-              <a:rPr lang="en-US" dirty="0">
-                <a:latin typeface="Graphik"/>
-                <a:ea typeface="Graphik"/>
-                <a:cs typeface="Graphik"/>
-                <a:sym typeface="Graphik"/>
-              </a:rPr>
-              <a:t>econ</a:t>
-            </a:r>
-            <a:r>
-              <a:rPr dirty="0">
-                <a:latin typeface="Graphik"/>
-                <a:ea typeface="Graphik"/>
-                <a:cs typeface="Graphik"/>
-                <a:sym typeface="Graphik"/>
-              </a:rPr>
-              <a:t>d argument must be a score (e.g. probability) and not a class prediction</a:t>
-            </a:r>
-            <a:br>
-              <a:rPr dirty="0"/>
-            </a:br>
-            <a:endParaRPr dirty="0"/>
-          </a:p>
-        </p:txBody>
-      </p:sp>
-      <p:sp>
-        <p:nvSpPr>
-          <p:cNvPr id="598" name="https://scikit-learn.org/stable/api/sklearn.metrics.html#"/>
-          <p:cNvSpPr txBox="1"/>
-          <p:nvPr/>
-        </p:nvSpPr>
-        <p:spPr>
-          <a:xfrm>
-            <a:off x="2022259" y="1313143"/>
-            <a:ext cx="4026616" cy="266933"/>
-          </a:xfrm>
-          <a:prstGeom prst="rect">
-            <a:avLst/>
-          </a:prstGeom>
-          <a:ln w="3175">
-            <a:miter lim="400000"/>
-          </a:ln>
-          <a:extLst>
-            <a:ext uri="{C572A759-6A51-4108-AA02-DFA0A04FC94B}">
-              <ma14:wrappingTextBoxFlag xmlns="" xmlns:m="http://schemas.openxmlformats.org/officeDocument/2006/math" xmlns:a14="http://schemas.microsoft.com/office/drawing/2010/main" xmlns:ma14="http://schemas.microsoft.com/office/mac/drawingml/2011/main" val="1"/>
-            </a:ext>
-          </a:extLst>
-        </p:spPr>
-        <p:txBody>
-          <a:bodyPr wrap="none" lIns="35719" tIns="35719" rIns="35719" bIns="35719" anchor="ctr">
-            <a:spAutoFit/>
-          </a:bodyPr>
-          <a:lstStyle/>
-          <a:p>
-            <a:r>
-              <a:rPr sz="1266">
-                <a:hlinkClick r:id="rId2"/>
-              </a:rPr>
-              <a:t>https://scikit-learn.org/stable/api/sklearn.metrics.html#</a:t>
-            </a:r>
-            <a:endParaRPr sz="1266"/>
-          </a:p>
-        </p:txBody>
-      </p:sp>
+      </p:pic>
     </p:spTree>
+    <p:extLst>
+      <p:ext uri="{BB962C8B-B14F-4D97-AF65-F5344CB8AC3E}">
+        <p14:creationId xmlns:p14="http://schemas.microsoft.com/office/powerpoint/2010/main" val="2582527076"/>
+      </p:ext>
+    </p:extLst>
   </p:cSld>
   <p:clrMapOvr>
     <a:masterClrMapping/>
@@ -5512,7 +5427,13 @@
       </p:grpSpPr>
       <p:sp>
         <p:nvSpPr>
-          <p:cNvPr id="601" name=".predict() vs .predict_proba()"/>
+          <p:cNvPr id="591" name="Example ROC Curve">
+            <a:extLst>
+              <a:ext uri="{FF2B5EF4-FFF2-40B4-BE49-F238E27FC236}">
+                <a16:creationId xmlns:a16="http://schemas.microsoft.com/office/drawing/2014/main" id="{5F064997-FA39-43C4-B790-91661897DBE8}"/>
+              </a:ext>
+            </a:extLst>
+          </p:cNvPr>
           <p:cNvSpPr txBox="1">
             <a:spLocks noGrp="1"/>
           </p:cNvSpPr>
@@ -5526,65 +5447,1064 @@
           </a:prstGeom>
         </p:spPr>
         <p:txBody>
-          <a:bodyPr>
-            <a:normAutofit fontScale="90000"/>
+          <a:bodyPr/>
+          <a:lstStyle/>
+          <a:p>
+            <a:r>
+              <a:rPr dirty="0"/>
+              <a:t>Thresholds and ROC</a:t>
+            </a:r>
+          </a:p>
+        </p:txBody>
+      </p:sp>
+      <p:sp>
+        <p:nvSpPr>
+          <p:cNvPr id="592" name="TextBox 591"/>
+          <p:cNvSpPr txBox="1"/>
+          <p:nvPr/>
+        </p:nvSpPr>
+        <p:spPr>
+          <a:xfrm>
+            <a:off x="804672" y="1691640"/>
+            <a:ext cx="10515600" cy="697627"/>
+          </a:xfrm>
+          <a:prstGeom prst="rect">
+            <a:avLst/>
+          </a:prstGeom>
+          <a:noFill/>
+        </p:spPr>
+        <p:txBody>
+          <a:bodyPr wrap="square" lIns="0" tIns="0" rIns="0" bIns="0">
+            <a:spAutoFit/>
           </a:bodyPr>
           <a:lstStyle/>
           <a:p>
-            <a:pPr defTabSz="160729">
-              <a:defRPr sz="5400" spc="-53"/>
+            <a:pPr>
+              <a:spcAft>
+                <a:spcPts val="400"/>
+              </a:spcAft>
             </a:pPr>
             <a:r>
-              <a:rPr dirty="0">
-                <a:latin typeface="Courier New"/>
-                <a:ea typeface="Courier New"/>
-                <a:cs typeface="Courier New"/>
-                <a:sym typeface="Courier New"/>
+              <a:rPr lang="en-US" sz="2100" b="0" dirty="0">
+                <a:solidFill>
+                  <a:srgbClr val="000000"/>
+                </a:solidFill>
+                <a:latin typeface="+mn-lt"/>
               </a:rPr>
-              <a:t>.predict()</a:t>
-            </a:r>
-            <a:r>
-              <a:rPr dirty="0"/>
-              <a:t> vs </a:t>
-            </a:r>
-            <a:r>
-              <a:rPr dirty="0">
-                <a:latin typeface="Courier New"/>
-                <a:ea typeface="Courier New"/>
-                <a:cs typeface="Courier New"/>
-                <a:sym typeface="Courier New"/>
+              <a:t>Example: same ranking, different probabilities. Predict positive if P(+) &gt; t.</a:t>
+            </a:r>
+          </a:p>
+          <a:p>
+            <a:pPr>
+              <a:spcAft>
+                <a:spcPts val="400"/>
+              </a:spcAft>
+            </a:pPr>
+            <a:r>
+              <a:rPr lang="en-US" sz="2100" dirty="0">
+                <a:solidFill>
+                  <a:srgbClr val="000000"/>
+                </a:solidFill>
               </a:rPr>
-              <a:t>.</a:t>
-            </a:r>
-            <a:r>
-              <a:rPr dirty="0" err="1">
-                <a:latin typeface="Courier New"/>
-                <a:ea typeface="Courier New"/>
-                <a:cs typeface="Courier New"/>
-                <a:sym typeface="Courier New"/>
+              <a:t>Compare and contrast these models.</a:t>
+            </a:r>
+            <a:endParaRPr lang="en-US" sz="2100" b="0" dirty="0">
+              <a:solidFill>
+                <a:srgbClr val="000000"/>
+              </a:solidFill>
+              <a:latin typeface="+mn-lt"/>
+            </a:endParaRPr>
+          </a:p>
+        </p:txBody>
+      </p:sp>
+      <p:sp>
+        <p:nvSpPr>
+          <p:cNvPr id="593" name="TextBox 592"/>
+          <p:cNvSpPr txBox="1"/>
+          <p:nvPr/>
+        </p:nvSpPr>
+        <p:spPr>
+          <a:xfrm>
+            <a:off x="2061972" y="2792045"/>
+            <a:ext cx="2971800" cy="307777"/>
+          </a:xfrm>
+          <a:prstGeom prst="rect">
+            <a:avLst/>
+          </a:prstGeom>
+          <a:noFill/>
+        </p:spPr>
+        <p:txBody>
+          <a:bodyPr wrap="square" lIns="0" tIns="0" rIns="0" bIns="0">
+            <a:spAutoFit/>
+          </a:bodyPr>
+          <a:lstStyle/>
+          <a:p>
+            <a:pPr>
+              <a:spcAft>
+                <a:spcPts val="400"/>
+              </a:spcAft>
+            </a:pPr>
+            <a:r>
+              <a:rPr sz="2000" b="1">
+                <a:solidFill>
+                  <a:srgbClr val="BA6500"/>
+                </a:solidFill>
+                <a:latin typeface="+mn-lt"/>
               </a:rPr>
-              <a:t>predict_proba</a:t>
-            </a:r>
-            <a:r>
-              <a:rPr dirty="0">
-                <a:latin typeface="Courier New"/>
-                <a:ea typeface="Courier New"/>
-                <a:cs typeface="Courier New"/>
-                <a:sym typeface="Courier New"/>
+              <a:t>A. </a:t>
+            </a:r>
+            <a:r>
+              <a:rPr lang="en-US" sz="2000" b="1">
+                <a:solidFill>
+                  <a:srgbClr val="BA6500"/>
+                </a:solidFill>
+                <a:latin typeface="+mn-lt"/>
               </a:rPr>
-              <a:t>()</a:t>
-            </a:r>
-          </a:p>
-        </p:txBody>
-      </p:sp>
-      <p:sp>
-        <p:nvSpPr>
-          <p:cNvPr id="602" name="For classification estimators, there are two ways to product predictions…"/>
+              <a:t>Scores near 0.5</a:t>
+            </a:r>
+            <a:endParaRPr sz="2000" b="1">
+              <a:solidFill>
+                <a:srgbClr val="BA6500"/>
+              </a:solidFill>
+              <a:latin typeface="+mn-lt"/>
+            </a:endParaRPr>
+          </a:p>
+        </p:txBody>
+      </p:sp>
+      <p:sp>
+        <p:nvSpPr>
+          <p:cNvPr id="594" name="TextBox 593"/>
+          <p:cNvSpPr txBox="1"/>
+          <p:nvPr/>
+        </p:nvSpPr>
+        <p:spPr>
+          <a:xfrm>
+            <a:off x="5207508" y="2792045"/>
+            <a:ext cx="2971800" cy="307777"/>
+          </a:xfrm>
+          <a:prstGeom prst="rect">
+            <a:avLst/>
+          </a:prstGeom>
+          <a:noFill/>
+        </p:spPr>
+        <p:txBody>
+          <a:bodyPr wrap="square" lIns="0" tIns="0" rIns="0" bIns="0">
+            <a:spAutoFit/>
+          </a:bodyPr>
+          <a:lstStyle/>
+          <a:p>
+            <a:pPr>
+              <a:spcAft>
+                <a:spcPts val="400"/>
+              </a:spcAft>
+            </a:pPr>
+            <a:r>
+              <a:rPr sz="2000" b="1">
+                <a:solidFill>
+                  <a:srgbClr val="17659A"/>
+                </a:solidFill>
+                <a:latin typeface="+mn-lt"/>
+              </a:rPr>
+              <a:t>B. Nearly binary</a:t>
+            </a:r>
+          </a:p>
+        </p:txBody>
+      </p:sp>
+      <p:graphicFrame>
+        <p:nvGraphicFramePr>
+          <p:cNvPr id="595" name="Table 594"/>
+          <p:cNvGraphicFramePr>
+            <a:graphicFrameLocks noGrp="1"/>
+          </p:cNvGraphicFramePr>
+          <p:nvPr>
+            <p:extLst>
+              <p:ext uri="{D42A27DB-BD31-4B8C-83A1-F6EECF244321}">
+                <p14:modId xmlns:p14="http://schemas.microsoft.com/office/powerpoint/2010/main" val="313143056"/>
+              </p:ext>
+            </p:extLst>
+          </p:nvPr>
+        </p:nvGraphicFramePr>
+        <p:xfrm>
+          <a:off x="2061972" y="3249245"/>
+          <a:ext cx="2907791" cy="1676400"/>
+        </p:xfrm>
+        <a:graphic>
+          <a:graphicData uri="http://schemas.openxmlformats.org/drawingml/2006/table">
+            <a:tbl>
+              <a:tblPr firstRow="1" bandRow="1">
+                <a:tableStyleId>{5C22544A-7EE6-4342-B048-85BDC9FD1C3A}</a:tableStyleId>
+              </a:tblPr>
+              <a:tblGrid>
+                <a:gridCol w="640080">
+                  <a:extLst>
+                    <a:ext uri="{9D8B030D-6E8A-4147-A177-3AD203B41FA5}">
+                      <a16:colId xmlns:a16="http://schemas.microsoft.com/office/drawing/2014/main" val="20000"/>
+                    </a:ext>
+                  </a:extLst>
+                </a:gridCol>
+                <a:gridCol w="1234440">
+                  <a:extLst>
+                    <a:ext uri="{9D8B030D-6E8A-4147-A177-3AD203B41FA5}">
+                      <a16:colId xmlns:a16="http://schemas.microsoft.com/office/drawing/2014/main" val="20001"/>
+                    </a:ext>
+                  </a:extLst>
+                </a:gridCol>
+                <a:gridCol w="1033271">
+                  <a:extLst>
+                    <a:ext uri="{9D8B030D-6E8A-4147-A177-3AD203B41FA5}">
+                      <a16:colId xmlns:a16="http://schemas.microsoft.com/office/drawing/2014/main" val="20002"/>
+                    </a:ext>
+                  </a:extLst>
+                </a:gridCol>
+              </a:tblGrid>
+              <a:tr h="332841">
+                <a:tc>
+                  <a:txBody>
+                    <a:bodyPr/>
+                    <a:lstStyle/>
+                    <a:p>
+                      <a:pPr algn="ctr"/>
+                      <a:r>
+                        <a:rPr sz="1900" b="1">
+                          <a:solidFill>
+                            <a:srgbClr val="000000"/>
+                          </a:solidFill>
+                          <a:latin typeface="+mn-lt"/>
+                        </a:rPr>
+                        <a:t>Case</a:t>
+                      </a:r>
+                    </a:p>
+                  </a:txBody>
+                  <a:tcPr marL="27432" marR="27432" marT="22860" marB="22860" anchor="ctr">
+                    <a:solidFill>
+                      <a:srgbClr val="EEEEEE"/>
+                    </a:solidFill>
+                  </a:tcPr>
+                </a:tc>
+                <a:tc>
+                  <a:txBody>
+                    <a:bodyPr/>
+                    <a:lstStyle/>
+                    <a:p>
+                      <a:pPr algn="ctr"/>
+                      <a:r>
+                        <a:rPr sz="1900" b="1">
+                          <a:solidFill>
+                            <a:srgbClr val="000000"/>
+                          </a:solidFill>
+                          <a:latin typeface="+mn-lt"/>
+                        </a:rPr>
+                        <a:t>True class</a:t>
+                      </a:r>
+                    </a:p>
+                  </a:txBody>
+                  <a:tcPr marL="27432" marR="27432" marT="22860" marB="22860" anchor="ctr">
+                    <a:solidFill>
+                      <a:srgbClr val="EEEEEE"/>
+                    </a:solidFill>
+                  </a:tcPr>
+                </a:tc>
+                <a:tc>
+                  <a:txBody>
+                    <a:bodyPr/>
+                    <a:lstStyle/>
+                    <a:p>
+                      <a:pPr algn="ctr"/>
+                      <a:r>
+                        <a:rPr sz="1900" b="1">
+                          <a:solidFill>
+                            <a:srgbClr val="000000"/>
+                          </a:solidFill>
+                          <a:latin typeface="+mn-lt"/>
+                        </a:rPr>
+                        <a:t>P(+)</a:t>
+                      </a:r>
+                    </a:p>
+                  </a:txBody>
+                  <a:tcPr marL="27432" marR="27432" marT="22860" marB="22860" anchor="ctr">
+                    <a:solidFill>
+                      <a:srgbClr val="EEEEEE"/>
+                    </a:solidFill>
+                  </a:tcPr>
+                </a:tc>
+                <a:extLst>
+                  <a:ext uri="{0D108BD9-81ED-4DB2-BD59-A6C34878D82A}">
+                    <a16:rowId xmlns:a16="http://schemas.microsoft.com/office/drawing/2014/main" val="10000"/>
+                  </a:ext>
+                </a:extLst>
+              </a:tr>
+              <a:tr h="332841">
+                <a:tc>
+                  <a:txBody>
+                    <a:bodyPr/>
+                    <a:lstStyle/>
+                    <a:p>
+                      <a:pPr algn="ctr"/>
+                      <a:r>
+                        <a:rPr sz="1900" b="0">
+                          <a:solidFill>
+                            <a:srgbClr val="000000"/>
+                          </a:solidFill>
+                          <a:latin typeface="+mn-lt"/>
+                        </a:rPr>
+                        <a:t>1</a:t>
+                      </a:r>
+                    </a:p>
+                  </a:txBody>
+                  <a:tcPr marL="27432" marR="27432" marT="22860" marB="22860" anchor="ctr">
+                    <a:solidFill>
+                      <a:srgbClr val="FFFFFF"/>
+                    </a:solidFill>
+                  </a:tcPr>
+                </a:tc>
+                <a:tc>
+                  <a:txBody>
+                    <a:bodyPr/>
+                    <a:lstStyle/>
+                    <a:p>
+                      <a:pPr algn="ctr"/>
+                      <a:r>
+                        <a:rPr sz="1900" b="0">
+                          <a:solidFill>
+                            <a:srgbClr val="000000"/>
+                          </a:solidFill>
+                          <a:latin typeface="+mn-lt"/>
+                        </a:rPr>
+                        <a:t>+</a:t>
+                      </a:r>
+                    </a:p>
+                  </a:txBody>
+                  <a:tcPr marL="27432" marR="27432" marT="22860" marB="22860" anchor="ctr">
+                    <a:solidFill>
+                      <a:srgbClr val="FFFFFF"/>
+                    </a:solidFill>
+                  </a:tcPr>
+                </a:tc>
+                <a:tc>
+                  <a:txBody>
+                    <a:bodyPr/>
+                    <a:lstStyle/>
+                    <a:p>
+                      <a:pPr algn="ctr"/>
+                      <a:r>
+                        <a:rPr lang="en-US" sz="1900" b="0" dirty="0">
+                          <a:solidFill>
+                            <a:srgbClr val="000000"/>
+                          </a:solidFill>
+                          <a:latin typeface="+mn-lt"/>
+                        </a:rPr>
+                        <a:t>0.52</a:t>
+                      </a:r>
+                    </a:p>
+                  </a:txBody>
+                  <a:tcPr marL="27432" marR="27432" marT="22860" marB="22860" anchor="ctr">
+                    <a:solidFill>
+                      <a:srgbClr val="FFFFFF"/>
+                    </a:solidFill>
+                  </a:tcPr>
+                </a:tc>
+                <a:extLst>
+                  <a:ext uri="{0D108BD9-81ED-4DB2-BD59-A6C34878D82A}">
+                    <a16:rowId xmlns:a16="http://schemas.microsoft.com/office/drawing/2014/main" val="10001"/>
+                  </a:ext>
+                </a:extLst>
+              </a:tr>
+              <a:tr h="332841">
+                <a:tc>
+                  <a:txBody>
+                    <a:bodyPr/>
+                    <a:lstStyle/>
+                    <a:p>
+                      <a:pPr algn="ctr"/>
+                      <a:r>
+                        <a:rPr sz="1900" b="0">
+                          <a:solidFill>
+                            <a:srgbClr val="000000"/>
+                          </a:solidFill>
+                          <a:latin typeface="+mn-lt"/>
+                        </a:rPr>
+                        <a:t>2</a:t>
+                      </a:r>
+                    </a:p>
+                  </a:txBody>
+                  <a:tcPr marL="27432" marR="27432" marT="22860" marB="22860" anchor="ctr">
+                    <a:solidFill>
+                      <a:srgbClr val="FFFFFF"/>
+                    </a:solidFill>
+                  </a:tcPr>
+                </a:tc>
+                <a:tc>
+                  <a:txBody>
+                    <a:bodyPr/>
+                    <a:lstStyle/>
+                    <a:p>
+                      <a:pPr algn="ctr"/>
+                      <a:r>
+                        <a:rPr sz="1900" b="0">
+                          <a:solidFill>
+                            <a:srgbClr val="000000"/>
+                          </a:solidFill>
+                          <a:latin typeface="+mn-lt"/>
+                        </a:rPr>
+                        <a:t>+</a:t>
+                      </a:r>
+                    </a:p>
+                  </a:txBody>
+                  <a:tcPr marL="27432" marR="27432" marT="22860" marB="22860" anchor="ctr">
+                    <a:solidFill>
+                      <a:srgbClr val="FFFFFF"/>
+                    </a:solidFill>
+                  </a:tcPr>
+                </a:tc>
+                <a:tc>
+                  <a:txBody>
+                    <a:bodyPr/>
+                    <a:lstStyle/>
+                    <a:p>
+                      <a:pPr algn="ctr"/>
+                      <a:r>
+                        <a:rPr lang="en-US" sz="1900" b="0">
+                          <a:solidFill>
+                            <a:srgbClr val="000000"/>
+                          </a:solidFill>
+                          <a:latin typeface="+mn-lt"/>
+                        </a:rPr>
+                        <a:t>0.51</a:t>
+                      </a:r>
+                    </a:p>
+                  </a:txBody>
+                  <a:tcPr marL="27432" marR="27432" marT="22860" marB="22860" anchor="ctr">
+                    <a:solidFill>
+                      <a:srgbClr val="FFFFFF"/>
+                    </a:solidFill>
+                  </a:tcPr>
+                </a:tc>
+                <a:extLst>
+                  <a:ext uri="{0D108BD9-81ED-4DB2-BD59-A6C34878D82A}">
+                    <a16:rowId xmlns:a16="http://schemas.microsoft.com/office/drawing/2014/main" val="10002"/>
+                  </a:ext>
+                </a:extLst>
+              </a:tr>
+              <a:tr h="332841">
+                <a:tc>
+                  <a:txBody>
+                    <a:bodyPr/>
+                    <a:lstStyle/>
+                    <a:p>
+                      <a:pPr algn="ctr"/>
+                      <a:r>
+                        <a:rPr sz="1900" b="0">
+                          <a:solidFill>
+                            <a:srgbClr val="000000"/>
+                          </a:solidFill>
+                          <a:latin typeface="+mn-lt"/>
+                        </a:rPr>
+                        <a:t>3</a:t>
+                      </a:r>
+                    </a:p>
+                  </a:txBody>
+                  <a:tcPr marL="27432" marR="27432" marT="22860" marB="22860" anchor="ctr">
+                    <a:solidFill>
+                      <a:srgbClr val="FFFFFF"/>
+                    </a:solidFill>
+                  </a:tcPr>
+                </a:tc>
+                <a:tc>
+                  <a:txBody>
+                    <a:bodyPr/>
+                    <a:lstStyle/>
+                    <a:p>
+                      <a:pPr algn="ctr"/>
+                      <a:r>
+                        <a:rPr sz="1900" b="0">
+                          <a:solidFill>
+                            <a:srgbClr val="000000"/>
+                          </a:solidFill>
+                          <a:latin typeface="+mn-lt"/>
+                        </a:rPr>
+                        <a:t>−</a:t>
+                      </a:r>
+                    </a:p>
+                  </a:txBody>
+                  <a:tcPr marL="27432" marR="27432" marT="22860" marB="22860" anchor="ctr">
+                    <a:solidFill>
+                      <a:srgbClr val="FFFFFF"/>
+                    </a:solidFill>
+                  </a:tcPr>
+                </a:tc>
+                <a:tc>
+                  <a:txBody>
+                    <a:bodyPr/>
+                    <a:lstStyle/>
+                    <a:p>
+                      <a:pPr algn="ctr"/>
+                      <a:r>
+                        <a:rPr lang="en-US" sz="1900" b="0">
+                          <a:solidFill>
+                            <a:srgbClr val="000000"/>
+                          </a:solidFill>
+                          <a:latin typeface="+mn-lt"/>
+                        </a:rPr>
+                        <a:t>0.49</a:t>
+                      </a:r>
+                    </a:p>
+                  </a:txBody>
+                  <a:tcPr marL="27432" marR="27432" marT="22860" marB="22860" anchor="ctr">
+                    <a:solidFill>
+                      <a:srgbClr val="FFFFFF"/>
+                    </a:solidFill>
+                  </a:tcPr>
+                </a:tc>
+                <a:extLst>
+                  <a:ext uri="{0D108BD9-81ED-4DB2-BD59-A6C34878D82A}">
+                    <a16:rowId xmlns:a16="http://schemas.microsoft.com/office/drawing/2014/main" val="10003"/>
+                  </a:ext>
+                </a:extLst>
+              </a:tr>
+              <a:tr h="332844">
+                <a:tc>
+                  <a:txBody>
+                    <a:bodyPr/>
+                    <a:lstStyle/>
+                    <a:p>
+                      <a:pPr algn="ctr"/>
+                      <a:r>
+                        <a:rPr sz="1900" b="0">
+                          <a:solidFill>
+                            <a:srgbClr val="000000"/>
+                          </a:solidFill>
+                          <a:latin typeface="+mn-lt"/>
+                        </a:rPr>
+                        <a:t>4</a:t>
+                      </a:r>
+                    </a:p>
+                  </a:txBody>
+                  <a:tcPr marL="27432" marR="27432" marT="22860" marB="22860" anchor="ctr">
+                    <a:solidFill>
+                      <a:srgbClr val="FFFFFF"/>
+                    </a:solidFill>
+                  </a:tcPr>
+                </a:tc>
+                <a:tc>
+                  <a:txBody>
+                    <a:bodyPr/>
+                    <a:lstStyle/>
+                    <a:p>
+                      <a:pPr algn="ctr"/>
+                      <a:r>
+                        <a:rPr sz="1900" b="0">
+                          <a:solidFill>
+                            <a:srgbClr val="000000"/>
+                          </a:solidFill>
+                          <a:latin typeface="+mn-lt"/>
+                        </a:rPr>
+                        <a:t>−</a:t>
+                      </a:r>
+                    </a:p>
+                  </a:txBody>
+                  <a:tcPr marL="27432" marR="27432" marT="22860" marB="22860" anchor="ctr">
+                    <a:solidFill>
+                      <a:srgbClr val="FFFFFF"/>
+                    </a:solidFill>
+                  </a:tcPr>
+                </a:tc>
+                <a:tc>
+                  <a:txBody>
+                    <a:bodyPr/>
+                    <a:lstStyle/>
+                    <a:p>
+                      <a:pPr algn="ctr"/>
+                      <a:r>
+                        <a:rPr lang="en-US" sz="1900" b="0" dirty="0">
+                          <a:solidFill>
+                            <a:srgbClr val="000000"/>
+                          </a:solidFill>
+                          <a:latin typeface="+mn-lt"/>
+                        </a:rPr>
+                        <a:t>0.48</a:t>
+                      </a:r>
+                    </a:p>
+                  </a:txBody>
+                  <a:tcPr marL="27432" marR="27432" marT="22860" marB="22860" anchor="ctr">
+                    <a:solidFill>
+                      <a:srgbClr val="FFFFFF"/>
+                    </a:solidFill>
+                  </a:tcPr>
+                </a:tc>
+                <a:extLst>
+                  <a:ext uri="{0D108BD9-81ED-4DB2-BD59-A6C34878D82A}">
+                    <a16:rowId xmlns:a16="http://schemas.microsoft.com/office/drawing/2014/main" val="10004"/>
+                  </a:ext>
+                </a:extLst>
+              </a:tr>
+            </a:tbl>
+          </a:graphicData>
+        </a:graphic>
+      </p:graphicFrame>
+      <p:graphicFrame>
+        <p:nvGraphicFramePr>
+          <p:cNvPr id="597" name="Table 596"/>
+          <p:cNvGraphicFramePr>
+            <a:graphicFrameLocks noGrp="1"/>
+          </p:cNvGraphicFramePr>
+          <p:nvPr>
+            <p:extLst>
+              <p:ext uri="{D42A27DB-BD31-4B8C-83A1-F6EECF244321}">
+                <p14:modId xmlns:p14="http://schemas.microsoft.com/office/powerpoint/2010/main" val="2040210677"/>
+              </p:ext>
+            </p:extLst>
+          </p:nvPr>
+        </p:nvGraphicFramePr>
+        <p:xfrm>
+          <a:off x="5207508" y="3249245"/>
+          <a:ext cx="2907791" cy="1676400"/>
+        </p:xfrm>
+        <a:graphic>
+          <a:graphicData uri="http://schemas.openxmlformats.org/drawingml/2006/table">
+            <a:tbl>
+              <a:tblPr firstRow="1" bandRow="1">
+                <a:tableStyleId>{5C22544A-7EE6-4342-B048-85BDC9FD1C3A}</a:tableStyleId>
+              </a:tblPr>
+              <a:tblGrid>
+                <a:gridCol w="640080">
+                  <a:extLst>
+                    <a:ext uri="{9D8B030D-6E8A-4147-A177-3AD203B41FA5}">
+                      <a16:colId xmlns:a16="http://schemas.microsoft.com/office/drawing/2014/main" val="20000"/>
+                    </a:ext>
+                  </a:extLst>
+                </a:gridCol>
+                <a:gridCol w="1234440">
+                  <a:extLst>
+                    <a:ext uri="{9D8B030D-6E8A-4147-A177-3AD203B41FA5}">
+                      <a16:colId xmlns:a16="http://schemas.microsoft.com/office/drawing/2014/main" val="20001"/>
+                    </a:ext>
+                  </a:extLst>
+                </a:gridCol>
+                <a:gridCol w="1033271">
+                  <a:extLst>
+                    <a:ext uri="{9D8B030D-6E8A-4147-A177-3AD203B41FA5}">
+                      <a16:colId xmlns:a16="http://schemas.microsoft.com/office/drawing/2014/main" val="20002"/>
+                    </a:ext>
+                  </a:extLst>
+                </a:gridCol>
+              </a:tblGrid>
+              <a:tr h="332841">
+                <a:tc>
+                  <a:txBody>
+                    <a:bodyPr/>
+                    <a:lstStyle/>
+                    <a:p>
+                      <a:pPr algn="ctr"/>
+                      <a:r>
+                        <a:rPr sz="1900" b="1">
+                          <a:solidFill>
+                            <a:srgbClr val="000000"/>
+                          </a:solidFill>
+                          <a:latin typeface="+mn-lt"/>
+                        </a:rPr>
+                        <a:t>Case</a:t>
+                      </a:r>
+                    </a:p>
+                  </a:txBody>
+                  <a:tcPr marL="27432" marR="27432" marT="22860" marB="22860" anchor="ctr">
+                    <a:solidFill>
+                      <a:srgbClr val="EEEEEE"/>
+                    </a:solidFill>
+                  </a:tcPr>
+                </a:tc>
+                <a:tc>
+                  <a:txBody>
+                    <a:bodyPr/>
+                    <a:lstStyle/>
+                    <a:p>
+                      <a:pPr algn="ctr"/>
+                      <a:r>
+                        <a:rPr sz="1900" b="1">
+                          <a:solidFill>
+                            <a:srgbClr val="000000"/>
+                          </a:solidFill>
+                          <a:latin typeface="+mn-lt"/>
+                        </a:rPr>
+                        <a:t>True class</a:t>
+                      </a:r>
+                    </a:p>
+                  </a:txBody>
+                  <a:tcPr marL="27432" marR="27432" marT="22860" marB="22860" anchor="ctr">
+                    <a:solidFill>
+                      <a:srgbClr val="EEEEEE"/>
+                    </a:solidFill>
+                  </a:tcPr>
+                </a:tc>
+                <a:tc>
+                  <a:txBody>
+                    <a:bodyPr/>
+                    <a:lstStyle/>
+                    <a:p>
+                      <a:pPr algn="ctr"/>
+                      <a:r>
+                        <a:rPr sz="1900" b="1">
+                          <a:solidFill>
+                            <a:srgbClr val="000000"/>
+                          </a:solidFill>
+                          <a:latin typeface="+mn-lt"/>
+                        </a:rPr>
+                        <a:t>P(+)</a:t>
+                      </a:r>
+                    </a:p>
+                  </a:txBody>
+                  <a:tcPr marL="27432" marR="27432" marT="22860" marB="22860" anchor="ctr">
+                    <a:solidFill>
+                      <a:srgbClr val="EEEEEE"/>
+                    </a:solidFill>
+                  </a:tcPr>
+                </a:tc>
+                <a:extLst>
+                  <a:ext uri="{0D108BD9-81ED-4DB2-BD59-A6C34878D82A}">
+                    <a16:rowId xmlns:a16="http://schemas.microsoft.com/office/drawing/2014/main" val="10000"/>
+                  </a:ext>
+                </a:extLst>
+              </a:tr>
+              <a:tr h="332841">
+                <a:tc>
+                  <a:txBody>
+                    <a:bodyPr/>
+                    <a:lstStyle/>
+                    <a:p>
+                      <a:pPr algn="ctr"/>
+                      <a:r>
+                        <a:rPr sz="1900" b="0">
+                          <a:solidFill>
+                            <a:srgbClr val="000000"/>
+                          </a:solidFill>
+                          <a:latin typeface="+mn-lt"/>
+                        </a:rPr>
+                        <a:t>1</a:t>
+                      </a:r>
+                    </a:p>
+                  </a:txBody>
+                  <a:tcPr marL="27432" marR="27432" marT="22860" marB="22860" anchor="ctr">
+                    <a:solidFill>
+                      <a:srgbClr val="FFFFFF"/>
+                    </a:solidFill>
+                  </a:tcPr>
+                </a:tc>
+                <a:tc>
+                  <a:txBody>
+                    <a:bodyPr/>
+                    <a:lstStyle/>
+                    <a:p>
+                      <a:pPr algn="ctr"/>
+                      <a:r>
+                        <a:rPr sz="1900" b="0">
+                          <a:solidFill>
+                            <a:srgbClr val="000000"/>
+                          </a:solidFill>
+                          <a:latin typeface="+mn-lt"/>
+                        </a:rPr>
+                        <a:t>+</a:t>
+                      </a:r>
+                    </a:p>
+                  </a:txBody>
+                  <a:tcPr marL="27432" marR="27432" marT="22860" marB="22860" anchor="ctr">
+                    <a:solidFill>
+                      <a:srgbClr val="FFFFFF"/>
+                    </a:solidFill>
+                  </a:tcPr>
+                </a:tc>
+                <a:tc>
+                  <a:txBody>
+                    <a:bodyPr/>
+                    <a:lstStyle/>
+                    <a:p>
+                      <a:pPr algn="ctr"/>
+                      <a:r>
+                        <a:rPr sz="1900" b="0">
+                          <a:solidFill>
+                            <a:srgbClr val="000000"/>
+                          </a:solidFill>
+                          <a:latin typeface="+mn-lt"/>
+                        </a:rPr>
+                        <a:t>0.95</a:t>
+                      </a:r>
+                    </a:p>
+                  </a:txBody>
+                  <a:tcPr marL="27432" marR="27432" marT="22860" marB="22860" anchor="ctr">
+                    <a:solidFill>
+                      <a:srgbClr val="FFFFFF"/>
+                    </a:solidFill>
+                  </a:tcPr>
+                </a:tc>
+                <a:extLst>
+                  <a:ext uri="{0D108BD9-81ED-4DB2-BD59-A6C34878D82A}">
+                    <a16:rowId xmlns:a16="http://schemas.microsoft.com/office/drawing/2014/main" val="10001"/>
+                  </a:ext>
+                </a:extLst>
+              </a:tr>
+              <a:tr h="332841">
+                <a:tc>
+                  <a:txBody>
+                    <a:bodyPr/>
+                    <a:lstStyle/>
+                    <a:p>
+                      <a:pPr algn="ctr"/>
+                      <a:r>
+                        <a:rPr sz="1900" b="0">
+                          <a:solidFill>
+                            <a:srgbClr val="000000"/>
+                          </a:solidFill>
+                          <a:latin typeface="+mn-lt"/>
+                        </a:rPr>
+                        <a:t>2</a:t>
+                      </a:r>
+                    </a:p>
+                  </a:txBody>
+                  <a:tcPr marL="27432" marR="27432" marT="22860" marB="22860" anchor="ctr">
+                    <a:solidFill>
+                      <a:srgbClr val="FFFFFF"/>
+                    </a:solidFill>
+                  </a:tcPr>
+                </a:tc>
+                <a:tc>
+                  <a:txBody>
+                    <a:bodyPr/>
+                    <a:lstStyle/>
+                    <a:p>
+                      <a:pPr algn="ctr"/>
+                      <a:r>
+                        <a:rPr sz="1900" b="0">
+                          <a:solidFill>
+                            <a:srgbClr val="000000"/>
+                          </a:solidFill>
+                          <a:latin typeface="+mn-lt"/>
+                        </a:rPr>
+                        <a:t>+</a:t>
+                      </a:r>
+                    </a:p>
+                  </a:txBody>
+                  <a:tcPr marL="27432" marR="27432" marT="22860" marB="22860" anchor="ctr">
+                    <a:solidFill>
+                      <a:srgbClr val="FFFFFF"/>
+                    </a:solidFill>
+                  </a:tcPr>
+                </a:tc>
+                <a:tc>
+                  <a:txBody>
+                    <a:bodyPr/>
+                    <a:lstStyle/>
+                    <a:p>
+                      <a:pPr algn="ctr"/>
+                      <a:r>
+                        <a:rPr sz="1900" b="0">
+                          <a:solidFill>
+                            <a:srgbClr val="000000"/>
+                          </a:solidFill>
+                          <a:latin typeface="+mn-lt"/>
+                        </a:rPr>
+                        <a:t>0.90</a:t>
+                      </a:r>
+                    </a:p>
+                  </a:txBody>
+                  <a:tcPr marL="27432" marR="27432" marT="22860" marB="22860" anchor="ctr">
+                    <a:solidFill>
+                      <a:srgbClr val="FFFFFF"/>
+                    </a:solidFill>
+                  </a:tcPr>
+                </a:tc>
+                <a:extLst>
+                  <a:ext uri="{0D108BD9-81ED-4DB2-BD59-A6C34878D82A}">
+                    <a16:rowId xmlns:a16="http://schemas.microsoft.com/office/drawing/2014/main" val="10002"/>
+                  </a:ext>
+                </a:extLst>
+              </a:tr>
+              <a:tr h="332841">
+                <a:tc>
+                  <a:txBody>
+                    <a:bodyPr/>
+                    <a:lstStyle/>
+                    <a:p>
+                      <a:pPr algn="ctr"/>
+                      <a:r>
+                        <a:rPr sz="1900" b="0">
+                          <a:solidFill>
+                            <a:srgbClr val="000000"/>
+                          </a:solidFill>
+                          <a:latin typeface="+mn-lt"/>
+                        </a:rPr>
+                        <a:t>3</a:t>
+                      </a:r>
+                    </a:p>
+                  </a:txBody>
+                  <a:tcPr marL="27432" marR="27432" marT="22860" marB="22860" anchor="ctr">
+                    <a:solidFill>
+                      <a:srgbClr val="FFFFFF"/>
+                    </a:solidFill>
+                  </a:tcPr>
+                </a:tc>
+                <a:tc>
+                  <a:txBody>
+                    <a:bodyPr/>
+                    <a:lstStyle/>
+                    <a:p>
+                      <a:pPr algn="ctr"/>
+                      <a:r>
+                        <a:rPr sz="1900" b="0">
+                          <a:solidFill>
+                            <a:srgbClr val="000000"/>
+                          </a:solidFill>
+                          <a:latin typeface="+mn-lt"/>
+                        </a:rPr>
+                        <a:t>−</a:t>
+                      </a:r>
+                    </a:p>
+                  </a:txBody>
+                  <a:tcPr marL="27432" marR="27432" marT="22860" marB="22860" anchor="ctr">
+                    <a:solidFill>
+                      <a:srgbClr val="FFFFFF"/>
+                    </a:solidFill>
+                  </a:tcPr>
+                </a:tc>
+                <a:tc>
+                  <a:txBody>
+                    <a:bodyPr/>
+                    <a:lstStyle/>
+                    <a:p>
+                      <a:pPr algn="ctr"/>
+                      <a:r>
+                        <a:rPr sz="1900" b="0">
+                          <a:solidFill>
+                            <a:srgbClr val="000000"/>
+                          </a:solidFill>
+                          <a:latin typeface="+mn-lt"/>
+                        </a:rPr>
+                        <a:t>0.10</a:t>
+                      </a:r>
+                    </a:p>
+                  </a:txBody>
+                  <a:tcPr marL="27432" marR="27432" marT="22860" marB="22860" anchor="ctr">
+                    <a:solidFill>
+                      <a:srgbClr val="FFFFFF"/>
+                    </a:solidFill>
+                  </a:tcPr>
+                </a:tc>
+                <a:extLst>
+                  <a:ext uri="{0D108BD9-81ED-4DB2-BD59-A6C34878D82A}">
+                    <a16:rowId xmlns:a16="http://schemas.microsoft.com/office/drawing/2014/main" val="10003"/>
+                  </a:ext>
+                </a:extLst>
+              </a:tr>
+              <a:tr h="332844">
+                <a:tc>
+                  <a:txBody>
+                    <a:bodyPr/>
+                    <a:lstStyle/>
+                    <a:p>
+                      <a:pPr algn="ctr"/>
+                      <a:r>
+                        <a:rPr sz="1900" b="0">
+                          <a:solidFill>
+                            <a:srgbClr val="000000"/>
+                          </a:solidFill>
+                          <a:latin typeface="+mn-lt"/>
+                        </a:rPr>
+                        <a:t>4</a:t>
+                      </a:r>
+                    </a:p>
+                  </a:txBody>
+                  <a:tcPr marL="27432" marR="27432" marT="22860" marB="22860" anchor="ctr">
+                    <a:solidFill>
+                      <a:srgbClr val="FFFFFF"/>
+                    </a:solidFill>
+                  </a:tcPr>
+                </a:tc>
+                <a:tc>
+                  <a:txBody>
+                    <a:bodyPr/>
+                    <a:lstStyle/>
+                    <a:p>
+                      <a:pPr algn="ctr"/>
+                      <a:r>
+                        <a:rPr sz="1900" b="0" dirty="0">
+                          <a:solidFill>
+                            <a:srgbClr val="000000"/>
+                          </a:solidFill>
+                          <a:latin typeface="+mn-lt"/>
+                        </a:rPr>
+                        <a:t>−</a:t>
+                      </a:r>
+                    </a:p>
+                  </a:txBody>
+                  <a:tcPr marL="27432" marR="27432" marT="22860" marB="22860" anchor="ctr">
+                    <a:solidFill>
+                      <a:srgbClr val="FFFFFF"/>
+                    </a:solidFill>
+                  </a:tcPr>
+                </a:tc>
+                <a:tc>
+                  <a:txBody>
+                    <a:bodyPr/>
+                    <a:lstStyle/>
+                    <a:p>
+                      <a:pPr algn="ctr"/>
+                      <a:r>
+                        <a:rPr sz="1900" b="0" dirty="0">
+                          <a:solidFill>
+                            <a:srgbClr val="000000"/>
+                          </a:solidFill>
+                          <a:latin typeface="+mn-lt"/>
+                        </a:rPr>
+                        <a:t>0.05</a:t>
+                      </a:r>
+                    </a:p>
+                  </a:txBody>
+                  <a:tcPr marL="27432" marR="27432" marT="22860" marB="22860" anchor="ctr">
+                    <a:solidFill>
+                      <a:srgbClr val="FFFFFF"/>
+                    </a:solidFill>
+                  </a:tcPr>
+                </a:tc>
+                <a:extLst>
+                  <a:ext uri="{0D108BD9-81ED-4DB2-BD59-A6C34878D82A}">
+                    <a16:rowId xmlns:a16="http://schemas.microsoft.com/office/drawing/2014/main" val="10004"/>
+                  </a:ext>
+                </a:extLst>
+              </a:tr>
+            </a:tbl>
+          </a:graphicData>
+        </a:graphic>
+      </p:graphicFrame>
+    </p:spTree>
+  </p:cSld>
+  <p:clrMapOvr>
+    <a:masterClrMapping/>
+  </p:clrMapOvr>
+</p:sld>
+</file>
+
+<file path=ppt/slides/slide15.xml><?xml version="1.0" encoding="utf-8"?>
+<p:sld xmlns:a="http://schemas.openxmlformats.org/drawingml/2006/main" xmlns:r="http://schemas.openxmlformats.org/officeDocument/2006/relationships" xmlns:p="http://schemas.openxmlformats.org/presentationml/2006/main">
+  <p:cSld>
+    <p:spTree>
+      <p:nvGrpSpPr>
+        <p:cNvPr id="1" name=""/>
+        <p:cNvGrpSpPr/>
+        <p:nvPr/>
+      </p:nvGrpSpPr>
+      <p:grpSpPr>
+        <a:xfrm>
+          <a:off x="0" y="0"/>
+          <a:ext cx="0" cy="0"/>
+          <a:chOff x="0" y="0"/>
+          <a:chExt cx="0" cy="0"/>
+        </a:xfrm>
+      </p:grpSpPr>
+      <p:sp>
+        <p:nvSpPr>
+          <p:cNvPr id="594" name="Metrics in Scikit-Learn"/>
           <p:cNvSpPr txBox="1">
             <a:spLocks noGrp="1"/>
           </p:cNvSpPr>
           <p:nvPr>
-            <p:ph type="body" idx="1"/>
+            <p:ph type="title"/>
           </p:nvPr>
         </p:nvSpPr>
         <p:spPr>
@@ -5593,84 +6513,11 @@
           </a:prstGeom>
         </p:spPr>
         <p:txBody>
-          <a:bodyPr>
-            <a:normAutofit fontScale="85000" lnSpcReduction="20000"/>
-          </a:bodyPr>
+          <a:bodyPr/>
           <a:lstStyle/>
           <a:p>
-            <a:pPr marL="221002" indent="-221002" defTabSz="176015">
-              <a:spcBef>
-                <a:spcPts val="2250"/>
-              </a:spcBef>
-              <a:defRPr sz="2772"/>
-            </a:pPr>
-            <a:r>
-              <a:t>For classification estimators, there are two ways to product predictions</a:t>
-            </a:r>
-          </a:p>
-          <a:p>
-            <a:pPr marL="221002" indent="-221002" defTabSz="176015">
-              <a:spcBef>
-                <a:spcPts val="2250"/>
-              </a:spcBef>
-              <a:defRPr sz="2772"/>
-            </a:pPr>
-            <a:r>
-              <a:rPr>
-                <a:latin typeface="Courier New"/>
-                <a:ea typeface="Courier New"/>
-                <a:cs typeface="Courier New"/>
-                <a:sym typeface="Courier New"/>
-              </a:rPr>
-              <a:t>.predict() </a:t>
-            </a:r>
-            <a:r>
-              <a:t>will produce an 1D array with n rows with the class prediction</a:t>
-            </a:r>
-          </a:p>
-          <a:p>
-            <a:pPr marL="885775" lvl="3" indent="-222770" defTabSz="176015">
-              <a:spcBef>
-                <a:spcPts val="2250"/>
-              </a:spcBef>
-              <a:defRPr sz="2772"/>
-            </a:pPr>
-            <a:r>
-              <a:t>Class with the highest probability </a:t>
-            </a:r>
-          </a:p>
-          <a:p>
-            <a:pPr marL="221002" indent="-221002" defTabSz="176015">
-              <a:spcBef>
-                <a:spcPts val="2250"/>
-              </a:spcBef>
-              <a:defRPr sz="2772"/>
-            </a:pPr>
-            <a:r>
-              <a:t>.</a:t>
-            </a:r>
-            <a:r>
-              <a:rPr>
-                <a:latin typeface="Courier New"/>
-                <a:ea typeface="Courier New"/>
-                <a:cs typeface="Courier New"/>
-                <a:sym typeface="Courier New"/>
-              </a:rPr>
-              <a:t>predict_proba() </a:t>
-            </a:r>
-            <a:r>
-              <a:t>will produce a 2D array with n rows and n-class columns </a:t>
-            </a:r>
-          </a:p>
-          <a:p>
-            <a:pPr marL="885775" lvl="3" indent="-222770" defTabSz="176015">
-              <a:spcBef>
-                <a:spcPts val="2250"/>
-              </a:spcBef>
-              <a:defRPr sz="2772"/>
-            </a:pPr>
-            <a:r>
-              <a:t>Each column is the probability of the row observation being in class 0 to n-class </a:t>
+            <a:r>
+              <a:t>Metrics in Scikit-Learn</a:t>
             </a:r>
           </a:p>
         </p:txBody>
@@ -5684,7 +6531,640 @@
 </p:sld>
 </file>
 
-<file path=ppt/slides/slide15.xml><?xml version="1.0" encoding="utf-8"?>
+<file path=ppt/slides/slide16.xml><?xml version="1.0" encoding="utf-8"?>
+<p:sld xmlns:a="http://schemas.openxmlformats.org/drawingml/2006/main" xmlns:r="http://schemas.openxmlformats.org/officeDocument/2006/relationships" xmlns:p="http://schemas.openxmlformats.org/presentationml/2006/main">
+  <p:cSld>
+    <p:spTree>
+      <p:nvGrpSpPr>
+        <p:cNvPr id="1" name=""/>
+        <p:cNvGrpSpPr/>
+        <p:nvPr/>
+      </p:nvGrpSpPr>
+      <p:grpSpPr>
+        <a:xfrm>
+          <a:off x="0" y="0"/>
+          <a:ext cx="0" cy="0"/>
+          <a:chOff x="0" y="0"/>
+          <a:chExt cx="0" cy="0"/>
+        </a:xfrm>
+      </p:grpSpPr>
+      <p:sp>
+        <p:nvSpPr>
+          <p:cNvPr id="601" name=".predict() vs .predict_proba()"/>
+          <p:cNvSpPr txBox="1">
+            <a:spLocks noGrp="1"/>
+          </p:cNvSpPr>
+          <p:nvPr>
+            <p:ph type="title"/>
+          </p:nvPr>
+        </p:nvSpPr>
+        <p:spPr>
+          <a:prstGeom prst="rect">
+            <a:avLst/>
+          </a:prstGeom>
+        </p:spPr>
+        <p:txBody>
+          <a:bodyPr>
+            <a:normAutofit fontScale="90000"/>
+          </a:bodyPr>
+          <a:lstStyle/>
+          <a:p>
+            <a:pPr defTabSz="160729">
+              <a:defRPr sz="5400" spc="-53"/>
+            </a:pPr>
+            <a:r>
+              <a:rPr dirty="0">
+                <a:latin typeface="Courier New"/>
+                <a:ea typeface="Courier New"/>
+                <a:cs typeface="Courier New"/>
+                <a:sym typeface="Courier New"/>
+              </a:rPr>
+              <a:t>.predict()</a:t>
+            </a:r>
+            <a:r>
+              <a:rPr dirty="0"/>
+              <a:t> vs </a:t>
+            </a:r>
+            <a:r>
+              <a:rPr dirty="0">
+                <a:latin typeface="Courier New"/>
+                <a:ea typeface="Courier New"/>
+                <a:cs typeface="Courier New"/>
+                <a:sym typeface="Courier New"/>
+              </a:rPr>
+              <a:t>.</a:t>
+            </a:r>
+            <a:r>
+              <a:rPr dirty="0" err="1">
+                <a:latin typeface="Courier New"/>
+                <a:ea typeface="Courier New"/>
+                <a:cs typeface="Courier New"/>
+                <a:sym typeface="Courier New"/>
+              </a:rPr>
+              <a:t>predict_proba</a:t>
+            </a:r>
+            <a:r>
+              <a:rPr dirty="0">
+                <a:latin typeface="Courier New"/>
+                <a:ea typeface="Courier New"/>
+                <a:cs typeface="Courier New"/>
+                <a:sym typeface="Courier New"/>
+              </a:rPr>
+              <a:t>()</a:t>
+            </a:r>
+          </a:p>
+        </p:txBody>
+      </p:sp>
+      <p:sp>
+        <p:nvSpPr>
+          <p:cNvPr id="602" name="For classification estimators, there are two ways to product predictions…"/>
+          <p:cNvSpPr txBox="1">
+            <a:spLocks noGrp="1"/>
+          </p:cNvSpPr>
+          <p:nvPr>
+            <p:ph type="body" idx="1"/>
+          </p:nvPr>
+        </p:nvSpPr>
+        <p:spPr>
+          <a:prstGeom prst="rect">
+            <a:avLst/>
+          </a:prstGeom>
+        </p:spPr>
+        <p:txBody>
+          <a:bodyPr>
+            <a:normAutofit fontScale="85000" lnSpcReduction="20000"/>
+          </a:bodyPr>
+          <a:lstStyle/>
+          <a:p>
+            <a:pPr marL="221002" indent="-221002" defTabSz="176015">
+              <a:spcBef>
+                <a:spcPts val="2250"/>
+              </a:spcBef>
+              <a:defRPr sz="2772"/>
+            </a:pPr>
+            <a:r>
+              <a:t>For classification estimators, there are two ways to product predictions</a:t>
+            </a:r>
+          </a:p>
+          <a:p>
+            <a:pPr marL="221002" indent="-221002" defTabSz="176015">
+              <a:spcBef>
+                <a:spcPts val="2250"/>
+              </a:spcBef>
+              <a:defRPr sz="2772"/>
+            </a:pPr>
+            <a:r>
+              <a:rPr>
+                <a:latin typeface="Courier New"/>
+                <a:ea typeface="Courier New"/>
+                <a:cs typeface="Courier New"/>
+                <a:sym typeface="Courier New"/>
+              </a:rPr>
+              <a:t>.predict() </a:t>
+            </a:r>
+            <a:r>
+              <a:t>will produce an 1D array with n rows with the class prediction</a:t>
+            </a:r>
+          </a:p>
+          <a:p>
+            <a:pPr marL="885775" lvl="3" indent="-222770" defTabSz="176015">
+              <a:spcBef>
+                <a:spcPts val="2250"/>
+              </a:spcBef>
+              <a:defRPr sz="2772"/>
+            </a:pPr>
+            <a:r>
+              <a:t>Class with the highest probability </a:t>
+            </a:r>
+          </a:p>
+          <a:p>
+            <a:pPr marL="221002" indent="-221002" defTabSz="176015">
+              <a:spcBef>
+                <a:spcPts val="2250"/>
+              </a:spcBef>
+              <a:defRPr sz="2772"/>
+            </a:pPr>
+            <a:r>
+              <a:t>.</a:t>
+            </a:r>
+            <a:r>
+              <a:rPr>
+                <a:latin typeface="Courier New"/>
+                <a:ea typeface="Courier New"/>
+                <a:cs typeface="Courier New"/>
+                <a:sym typeface="Courier New"/>
+              </a:rPr>
+              <a:t>predict_proba() </a:t>
+            </a:r>
+            <a:r>
+              <a:t>will produce a 2D array with n rows and n-class columns </a:t>
+            </a:r>
+          </a:p>
+          <a:p>
+            <a:pPr marL="885775" lvl="3" indent="-222770" defTabSz="176015">
+              <a:spcBef>
+                <a:spcPts val="2250"/>
+              </a:spcBef>
+              <a:defRPr sz="2772"/>
+            </a:pPr>
+            <a:r>
+              <a:t>Each column is the probability of the row observation being in class 0 to n-class </a:t>
+            </a:r>
+          </a:p>
+        </p:txBody>
+      </p:sp>
+    </p:spTree>
+  </p:cSld>
+  <p:clrMapOvr>
+    <a:masterClrMapping/>
+  </p:clrMapOvr>
+  <p:transition spd="med"/>
+</p:sld>
+</file>
+
+<file path=ppt/slides/slide17.xml><?xml version="1.0" encoding="utf-8"?>
+<p:sld xmlns:a="http://schemas.openxmlformats.org/drawingml/2006/main" xmlns:r="http://schemas.openxmlformats.org/officeDocument/2006/relationships" xmlns:p="http://schemas.openxmlformats.org/presentationml/2006/main">
+  <p:cSld>
+    <p:spTree>
+      <p:nvGrpSpPr>
+        <p:cNvPr id="1" name=""/>
+        <p:cNvGrpSpPr/>
+        <p:nvPr/>
+      </p:nvGrpSpPr>
+      <p:grpSpPr>
+        <a:xfrm>
+          <a:off x="0" y="0"/>
+          <a:ext cx="0" cy="0"/>
+          <a:chOff x="0" y="0"/>
+          <a:chExt cx="0" cy="0"/>
+        </a:xfrm>
+      </p:grpSpPr>
+      <p:sp>
+        <p:nvSpPr>
+          <p:cNvPr id="596" name="Function names"/>
+          <p:cNvSpPr txBox="1">
+            <a:spLocks noGrp="1"/>
+          </p:cNvSpPr>
+          <p:nvPr>
+            <p:ph type="title"/>
+          </p:nvPr>
+        </p:nvSpPr>
+        <p:spPr>
+          <a:xfrm>
+            <a:off x="767358" y="776403"/>
+            <a:ext cx="8161734" cy="803673"/>
+          </a:xfrm>
+          <a:prstGeom prst="rect">
+            <a:avLst/>
+          </a:prstGeom>
+        </p:spPr>
+        <p:txBody>
+          <a:bodyPr/>
+          <a:lstStyle/>
+          <a:p>
+            <a:r>
+              <a:rPr dirty="0"/>
+              <a:t>Function names</a:t>
+            </a:r>
+          </a:p>
+        </p:txBody>
+      </p:sp>
+      <p:sp>
+        <p:nvSpPr>
+          <p:cNvPr id="597" name="accuracy_score(y_true, y_pred)  (default for many functions)…"/>
+          <p:cNvSpPr txBox="1">
+            <a:spLocks noGrp="1"/>
+          </p:cNvSpPr>
+          <p:nvPr>
+            <p:ph type="body" idx="1"/>
+          </p:nvPr>
+        </p:nvSpPr>
+        <p:spPr>
+          <a:xfrm>
+            <a:off x="1757958" y="1580076"/>
+            <a:ext cx="8161734" cy="4672878"/>
+          </a:xfrm>
+          <a:prstGeom prst="rect">
+            <a:avLst/>
+          </a:prstGeom>
+        </p:spPr>
+        <p:txBody>
+          <a:bodyPr>
+            <a:normAutofit fontScale="70000" lnSpcReduction="20000"/>
+          </a:bodyPr>
+          <a:lstStyle/>
+          <a:p>
+            <a:pPr marL="200911" indent="-200911" defTabSz="160014">
+              <a:spcBef>
+                <a:spcPts val="2039"/>
+              </a:spcBef>
+              <a:defRPr sz="2520">
+                <a:latin typeface="Courier New"/>
+                <a:ea typeface="Courier New"/>
+                <a:cs typeface="Courier New"/>
+                <a:sym typeface="Courier New"/>
+              </a:defRPr>
+            </a:pPr>
+            <a:r>
+              <a:rPr dirty="0" err="1"/>
+              <a:t>accuracy_score</a:t>
+            </a:r>
+            <a:r>
+              <a:rPr dirty="0"/>
+              <a:t>(</a:t>
+            </a:r>
+            <a:r>
+              <a:rPr dirty="0" err="1"/>
+              <a:t>y_true</a:t>
+            </a:r>
+            <a:r>
+              <a:rPr dirty="0"/>
+              <a:t>, </a:t>
+            </a:r>
+            <a:r>
+              <a:rPr dirty="0" err="1"/>
+              <a:t>y_pred</a:t>
+            </a:r>
+            <a:r>
+              <a:rPr dirty="0"/>
+              <a:t>) </a:t>
+            </a:r>
+            <a:br>
+              <a:rPr dirty="0"/>
+            </a:br>
+            <a:r>
+              <a:rPr dirty="0">
+                <a:latin typeface="Graphik"/>
+                <a:ea typeface="Graphik"/>
+                <a:cs typeface="Graphik"/>
+                <a:sym typeface="Graphik"/>
+              </a:rPr>
+              <a:t>(default for many functions)</a:t>
+            </a:r>
+          </a:p>
+          <a:p>
+            <a:pPr marL="200911" indent="-200911" defTabSz="160014">
+              <a:spcBef>
+                <a:spcPts val="2039"/>
+              </a:spcBef>
+              <a:defRPr sz="2520">
+                <a:latin typeface="Courier New"/>
+                <a:ea typeface="Courier New"/>
+                <a:cs typeface="Courier New"/>
+                <a:sym typeface="Courier New"/>
+              </a:defRPr>
+            </a:pPr>
+            <a:r>
+              <a:rPr dirty="0" err="1"/>
+              <a:t>classification_report</a:t>
+            </a:r>
+            <a:r>
+              <a:rPr dirty="0"/>
+              <a:t>(</a:t>
+            </a:r>
+            <a:r>
+              <a:rPr dirty="0" err="1"/>
+              <a:t>y_true</a:t>
+            </a:r>
+            <a:r>
+              <a:rPr dirty="0"/>
+              <a:t>, </a:t>
+            </a:r>
+            <a:r>
+              <a:rPr dirty="0" err="1"/>
+              <a:t>y_pred</a:t>
+            </a:r>
+            <a:r>
+              <a:rPr dirty="0"/>
+              <a:t>)</a:t>
+            </a:r>
+          </a:p>
+          <a:p>
+            <a:pPr marL="200911" indent="-200911" defTabSz="160014">
+              <a:spcBef>
+                <a:spcPts val="2039"/>
+              </a:spcBef>
+              <a:defRPr sz="2520">
+                <a:latin typeface="Courier New"/>
+                <a:ea typeface="Courier New"/>
+                <a:cs typeface="Courier New"/>
+                <a:sym typeface="Courier New"/>
+              </a:defRPr>
+            </a:pPr>
+            <a:r>
+              <a:rPr dirty="0" err="1"/>
+              <a:t>confusion_matrix</a:t>
+            </a:r>
+            <a:r>
+              <a:rPr dirty="0"/>
+              <a:t>(</a:t>
+            </a:r>
+            <a:r>
+              <a:rPr dirty="0" err="1"/>
+              <a:t>y_true</a:t>
+            </a:r>
+            <a:r>
+              <a:rPr dirty="0"/>
+              <a:t>, </a:t>
+            </a:r>
+            <a:r>
+              <a:rPr dirty="0" err="1"/>
+              <a:t>y_pred</a:t>
+            </a:r>
+            <a:r>
+              <a:rPr dirty="0"/>
+              <a:t>)</a:t>
+            </a:r>
+          </a:p>
+          <a:p>
+            <a:pPr marL="200911" indent="-200911" defTabSz="160014">
+              <a:spcBef>
+                <a:spcPts val="2039"/>
+              </a:spcBef>
+              <a:defRPr sz="2520">
+                <a:latin typeface="Courier New"/>
+                <a:ea typeface="Courier New"/>
+                <a:cs typeface="Courier New"/>
+                <a:sym typeface="Courier New"/>
+              </a:defRPr>
+            </a:pPr>
+            <a:r>
+              <a:rPr dirty="0"/>
+              <a:t>f1_score(</a:t>
+            </a:r>
+            <a:r>
+              <a:rPr dirty="0" err="1"/>
+              <a:t>y_true</a:t>
+            </a:r>
+            <a:r>
+              <a:rPr dirty="0"/>
+              <a:t>, </a:t>
+            </a:r>
+            <a:r>
+              <a:rPr dirty="0" err="1"/>
+              <a:t>y_pred</a:t>
+            </a:r>
+            <a:r>
+              <a:rPr dirty="0"/>
+              <a:t>)</a:t>
+            </a:r>
+          </a:p>
+          <a:p>
+            <a:pPr marL="200911" indent="-200911" defTabSz="160014">
+              <a:spcBef>
+                <a:spcPts val="2039"/>
+              </a:spcBef>
+              <a:defRPr sz="2520">
+                <a:latin typeface="Courier New"/>
+                <a:ea typeface="Courier New"/>
+                <a:cs typeface="Courier New"/>
+                <a:sym typeface="Courier New"/>
+              </a:defRPr>
+            </a:pPr>
+            <a:r>
+              <a:rPr dirty="0" err="1"/>
+              <a:t>precision_score</a:t>
+            </a:r>
+            <a:r>
+              <a:rPr dirty="0"/>
+              <a:t>(</a:t>
+            </a:r>
+            <a:r>
+              <a:rPr dirty="0" err="1"/>
+              <a:t>y_true</a:t>
+            </a:r>
+            <a:r>
+              <a:rPr dirty="0"/>
+              <a:t>, </a:t>
+            </a:r>
+            <a:r>
+              <a:rPr dirty="0" err="1"/>
+              <a:t>y_pred</a:t>
+            </a:r>
+            <a:r>
+              <a:rPr dirty="0"/>
+              <a:t>)</a:t>
+            </a:r>
+          </a:p>
+          <a:p>
+            <a:pPr marL="200911" indent="-200911" defTabSz="160014">
+              <a:spcBef>
+                <a:spcPts val="2039"/>
+              </a:spcBef>
+              <a:defRPr sz="2520">
+                <a:latin typeface="Courier New"/>
+                <a:ea typeface="Courier New"/>
+                <a:cs typeface="Courier New"/>
+                <a:sym typeface="Courier New"/>
+              </a:defRPr>
+            </a:pPr>
+            <a:r>
+              <a:rPr dirty="0" err="1"/>
+              <a:t>recall_score</a:t>
+            </a:r>
+            <a:r>
+              <a:rPr dirty="0"/>
+              <a:t>(</a:t>
+            </a:r>
+            <a:r>
+              <a:rPr dirty="0" err="1"/>
+              <a:t>y_true</a:t>
+            </a:r>
+            <a:r>
+              <a:rPr dirty="0"/>
+              <a:t>, </a:t>
+            </a:r>
+            <a:r>
+              <a:rPr dirty="0" err="1"/>
+              <a:t>y_pred</a:t>
+            </a:r>
+            <a:r>
+              <a:rPr dirty="0"/>
+              <a:t>)</a:t>
+            </a:r>
+          </a:p>
+          <a:p>
+            <a:pPr marL="200911" indent="-200911" defTabSz="160014">
+              <a:spcBef>
+                <a:spcPts val="2039"/>
+              </a:spcBef>
+              <a:defRPr sz="2520">
+                <a:latin typeface="Courier New"/>
+                <a:ea typeface="Courier New"/>
+                <a:cs typeface="Courier New"/>
+                <a:sym typeface="Courier New"/>
+              </a:defRPr>
+            </a:pPr>
+            <a:r>
+              <a:rPr dirty="0" err="1"/>
+              <a:t>roc_auc_score</a:t>
+            </a:r>
+            <a:r>
+              <a:rPr dirty="0"/>
+              <a:t>(</a:t>
+            </a:r>
+            <a:r>
+              <a:rPr dirty="0" err="1"/>
+              <a:t>y_true</a:t>
+            </a:r>
+            <a:r>
+              <a:rPr dirty="0"/>
+              <a:t>, </a:t>
+            </a:r>
+            <a:r>
+              <a:rPr b="1" dirty="0" err="1"/>
+              <a:t>y_score</a:t>
+            </a:r>
+            <a:r>
+              <a:rPr lang="en-US" b="1" dirty="0"/>
+              <a:t>) </a:t>
+            </a:r>
+          </a:p>
+          <a:p>
+            <a:pPr marL="658111" lvl="1" indent="-200911" defTabSz="160014">
+              <a:spcBef>
+                <a:spcPts val="2039"/>
+              </a:spcBef>
+              <a:defRPr sz="2520">
+                <a:latin typeface="Courier New"/>
+                <a:ea typeface="Courier New"/>
+                <a:cs typeface="Courier New"/>
+                <a:sym typeface="Courier New"/>
+              </a:defRPr>
+            </a:pPr>
+            <a:r>
+              <a:rPr lang="en-US" dirty="0">
+                <a:latin typeface="Graphik"/>
+              </a:rPr>
+              <a:t>Note: The</a:t>
+            </a:r>
+            <a:r>
+              <a:rPr lang="en-US" b="1" dirty="0">
+                <a:latin typeface="Graphik"/>
+              </a:rPr>
+              <a:t> </a:t>
+            </a:r>
+            <a:r>
+              <a:rPr lang="en-US" dirty="0">
+                <a:latin typeface="Graphik"/>
+                <a:sym typeface="Graphik"/>
+              </a:rPr>
+              <a:t>s</a:t>
+            </a:r>
+            <a:r>
+              <a:rPr lang="en-US" dirty="0">
+                <a:latin typeface="Graphik"/>
+                <a:ea typeface="Graphik"/>
+                <a:cs typeface="Graphik"/>
+                <a:sym typeface="Graphik"/>
+              </a:rPr>
+              <a:t>econ</a:t>
+            </a:r>
+            <a:r>
+              <a:rPr dirty="0">
+                <a:latin typeface="Graphik"/>
+                <a:ea typeface="Graphik"/>
+                <a:cs typeface="Graphik"/>
+                <a:sym typeface="Graphik"/>
+              </a:rPr>
+              <a:t>d argument must be a score (e.g. probability) and not a class prediction</a:t>
+            </a:r>
+            <a:br>
+              <a:rPr dirty="0"/>
+            </a:br>
+            <a:endParaRPr dirty="0"/>
+          </a:p>
+        </p:txBody>
+      </p:sp>
+      <p:sp>
+        <p:nvSpPr>
+          <p:cNvPr id="598" name="https://scikit-learn.org/stable/api/sklearn.metrics.html#"/>
+          <p:cNvSpPr txBox="1"/>
+          <p:nvPr/>
+        </p:nvSpPr>
+        <p:spPr>
+          <a:xfrm>
+            <a:off x="2022259" y="1313143"/>
+            <a:ext cx="4026616" cy="266933"/>
+          </a:xfrm>
+          <a:prstGeom prst="rect">
+            <a:avLst/>
+          </a:prstGeom>
+          <a:ln w="3175">
+            <a:miter lim="400000"/>
+          </a:ln>
+          <a:extLst>
+            <a:ext uri="{C572A759-6A51-4108-AA02-DFA0A04FC94B}">
+              <ma14:wrappingTextBoxFlag xmlns:ma14="http://schemas.microsoft.com/office/mac/drawingml/2011/main" xmlns:a14="http://schemas.microsoft.com/office/drawing/2010/main" xmlns:m="http://schemas.openxmlformats.org/officeDocument/2006/math" xmlns="" val="1"/>
+            </a:ext>
+          </a:extLst>
+        </p:spPr>
+        <p:txBody>
+          <a:bodyPr wrap="none" lIns="35719" tIns="35719" rIns="35719" bIns="35719" anchor="ctr">
+            <a:spAutoFit/>
+          </a:bodyPr>
+          <a:lstStyle/>
+          <a:p>
+            <a:r>
+              <a:rPr sz="1266">
+                <a:hlinkClick r:id="rId2"/>
+              </a:rPr>
+              <a:t>https://scikit-learn.org/stable/api/sklearn.metrics.html#</a:t>
+            </a:r>
+            <a:endParaRPr sz="1266"/>
+          </a:p>
+        </p:txBody>
+      </p:sp>
+    </p:spTree>
+  </p:cSld>
+  <p:clrMapOvr>
+    <a:masterClrMapping/>
+  </p:clrMapOvr>
+  <p:transition spd="med"/>
+</p:sld>
+</file>
+
+<file path=ppt/slides/slide18.xml><?xml version="1.0" encoding="utf-8"?>
 <p:sld xmlns:a="http://schemas.openxmlformats.org/drawingml/2006/main" xmlns:r="http://schemas.openxmlformats.org/officeDocument/2006/relationships" xmlns:p="http://schemas.openxmlformats.org/presentationml/2006/main">
   <p:cSld>
     <p:spTree>
@@ -5793,459 +7273,6 @@
 </p:sld>
 </file>
 
-<file path=ppt/slides/slide16.xml><?xml version="1.0" encoding="utf-8"?>
-<p:sld xmlns:a="http://schemas.openxmlformats.org/drawingml/2006/main" xmlns:r="http://schemas.openxmlformats.org/officeDocument/2006/relationships" xmlns:p="http://schemas.openxmlformats.org/presentationml/2006/main">
-  <p:cSld>
-    <p:spTree>
-      <p:nvGrpSpPr>
-        <p:cNvPr id="1" name=""/>
-        <p:cNvGrpSpPr/>
-        <p:nvPr/>
-      </p:nvGrpSpPr>
-      <p:grpSpPr>
-        <a:xfrm>
-          <a:off x="0" y="0"/>
-          <a:ext cx="0" cy="0"/>
-          <a:chOff x="0" y="0"/>
-          <a:chExt cx="0" cy="0"/>
-        </a:xfrm>
-      </p:grpSpPr>
-      <p:sp>
-        <p:nvSpPr>
-          <p:cNvPr id="608" name="Multi-class Classification"/>
-          <p:cNvSpPr txBox="1">
-            <a:spLocks noGrp="1"/>
-          </p:cNvSpPr>
-          <p:nvPr>
-            <p:ph type="title"/>
-          </p:nvPr>
-        </p:nvSpPr>
-        <p:spPr>
-          <a:prstGeom prst="rect">
-            <a:avLst/>
-          </a:prstGeom>
-        </p:spPr>
-        <p:txBody>
-          <a:bodyPr/>
-          <a:lstStyle/>
-          <a:p>
-            <a:r>
-              <a:t>Multi-class Classification</a:t>
-            </a:r>
-          </a:p>
-        </p:txBody>
-      </p:sp>
-    </p:spTree>
-  </p:cSld>
-  <p:clrMapOvr>
-    <a:masterClrMapping/>
-  </p:clrMapOvr>
-  <p:transition spd="med"/>
-</p:sld>
-</file>
-
-<file path=ppt/slides/slide17.xml><?xml version="1.0" encoding="utf-8"?>
-<p:sld xmlns:a="http://schemas.openxmlformats.org/drawingml/2006/main" xmlns:r="http://schemas.openxmlformats.org/officeDocument/2006/relationships" xmlns:p="http://schemas.openxmlformats.org/presentationml/2006/main">
-  <p:cSld>
-    <p:spTree>
-      <p:nvGrpSpPr>
-        <p:cNvPr id="1" name=""/>
-        <p:cNvGrpSpPr/>
-        <p:nvPr/>
-      </p:nvGrpSpPr>
-      <p:grpSpPr>
-        <a:xfrm>
-          <a:off x="0" y="0"/>
-          <a:ext cx="0" cy="0"/>
-          <a:chOff x="0" y="0"/>
-          <a:chExt cx="0" cy="0"/>
-        </a:xfrm>
-      </p:grpSpPr>
-      <p:sp>
-        <p:nvSpPr>
-          <p:cNvPr id="611" name="Multi-class Strategies"/>
-          <p:cNvSpPr txBox="1">
-            <a:spLocks noGrp="1"/>
-          </p:cNvSpPr>
-          <p:nvPr>
-            <p:ph type="title"/>
-          </p:nvPr>
-        </p:nvSpPr>
-        <p:spPr>
-          <a:prstGeom prst="rect">
-            <a:avLst/>
-          </a:prstGeom>
-        </p:spPr>
-        <p:txBody>
-          <a:bodyPr/>
-          <a:lstStyle/>
-          <a:p>
-            <a:r>
-              <a:t>Multi-class Strategies </a:t>
-            </a:r>
-          </a:p>
-        </p:txBody>
-      </p:sp>
-      <p:sp>
-        <p:nvSpPr>
-          <p:cNvPr id="612" name="Some classifiers (e.g., Random Forest, Naive Bayes, KNN) are capable of handling multiple classes directly…"/>
-          <p:cNvSpPr txBox="1">
-            <a:spLocks noGrp="1"/>
-          </p:cNvSpPr>
-          <p:nvPr>
-            <p:ph type="body" idx="1"/>
-          </p:nvPr>
-        </p:nvSpPr>
-        <p:spPr>
-          <a:prstGeom prst="rect">
-            <a:avLst/>
-          </a:prstGeom>
-        </p:spPr>
-        <p:txBody>
-          <a:bodyPr>
-            <a:normAutofit/>
-          </a:bodyPr>
-          <a:lstStyle/>
-          <a:p>
-            <a:pPr marL="285740" indent="-285740">
-              <a:buSzPct val="75000"/>
-              <a:defRPr sz="3400">
-                <a:latin typeface="Helvetica Neue Light"/>
-                <a:ea typeface="Helvetica Neue Light"/>
-                <a:cs typeface="Helvetica Neue Light"/>
-                <a:sym typeface="Helvetica Neue Light"/>
-              </a:defRPr>
-            </a:pPr>
-            <a:r>
-              <a:rPr sz="2600" dirty="0"/>
-              <a:t>Some classifiers (e.g., Naive Bayes, KNN) are capable of handling multiple classes directly</a:t>
-            </a:r>
-          </a:p>
-          <a:p>
-            <a:pPr marL="285740" indent="-285740">
-              <a:buSzPct val="75000"/>
-              <a:defRPr sz="3400">
-                <a:latin typeface="Helvetica Neue Light"/>
-                <a:ea typeface="Helvetica Neue Light"/>
-                <a:cs typeface="Helvetica Neue Light"/>
-                <a:sym typeface="Helvetica Neue Light"/>
-              </a:defRPr>
-            </a:pPr>
-            <a:r>
-              <a:rPr sz="2600" dirty="0"/>
-              <a:t>Other classifiers (e.g.,</a:t>
-            </a:r>
-            <a:r>
-              <a:rPr lang="en-US" sz="2600" dirty="0"/>
-              <a:t> </a:t>
-            </a:r>
-            <a:r>
-              <a:rPr sz="2600" dirty="0"/>
-              <a:t>logistic regression) are binary classifiers</a:t>
-            </a:r>
-          </a:p>
-          <a:p>
-            <a:pPr marL="285740" indent="-285740">
-              <a:buSzPct val="75000"/>
-              <a:defRPr sz="3400">
-                <a:latin typeface="Helvetica Neue Light"/>
-                <a:ea typeface="Helvetica Neue Light"/>
-                <a:cs typeface="Helvetica Neue Light"/>
-                <a:sym typeface="Helvetica Neue Light"/>
-              </a:defRPr>
-            </a:pPr>
-            <a:r>
-              <a:rPr sz="2600" dirty="0"/>
-              <a:t>For binary classifiers, there are two strategies for extending to multiple classes:</a:t>
-            </a:r>
-          </a:p>
-          <a:p>
-            <a:pPr marL="857220" lvl="2" indent="-285740">
-              <a:buSzPct val="75000"/>
-              <a:defRPr sz="3400">
-                <a:latin typeface="Helvetica Neue Light"/>
-                <a:ea typeface="Helvetica Neue Light"/>
-                <a:cs typeface="Helvetica Neue Light"/>
-                <a:sym typeface="Helvetica Neue Light"/>
-              </a:defRPr>
-            </a:pPr>
-            <a:r>
-              <a:rPr sz="2600" dirty="0"/>
-              <a:t>One-versus-all (</a:t>
-            </a:r>
-            <a:r>
-              <a:rPr sz="2600" dirty="0" err="1"/>
-              <a:t>OvA</a:t>
-            </a:r>
-            <a:r>
-              <a:rPr sz="2600" dirty="0"/>
-              <a:t>) </a:t>
-            </a:r>
-            <a:r>
-              <a:rPr lang="en-US" sz="2600" dirty="0"/>
-              <a:t>(sometimes called </a:t>
-            </a:r>
-            <a:r>
-              <a:rPr sz="2600" dirty="0"/>
-              <a:t>One-versus-rest (</a:t>
-            </a:r>
-            <a:r>
-              <a:rPr sz="2600" dirty="0" err="1"/>
-              <a:t>OvR</a:t>
-            </a:r>
-            <a:r>
-              <a:rPr sz="2600" dirty="0"/>
-              <a:t>)</a:t>
-            </a:r>
-            <a:r>
-              <a:rPr lang="en-US" sz="2600" dirty="0"/>
-              <a:t>)</a:t>
-            </a:r>
-            <a:endParaRPr sz="2600" dirty="0"/>
-          </a:p>
-          <a:p>
-            <a:pPr marL="857220" lvl="2" indent="-285740">
-              <a:buSzPct val="75000"/>
-              <a:defRPr sz="3400">
-                <a:latin typeface="Helvetica Neue Light"/>
-                <a:ea typeface="Helvetica Neue Light"/>
-                <a:cs typeface="Helvetica Neue Light"/>
-                <a:sym typeface="Helvetica Neue Light"/>
-              </a:defRPr>
-            </a:pPr>
-            <a:r>
-              <a:rPr sz="2600" dirty="0"/>
-              <a:t>One-versus-one (</a:t>
-            </a:r>
-            <a:r>
-              <a:rPr sz="2600" dirty="0" err="1"/>
-              <a:t>OvO</a:t>
-            </a:r>
-            <a:r>
-              <a:rPr sz="2600" dirty="0"/>
-              <a:t>)</a:t>
-            </a:r>
-          </a:p>
-        </p:txBody>
-      </p:sp>
-    </p:spTree>
-  </p:cSld>
-  <p:clrMapOvr>
-    <a:masterClrMapping/>
-  </p:clrMapOvr>
-  <p:transition spd="med"/>
-</p:sld>
-</file>
-
-<file path=ppt/slides/slide18.xml><?xml version="1.0" encoding="utf-8"?>
-<p:sld xmlns:a="http://schemas.openxmlformats.org/drawingml/2006/main" xmlns:r="http://schemas.openxmlformats.org/officeDocument/2006/relationships" xmlns:p="http://schemas.openxmlformats.org/presentationml/2006/main">
-  <p:cSld>
-    <p:spTree>
-      <p:nvGrpSpPr>
-        <p:cNvPr id="1" name=""/>
-        <p:cNvGrpSpPr/>
-        <p:nvPr/>
-      </p:nvGrpSpPr>
-      <p:grpSpPr>
-        <a:xfrm>
-          <a:off x="0" y="0"/>
-          <a:ext cx="0" cy="0"/>
-          <a:chOff x="0" y="0"/>
-          <a:chExt cx="0" cy="0"/>
-        </a:xfrm>
-      </p:grpSpPr>
-      <p:sp>
-        <p:nvSpPr>
-          <p:cNvPr id="615" name="One Versus All (OvA)"/>
-          <p:cNvSpPr txBox="1">
-            <a:spLocks noGrp="1"/>
-          </p:cNvSpPr>
-          <p:nvPr>
-            <p:ph type="title"/>
-          </p:nvPr>
-        </p:nvSpPr>
-        <p:spPr>
-          <a:prstGeom prst="rect">
-            <a:avLst/>
-          </a:prstGeom>
-        </p:spPr>
-        <p:txBody>
-          <a:bodyPr/>
-          <a:lstStyle/>
-          <a:p>
-            <a:r>
-              <a:t>One Versus All (OvA)</a:t>
-            </a:r>
-          </a:p>
-        </p:txBody>
-      </p:sp>
-      <p:sp>
-        <p:nvSpPr>
-          <p:cNvPr id="616" name="For each class, train a model that classify that class versus all the rest:…"/>
-          <p:cNvSpPr txBox="1">
-            <a:spLocks noGrp="1"/>
-          </p:cNvSpPr>
-          <p:nvPr>
-            <p:ph type="body" idx="1"/>
-          </p:nvPr>
-        </p:nvSpPr>
-        <p:spPr>
-          <a:prstGeom prst="rect">
-            <a:avLst/>
-          </a:prstGeom>
-        </p:spPr>
-        <p:txBody>
-          <a:bodyPr>
-            <a:normAutofit/>
-          </a:bodyPr>
-          <a:lstStyle/>
-          <a:p>
-            <a:pPr marL="285740" indent="-285740">
-              <a:buSzPct val="75000"/>
-              <a:defRPr sz="3400">
-                <a:latin typeface="Helvetica Neue Light"/>
-                <a:ea typeface="Helvetica Neue Light"/>
-                <a:cs typeface="Helvetica Neue Light"/>
-                <a:sym typeface="Helvetica Neue Light"/>
-              </a:defRPr>
-            </a:pPr>
-            <a:r>
-              <a:rPr sz="2600" dirty="0"/>
-              <a:t>For each class, train a model that classify that class versus all the rest:</a:t>
-            </a:r>
-          </a:p>
-          <a:p>
-            <a:pPr marL="857220" lvl="2" indent="-285740">
-              <a:buSzPct val="75000"/>
-              <a:defRPr sz="3400">
-                <a:latin typeface="Helvetica Neue Light"/>
-                <a:ea typeface="Helvetica Neue Light"/>
-                <a:cs typeface="Helvetica Neue Light"/>
-                <a:sym typeface="Helvetica Neue Light"/>
-              </a:defRPr>
-            </a:pPr>
-            <a:r>
-              <a:rPr sz="2600" dirty="0"/>
-              <a:t>Classify </a:t>
-            </a:r>
-            <a:r>
-              <a:rPr sz="2600" b="1" dirty="0">
-                <a:solidFill>
-                  <a:srgbClr val="4F8F00"/>
-                </a:solidFill>
-                <a:latin typeface="Helvetica Neue"/>
-                <a:ea typeface="Helvetica Neue"/>
-                <a:cs typeface="Helvetica Neue"/>
-                <a:sym typeface="Helvetica Neue"/>
-              </a:rPr>
-              <a:t>1</a:t>
-            </a:r>
-            <a:r>
-              <a:rPr sz="2600" dirty="0"/>
-              <a:t> versus </a:t>
-            </a:r>
-            <a:r>
-              <a:rPr sz="2600" b="1" dirty="0">
-                <a:solidFill>
-                  <a:srgbClr val="005493"/>
-                </a:solidFill>
-                <a:latin typeface="Helvetica Neue"/>
-                <a:ea typeface="Helvetica Neue"/>
-                <a:cs typeface="Helvetica Neue"/>
-                <a:sym typeface="Helvetica Neue"/>
-              </a:rPr>
-              <a:t>not 1</a:t>
-            </a:r>
-          </a:p>
-          <a:p>
-            <a:pPr marL="857220" lvl="2" indent="-285740">
-              <a:buSzPct val="75000"/>
-              <a:defRPr sz="3400">
-                <a:latin typeface="Helvetica Neue Light"/>
-                <a:ea typeface="Helvetica Neue Light"/>
-                <a:cs typeface="Helvetica Neue Light"/>
-                <a:sym typeface="Helvetica Neue Light"/>
-              </a:defRPr>
-            </a:pPr>
-            <a:r>
-              <a:rPr sz="2600" dirty="0"/>
-              <a:t>Classify </a:t>
-            </a:r>
-            <a:r>
-              <a:rPr sz="2600" b="1" dirty="0">
-                <a:solidFill>
-                  <a:srgbClr val="4F8F00"/>
-                </a:solidFill>
-                <a:latin typeface="Helvetica Neue"/>
-                <a:ea typeface="Helvetica Neue"/>
-                <a:cs typeface="Helvetica Neue"/>
-                <a:sym typeface="Helvetica Neue"/>
-              </a:rPr>
-              <a:t>2</a:t>
-            </a:r>
-            <a:r>
-              <a:rPr sz="2600" dirty="0"/>
-              <a:t> versus </a:t>
-            </a:r>
-            <a:r>
-              <a:rPr sz="2600" b="1" dirty="0">
-                <a:solidFill>
-                  <a:srgbClr val="005493"/>
-                </a:solidFill>
-                <a:latin typeface="Helvetica Neue"/>
-                <a:ea typeface="Helvetica Neue"/>
-                <a:cs typeface="Helvetica Neue"/>
-                <a:sym typeface="Helvetica Neue"/>
-              </a:rPr>
-              <a:t>not 2</a:t>
-            </a:r>
-          </a:p>
-          <a:p>
-            <a:pPr marL="857220" lvl="2" indent="-285740">
-              <a:buSzPct val="75000"/>
-              <a:defRPr sz="3400">
-                <a:latin typeface="Helvetica Neue Light"/>
-                <a:ea typeface="Helvetica Neue Light"/>
-                <a:cs typeface="Helvetica Neue Light"/>
-                <a:sym typeface="Helvetica Neue Light"/>
-              </a:defRPr>
-            </a:pPr>
-            <a:r>
-              <a:rPr sz="2600" dirty="0"/>
-              <a:t>etc.</a:t>
-            </a:r>
-          </a:p>
-          <a:p>
-            <a:pPr marL="285740" indent="-285740">
-              <a:buSzPct val="75000"/>
-              <a:defRPr sz="3400">
-                <a:latin typeface="Helvetica Neue Light"/>
-                <a:ea typeface="Helvetica Neue Light"/>
-                <a:cs typeface="Helvetica Neue Light"/>
-                <a:sym typeface="Helvetica Neue Light"/>
-              </a:defRPr>
-            </a:pPr>
-            <a:r>
-              <a:rPr sz="2600" dirty="0"/>
-              <a:t>Classify a value into the classier whose classifier outputs the highest score</a:t>
-            </a:r>
-            <a:r>
-              <a:rPr lang="en-US" sz="2600" dirty="0"/>
-              <a:t> (e.g., predictive probabilities)</a:t>
-            </a:r>
-            <a:endParaRPr sz="2600" dirty="0"/>
-          </a:p>
-        </p:txBody>
-      </p:sp>
-    </p:spTree>
-  </p:cSld>
-  <p:clrMapOvr>
-    <a:masterClrMapping/>
-  </p:clrMapOvr>
-  <p:transition spd="med"/>
-</p:sld>
-</file>
-
 <file path=ppt/slides/slide19.xml><?xml version="1.0" encoding="utf-8"?>
 <p:sld xmlns:a="http://schemas.openxmlformats.org/drawingml/2006/main" xmlns:r="http://schemas.openxmlformats.org/officeDocument/2006/relationships" xmlns:p="http://schemas.openxmlformats.org/presentationml/2006/main">
   <p:cSld>
@@ -6265,7 +7292,7 @@
       </p:grpSpPr>
       <p:sp>
         <p:nvSpPr>
-          <p:cNvPr id="619" name="One Versus One (OvO)"/>
+          <p:cNvPr id="608" name="Multi-class Classification"/>
           <p:cNvSpPr txBox="1">
             <a:spLocks noGrp="1"/>
           </p:cNvSpPr>
@@ -6283,244 +7310,7 @@
           <a:lstStyle/>
           <a:p>
             <a:r>
-              <a:t>One Versus One (OvO)</a:t>
-            </a:r>
-          </a:p>
-        </p:txBody>
-      </p:sp>
-      <p:sp>
-        <p:nvSpPr>
-          <p:cNvPr id="620" name="Train a binary classifier for every pair of classes…"/>
-          <p:cNvSpPr txBox="1">
-            <a:spLocks noGrp="1"/>
-          </p:cNvSpPr>
-          <p:nvPr>
-            <p:ph type="body" idx="1"/>
-          </p:nvPr>
-        </p:nvSpPr>
-        <p:spPr>
-          <a:prstGeom prst="rect">
-            <a:avLst/>
-          </a:prstGeom>
-        </p:spPr>
-        <p:txBody>
-          <a:bodyPr>
-            <a:normAutofit fontScale="62500" lnSpcReduction="20000"/>
-          </a:bodyPr>
-          <a:lstStyle/>
-          <a:p>
-            <a:pPr marL="271452" indent="-271452" defTabSz="168904">
-              <a:spcBef>
-                <a:spcPts val="2180"/>
-              </a:spcBef>
-              <a:buSzPct val="75000"/>
-              <a:defRPr sz="3230">
-                <a:latin typeface="Helvetica Neue Light"/>
-                <a:ea typeface="Helvetica Neue Light"/>
-                <a:cs typeface="Helvetica Neue Light"/>
-                <a:sym typeface="Helvetica Neue Light"/>
-              </a:defRPr>
-            </a:pPr>
-            <a:r>
-              <a:t>Train a binary classifier for every pair of classes</a:t>
-            </a:r>
-          </a:p>
-          <a:p>
-            <a:pPr marL="814358" lvl="2" indent="-271452" defTabSz="168904">
-              <a:spcBef>
-                <a:spcPts val="2180"/>
-              </a:spcBef>
-              <a:buSzPct val="75000"/>
-              <a:defRPr sz="3230">
-                <a:latin typeface="Helvetica Neue Light"/>
-                <a:ea typeface="Helvetica Neue Light"/>
-                <a:cs typeface="Helvetica Neue Light"/>
-                <a:sym typeface="Helvetica Neue Light"/>
-              </a:defRPr>
-            </a:pPr>
-            <a:r>
-              <a:rPr b="1">
-                <a:solidFill>
-                  <a:srgbClr val="4F8F00"/>
-                </a:solidFill>
-                <a:latin typeface="Helvetica Neue"/>
-                <a:ea typeface="Helvetica Neue"/>
-                <a:cs typeface="Helvetica Neue"/>
-                <a:sym typeface="Helvetica Neue"/>
-              </a:rPr>
-              <a:t>1</a:t>
-            </a:r>
-            <a:r>
-              <a:t> vs</a:t>
-            </a:r>
-            <a:r>
-              <a:rPr b="1">
-                <a:solidFill>
-                  <a:srgbClr val="005493"/>
-                </a:solidFill>
-                <a:latin typeface="Helvetica Neue"/>
-                <a:ea typeface="Helvetica Neue"/>
-                <a:cs typeface="Helvetica Neue"/>
-                <a:sym typeface="Helvetica Neue"/>
-              </a:rPr>
-              <a:t> 2</a:t>
-            </a:r>
-          </a:p>
-          <a:p>
-            <a:pPr marL="814358" lvl="2" indent="-271452" defTabSz="168904">
-              <a:spcBef>
-                <a:spcPts val="2180"/>
-              </a:spcBef>
-              <a:buSzPct val="75000"/>
-              <a:defRPr sz="3230">
-                <a:latin typeface="Helvetica Neue Light"/>
-                <a:ea typeface="Helvetica Neue Light"/>
-                <a:cs typeface="Helvetica Neue Light"/>
-                <a:sym typeface="Helvetica Neue Light"/>
-              </a:defRPr>
-            </a:pPr>
-            <a:r>
-              <a:rPr b="1">
-                <a:solidFill>
-                  <a:srgbClr val="4F8F00"/>
-                </a:solidFill>
-                <a:latin typeface="Helvetica Neue"/>
-                <a:ea typeface="Helvetica Neue"/>
-                <a:cs typeface="Helvetica Neue"/>
-                <a:sym typeface="Helvetica Neue"/>
-              </a:rPr>
-              <a:t>1</a:t>
-            </a:r>
-            <a:r>
-              <a:t> vs</a:t>
-            </a:r>
-            <a:r>
-              <a:rPr b="1">
-                <a:solidFill>
-                  <a:srgbClr val="005493"/>
-                </a:solidFill>
-                <a:latin typeface="Helvetica Neue"/>
-                <a:ea typeface="Helvetica Neue"/>
-                <a:cs typeface="Helvetica Neue"/>
-                <a:sym typeface="Helvetica Neue"/>
-              </a:rPr>
-              <a:t> 3</a:t>
-            </a:r>
-          </a:p>
-          <a:p>
-            <a:pPr marL="814358" lvl="2" indent="-271452" defTabSz="168904">
-              <a:spcBef>
-                <a:spcPts val="2180"/>
-              </a:spcBef>
-              <a:buSzPct val="75000"/>
-              <a:defRPr sz="3230">
-                <a:latin typeface="Helvetica Neue Light"/>
-                <a:ea typeface="Helvetica Neue Light"/>
-                <a:cs typeface="Helvetica Neue Light"/>
-                <a:sym typeface="Helvetica Neue Light"/>
-              </a:defRPr>
-            </a:pPr>
-            <a:r>
-              <a:rPr b="1">
-                <a:solidFill>
-                  <a:srgbClr val="4F8F00"/>
-                </a:solidFill>
-                <a:latin typeface="Helvetica Neue"/>
-                <a:ea typeface="Helvetica Neue"/>
-                <a:cs typeface="Helvetica Neue"/>
-                <a:sym typeface="Helvetica Neue"/>
-              </a:rPr>
-              <a:t>2</a:t>
-            </a:r>
-            <a:r>
-              <a:t> vs</a:t>
-            </a:r>
-            <a:r>
-              <a:rPr b="1">
-                <a:solidFill>
-                  <a:srgbClr val="005493"/>
-                </a:solidFill>
-                <a:latin typeface="Helvetica Neue"/>
-                <a:ea typeface="Helvetica Neue"/>
-                <a:cs typeface="Helvetica Neue"/>
-                <a:sym typeface="Helvetica Neue"/>
-              </a:rPr>
-              <a:t> 3</a:t>
-            </a:r>
-          </a:p>
-          <a:p>
-            <a:pPr marL="814358" lvl="2" indent="-271452" defTabSz="168904">
-              <a:spcBef>
-                <a:spcPts val="2180"/>
-              </a:spcBef>
-              <a:buSzPct val="75000"/>
-              <a:defRPr sz="3230">
-                <a:latin typeface="Helvetica Neue Light"/>
-                <a:ea typeface="Helvetica Neue Light"/>
-                <a:cs typeface="Helvetica Neue Light"/>
-                <a:sym typeface="Helvetica Neue Light"/>
-              </a:defRPr>
-            </a:pPr>
-            <a:r>
-              <a:rPr b="1">
-                <a:solidFill>
-                  <a:srgbClr val="4F8F00"/>
-                </a:solidFill>
-                <a:latin typeface="Helvetica Neue"/>
-                <a:ea typeface="Helvetica Neue"/>
-                <a:cs typeface="Helvetica Neue"/>
-                <a:sym typeface="Helvetica Neue"/>
-              </a:rPr>
-              <a:t>4</a:t>
-            </a:r>
-            <a:r>
-              <a:t> vs</a:t>
-            </a:r>
-            <a:r>
-              <a:rPr b="1">
-                <a:solidFill>
-                  <a:srgbClr val="005493"/>
-                </a:solidFill>
-                <a:latin typeface="Helvetica Neue"/>
-                <a:ea typeface="Helvetica Neue"/>
-                <a:cs typeface="Helvetica Neue"/>
-                <a:sym typeface="Helvetica Neue"/>
-              </a:rPr>
-              <a:t> 5</a:t>
-            </a:r>
-          </a:p>
-          <a:p>
-            <a:pPr marL="814358" lvl="2" indent="-271452" defTabSz="168904">
-              <a:spcBef>
-                <a:spcPts val="2180"/>
-              </a:spcBef>
-              <a:buSzPct val="75000"/>
-              <a:defRPr sz="3230">
-                <a:latin typeface="Helvetica Neue Light"/>
-                <a:ea typeface="Helvetica Neue Light"/>
-                <a:cs typeface="Helvetica Neue Light"/>
-                <a:sym typeface="Helvetica Neue Light"/>
-              </a:defRPr>
-            </a:pPr>
-            <a:r>
-              <a:t>etc</a:t>
-            </a:r>
-          </a:p>
-          <a:p>
-            <a:pPr marL="271452" indent="-271452" defTabSz="168904">
-              <a:spcBef>
-                <a:spcPts val="2180"/>
-              </a:spcBef>
-              <a:buSzPct val="75000"/>
-              <a:defRPr sz="3230">
-                <a:latin typeface="Helvetica Neue Light"/>
-                <a:ea typeface="Helvetica Neue Light"/>
-                <a:cs typeface="Helvetica Neue Light"/>
-                <a:sym typeface="Helvetica Neue Light"/>
-              </a:defRPr>
-            </a:pPr>
-            <a:r>
-              <a:t>Classify value into the class that wins the most duels </a:t>
+              <a:t>Multi-class Classification</a:t>
             </a:r>
           </a:p>
         </p:txBody>
@@ -6677,8 +7467,8 @@
           </a:p>
         </p:txBody>
       </p:sp>
-      <mc:AlternateContent xmlns:mc="http://schemas.openxmlformats.org/markup-compatibility/2006">
-        <mc:Choice xmlns:a14="http://schemas.microsoft.com/office/drawing/2010/main" Requires="a14">
+      <mc:AlternateContent xmlns:mc="http://schemas.openxmlformats.org/markup-compatibility/2006" xmlns:a14="http://schemas.microsoft.com/office/drawing/2010/main">
+        <mc:Choice Requires="a14">
           <p:sp>
             <p:nvSpPr>
               <p:cNvPr id="3" name="LaTeX equation" descr="(y_i-\hat{y}_i)^2"/>
@@ -6847,7 +7637,7 @@
             </p:txBody>
           </p:sp>
         </mc:Choice>
-        <mc:Fallback>
+        <mc:Fallback xmlns="">
           <p:sp>
             <p:nvSpPr>
               <p:cNvPr id="3" name="LaTeX equation" descr="(y_i-\hat{y}_i)^2"/>
@@ -6886,8 +7676,8 @@
           </p:sp>
         </mc:Fallback>
       </mc:AlternateContent>
-      <mc:AlternateContent xmlns:mc="http://schemas.openxmlformats.org/markup-compatibility/2006">
-        <mc:Choice xmlns:a14="http://schemas.microsoft.com/office/drawing/2010/main" Requires="a14">
+      <mc:AlternateContent xmlns:mc="http://schemas.openxmlformats.org/markup-compatibility/2006" xmlns:a14="http://schemas.microsoft.com/office/drawing/2010/main">
+        <mc:Choice Requires="a14">
           <p:sp>
             <p:nvSpPr>
               <p:cNvPr id="5" name="LaTeX equation" descr="\left|y_i-\hat{y}_i\right|^2"/>
@@ -7058,7 +7848,7 @@
             </p:txBody>
           </p:sp>
         </mc:Choice>
-        <mc:Fallback>
+        <mc:Fallback xmlns="">
           <p:sp>
             <p:nvSpPr>
               <p:cNvPr id="5" name="LaTeX equation" descr="\left|y_i-\hat{y}_i\right|^2"/>
@@ -7125,7 +7915,7 @@
       </p:grpSpPr>
       <p:sp>
         <p:nvSpPr>
-          <p:cNvPr id="623" name="OvA Versus OvO"/>
+          <p:cNvPr id="611" name="Multi-class Strategies"/>
           <p:cNvSpPr txBox="1">
             <a:spLocks noGrp="1"/>
           </p:cNvSpPr>
@@ -7143,14 +7933,14 @@
           <a:lstStyle/>
           <a:p>
             <a:r>
-              <a:t>OvA Versus OvO</a:t>
-            </a:r>
-          </a:p>
-        </p:txBody>
-      </p:sp>
-      <p:sp>
-        <p:nvSpPr>
-          <p:cNvPr id="624" name="Suppose there are q classes…"/>
+              <a:t>Multi-class Strategies </a:t>
+            </a:r>
+          </a:p>
+        </p:txBody>
+      </p:sp>
+      <p:sp>
+        <p:nvSpPr>
+          <p:cNvPr id="612" name="Some classifiers (e.g., Random Forest, Naive Bayes, KNN) are capable of handling multiple classes directly…"/>
           <p:cNvSpPr txBox="1">
             <a:spLocks noGrp="1"/>
           </p:cNvSpPr>
@@ -7165,16 +7955,13 @@
         </p:spPr>
         <p:txBody>
           <a:bodyPr>
-            <a:normAutofit fontScale="77500" lnSpcReduction="20000"/>
+            <a:normAutofit/>
           </a:bodyPr>
           <a:lstStyle/>
           <a:p>
-            <a:pPr marL="262881" indent="-262881" defTabSz="163570">
-              <a:spcBef>
-                <a:spcPts val="2109"/>
-              </a:spcBef>
+            <a:pPr marL="285740" indent="-285740">
               <a:buSzPct val="75000"/>
-              <a:defRPr sz="3128">
+              <a:defRPr sz="3400">
                 <a:latin typeface="Helvetica Neue Light"/>
                 <a:ea typeface="Helvetica Neue Light"/>
                 <a:cs typeface="Helvetica Neue Light"/>
@@ -7182,17 +7969,14 @@
               </a:defRPr>
             </a:pPr>
             <a:r>
-              <a:rPr dirty="0"/>
-              <a:t>Suppose there are q classes</a:t>
-            </a:r>
-          </a:p>
-          <a:p>
-            <a:pPr marL="262881" indent="-262881" defTabSz="163570">
-              <a:spcBef>
-                <a:spcPts val="2109"/>
-              </a:spcBef>
+              <a:rPr sz="2600" dirty="0"/>
+              <a:t>Some classifiers (e.g., Naive Bayes, KNN) are capable of handling multiple classes directly</a:t>
+            </a:r>
+          </a:p>
+          <a:p>
+            <a:pPr marL="285740" indent="-285740">
               <a:buSzPct val="75000"/>
-              <a:defRPr sz="3128">
+              <a:defRPr sz="3400">
                 <a:latin typeface="Helvetica Neue Light"/>
                 <a:ea typeface="Helvetica Neue Light"/>
                 <a:cs typeface="Helvetica Neue Light"/>
@@ -7200,21 +7984,22 @@
               </a:defRPr>
             </a:pPr>
             <a:r>
-              <a:rPr dirty="0" err="1"/>
-              <a:t>OvO</a:t>
-            </a:r>
-            <a:r>
-              <a:rPr dirty="0"/>
-              <a:t> requires training q(q-1)/2 classifiers </a:t>
-            </a:r>
-          </a:p>
-          <a:p>
-            <a:pPr marL="788641" lvl="2" indent="-262881" defTabSz="163570">
-              <a:spcBef>
-                <a:spcPts val="2109"/>
-              </a:spcBef>
+              <a:rPr sz="2600" dirty="0"/>
+              <a:t>Other classifiers (e.g.,</a:t>
+            </a:r>
+            <a:r>
+              <a:rPr lang="en-US" sz="2600" dirty="0"/>
+              <a:t> </a:t>
+            </a:r>
+            <a:r>
+              <a:rPr sz="2600" dirty="0"/>
+              <a:t>logistic regression) are binary classifiers</a:t>
+            </a:r>
+          </a:p>
+          <a:p>
+            <a:pPr marL="285740" indent="-285740">
               <a:buSzPct val="75000"/>
-              <a:defRPr sz="3128">
+              <a:defRPr sz="3400">
                 <a:latin typeface="Helvetica Neue Light"/>
                 <a:ea typeface="Helvetica Neue Light"/>
                 <a:cs typeface="Helvetica Neue Light"/>
@@ -7222,17 +8007,14 @@
               </a:defRPr>
             </a:pPr>
             <a:r>
-              <a:rPr dirty="0"/>
-              <a:t>For the MNIST example this means 10(10-1)/2 = 45 classifiers</a:t>
-            </a:r>
-          </a:p>
-          <a:p>
-            <a:pPr marL="788641" lvl="2" indent="-262881" defTabSz="163570">
-              <a:spcBef>
-                <a:spcPts val="2109"/>
-              </a:spcBef>
+              <a:rPr sz="2600" dirty="0"/>
+              <a:t>For binary classifiers, there are two strategies for extending to multiple classes:</a:t>
+            </a:r>
+          </a:p>
+          <a:p>
+            <a:pPr marL="857220" lvl="2" indent="-285740">
               <a:buSzPct val="75000"/>
-              <a:defRPr sz="3128">
+              <a:defRPr sz="3400">
                 <a:latin typeface="Helvetica Neue Light"/>
                 <a:ea typeface="Helvetica Neue Light"/>
                 <a:cs typeface="Helvetica Neue Light"/>
@@ -7240,17 +8022,43 @@
               </a:defRPr>
             </a:pPr>
             <a:r>
-              <a:rPr dirty="0"/>
-              <a:t>However, each classifier needs only use a small subset of the data</a:t>
-            </a:r>
-          </a:p>
-          <a:p>
-            <a:pPr marL="262881" indent="-262881" defTabSz="163570">
-              <a:spcBef>
-                <a:spcPts val="2109"/>
-              </a:spcBef>
+              <a:rPr sz="2600" dirty="0"/>
+              <a:t>One-versus-all (</a:t>
+            </a:r>
+            <a:r>
+              <a:rPr sz="2600" dirty="0" err="1"/>
+              <a:t>OvA</a:t>
+            </a:r>
+            <a:r>
+              <a:rPr sz="2600" dirty="0"/>
+              <a:t>) </a:t>
+            </a:r>
+            <a:r>
+              <a:rPr lang="en-US" sz="2600" dirty="0"/>
+              <a:t>(sometimes called </a:t>
+            </a:r>
+            <a:r>
+              <a:rPr sz="2600" dirty="0"/>
+              <a:t>One-versus-rest (</a:t>
+            </a:r>
+            <a:r>
+              <a:rPr sz="2600" dirty="0" err="1"/>
+              <a:t>OvR</a:t>
+            </a:r>
+            <a:r>
+              <a:rPr sz="2600" dirty="0"/>
+              <a:t>)</a:t>
+            </a:r>
+            <a:r>
+              <a:rPr lang="en-US" sz="2600" dirty="0"/>
+              <a:t>)</a:t>
+            </a:r>
+            <a:endParaRPr sz="2600" dirty="0"/>
+          </a:p>
+          <a:p>
+            <a:pPr marL="857220" lvl="2" indent="-285740">
               <a:buSzPct val="75000"/>
-              <a:defRPr sz="3128">
+              <a:defRPr sz="3400">
                 <a:latin typeface="Helvetica Neue Light"/>
                 <a:ea typeface="Helvetica Neue Light"/>
                 <a:cs typeface="Helvetica Neue Light"/>
@@ -7258,50 +8066,16 @@
               </a:defRPr>
             </a:pPr>
             <a:r>
-              <a:rPr dirty="0"/>
-              <a:t>In general </a:t>
-            </a:r>
-            <a:r>
-              <a:rPr dirty="0" err="1"/>
-              <a:t>OvA</a:t>
-            </a:r>
-            <a:r>
-              <a:rPr dirty="0"/>
-              <a:t> is the preferred strategy</a:t>
-            </a:r>
-            <a:r>
-              <a:rPr lang="en-US" dirty="0"/>
-              <a:t> (only trains q classifiers)</a:t>
-            </a:r>
-          </a:p>
-          <a:p>
-            <a:pPr marL="262881" indent="-262881" defTabSz="163570">
-              <a:spcBef>
-                <a:spcPts val="2109"/>
-              </a:spcBef>
-              <a:buSzPct val="75000"/>
-              <a:defRPr sz="3128">
-                <a:latin typeface="Helvetica Neue Light"/>
-                <a:ea typeface="Helvetica Neue Light"/>
-                <a:cs typeface="Helvetica Neue Light"/>
-                <a:sym typeface="Helvetica Neue Light"/>
-              </a:defRPr>
-            </a:pPr>
-            <a:r>
-              <a:rPr lang="en-US" dirty="0"/>
-              <a:t>B</a:t>
-            </a:r>
-            <a:r>
-              <a:rPr dirty="0"/>
-              <a:t>ut for classifiers that scale poorly with the size of the training set (e.g., SVM) </a:t>
-            </a:r>
-            <a:r>
-              <a:rPr dirty="0" err="1"/>
+              <a:rPr sz="2600" dirty="0"/>
+              <a:t>One-versus-one (</a:t>
+            </a:r>
+            <a:r>
+              <a:rPr sz="2600" dirty="0" err="1"/>
               <a:t>OvO</a:t>
             </a:r>
             <a:r>
-              <a:rPr dirty="0"/>
-              <a:t> is preferred</a:t>
+              <a:rPr sz="2600" dirty="0"/>
+              <a:t>)</a:t>
             </a:r>
           </a:p>
         </p:txBody>
@@ -7334,6 +8108,727 @@
       </p:grpSpPr>
       <p:sp>
         <p:nvSpPr>
+          <p:cNvPr id="615" name="One Versus All (OvA)"/>
+          <p:cNvSpPr txBox="1">
+            <a:spLocks noGrp="1"/>
+          </p:cNvSpPr>
+          <p:nvPr>
+            <p:ph type="title"/>
+          </p:nvPr>
+        </p:nvSpPr>
+        <p:spPr>
+          <a:prstGeom prst="rect">
+            <a:avLst/>
+          </a:prstGeom>
+        </p:spPr>
+        <p:txBody>
+          <a:bodyPr/>
+          <a:lstStyle/>
+          <a:p>
+            <a:r>
+              <a:t>One Versus All (OvA)</a:t>
+            </a:r>
+          </a:p>
+        </p:txBody>
+      </p:sp>
+      <p:sp>
+        <p:nvSpPr>
+          <p:cNvPr id="616" name="For each class, train a model that classify that class versus all the rest:…"/>
+          <p:cNvSpPr txBox="1">
+            <a:spLocks noGrp="1"/>
+          </p:cNvSpPr>
+          <p:nvPr>
+            <p:ph type="body" idx="1"/>
+          </p:nvPr>
+        </p:nvSpPr>
+        <p:spPr>
+          <a:prstGeom prst="rect">
+            <a:avLst/>
+          </a:prstGeom>
+        </p:spPr>
+        <p:txBody>
+          <a:bodyPr>
+            <a:normAutofit/>
+          </a:bodyPr>
+          <a:lstStyle/>
+          <a:p>
+            <a:pPr marL="285740" indent="-285740">
+              <a:buSzPct val="75000"/>
+              <a:defRPr sz="3400">
+                <a:latin typeface="Helvetica Neue Light"/>
+                <a:ea typeface="Helvetica Neue Light"/>
+                <a:cs typeface="Helvetica Neue Light"/>
+                <a:sym typeface="Helvetica Neue Light"/>
+              </a:defRPr>
+            </a:pPr>
+            <a:r>
+              <a:rPr sz="2600" dirty="0"/>
+              <a:t>For each class, train a model that classify that class versus all the rest:</a:t>
+            </a:r>
+          </a:p>
+          <a:p>
+            <a:pPr marL="857220" lvl="2" indent="-285740">
+              <a:buSzPct val="75000"/>
+              <a:defRPr sz="3400">
+                <a:latin typeface="Helvetica Neue Light"/>
+                <a:ea typeface="Helvetica Neue Light"/>
+                <a:cs typeface="Helvetica Neue Light"/>
+                <a:sym typeface="Helvetica Neue Light"/>
+              </a:defRPr>
+            </a:pPr>
+            <a:r>
+              <a:rPr sz="2600" dirty="0"/>
+              <a:t>Classify </a:t>
+            </a:r>
+            <a:r>
+              <a:rPr sz="2600" b="1" dirty="0">
+                <a:solidFill>
+                  <a:srgbClr val="4F8F00"/>
+                </a:solidFill>
+                <a:latin typeface="Helvetica Neue"/>
+                <a:ea typeface="Helvetica Neue"/>
+                <a:cs typeface="Helvetica Neue"/>
+                <a:sym typeface="Helvetica Neue"/>
+              </a:rPr>
+              <a:t>1</a:t>
+            </a:r>
+            <a:r>
+              <a:rPr sz="2600" dirty="0"/>
+              <a:t> versus </a:t>
+            </a:r>
+            <a:r>
+              <a:rPr sz="2600" b="1" dirty="0">
+                <a:solidFill>
+                  <a:srgbClr val="005493"/>
+                </a:solidFill>
+                <a:latin typeface="Helvetica Neue"/>
+                <a:ea typeface="Helvetica Neue"/>
+                <a:cs typeface="Helvetica Neue"/>
+                <a:sym typeface="Helvetica Neue"/>
+              </a:rPr>
+              <a:t>not 1</a:t>
+            </a:r>
+          </a:p>
+          <a:p>
+            <a:pPr marL="857220" lvl="2" indent="-285740">
+              <a:buSzPct val="75000"/>
+              <a:defRPr sz="3400">
+                <a:latin typeface="Helvetica Neue Light"/>
+                <a:ea typeface="Helvetica Neue Light"/>
+                <a:cs typeface="Helvetica Neue Light"/>
+                <a:sym typeface="Helvetica Neue Light"/>
+              </a:defRPr>
+            </a:pPr>
+            <a:r>
+              <a:rPr sz="2600" dirty="0"/>
+              <a:t>Classify </a:t>
+            </a:r>
+            <a:r>
+              <a:rPr sz="2600" b="1" dirty="0">
+                <a:solidFill>
+                  <a:srgbClr val="4F8F00"/>
+                </a:solidFill>
+                <a:latin typeface="Helvetica Neue"/>
+                <a:ea typeface="Helvetica Neue"/>
+                <a:cs typeface="Helvetica Neue"/>
+                <a:sym typeface="Helvetica Neue"/>
+              </a:rPr>
+              <a:t>2</a:t>
+            </a:r>
+            <a:r>
+              <a:rPr sz="2600" dirty="0"/>
+              <a:t> versus </a:t>
+            </a:r>
+            <a:r>
+              <a:rPr sz="2600" b="1" dirty="0">
+                <a:solidFill>
+                  <a:srgbClr val="005493"/>
+                </a:solidFill>
+                <a:latin typeface="Helvetica Neue"/>
+                <a:ea typeface="Helvetica Neue"/>
+                <a:cs typeface="Helvetica Neue"/>
+                <a:sym typeface="Helvetica Neue"/>
+              </a:rPr>
+              <a:t>not 2</a:t>
+            </a:r>
+          </a:p>
+          <a:p>
+            <a:pPr marL="857220" lvl="2" indent="-285740">
+              <a:buSzPct val="75000"/>
+              <a:defRPr sz="3400">
+                <a:latin typeface="Helvetica Neue Light"/>
+                <a:ea typeface="Helvetica Neue Light"/>
+                <a:cs typeface="Helvetica Neue Light"/>
+                <a:sym typeface="Helvetica Neue Light"/>
+              </a:defRPr>
+            </a:pPr>
+            <a:r>
+              <a:rPr sz="2600" dirty="0"/>
+              <a:t>etc.</a:t>
+            </a:r>
+          </a:p>
+          <a:p>
+            <a:pPr marL="285740" indent="-285740">
+              <a:buSzPct val="75000"/>
+              <a:defRPr sz="3400">
+                <a:latin typeface="Helvetica Neue Light"/>
+                <a:ea typeface="Helvetica Neue Light"/>
+                <a:cs typeface="Helvetica Neue Light"/>
+                <a:sym typeface="Helvetica Neue Light"/>
+              </a:defRPr>
+            </a:pPr>
+            <a:r>
+              <a:rPr sz="2600" dirty="0"/>
+              <a:t>Classify a value into the classier whose classifier outputs the highest score</a:t>
+            </a:r>
+            <a:r>
+              <a:rPr lang="en-US" sz="2600" dirty="0"/>
+              <a:t> (e.g., predictive probabilities)</a:t>
+            </a:r>
+            <a:endParaRPr sz="2600" dirty="0"/>
+          </a:p>
+        </p:txBody>
+      </p:sp>
+    </p:spTree>
+  </p:cSld>
+  <p:clrMapOvr>
+    <a:masterClrMapping/>
+  </p:clrMapOvr>
+  <p:transition spd="med"/>
+</p:sld>
+</file>
+
+<file path=ppt/slides/slide22.xml><?xml version="1.0" encoding="utf-8"?>
+<p:sld xmlns:a="http://schemas.openxmlformats.org/drawingml/2006/main" xmlns:r="http://schemas.openxmlformats.org/officeDocument/2006/relationships" xmlns:p="http://schemas.openxmlformats.org/presentationml/2006/main">
+  <p:cSld>
+    <p:spTree>
+      <p:nvGrpSpPr>
+        <p:cNvPr id="1" name=""/>
+        <p:cNvGrpSpPr/>
+        <p:nvPr/>
+      </p:nvGrpSpPr>
+      <p:grpSpPr>
+        <a:xfrm>
+          <a:off x="0" y="0"/>
+          <a:ext cx="0" cy="0"/>
+          <a:chOff x="0" y="0"/>
+          <a:chExt cx="0" cy="0"/>
+        </a:xfrm>
+      </p:grpSpPr>
+      <p:sp>
+        <p:nvSpPr>
+          <p:cNvPr id="619" name="One Versus One (OvO)"/>
+          <p:cNvSpPr txBox="1">
+            <a:spLocks noGrp="1"/>
+          </p:cNvSpPr>
+          <p:nvPr>
+            <p:ph type="title"/>
+          </p:nvPr>
+        </p:nvSpPr>
+        <p:spPr>
+          <a:prstGeom prst="rect">
+            <a:avLst/>
+          </a:prstGeom>
+        </p:spPr>
+        <p:txBody>
+          <a:bodyPr/>
+          <a:lstStyle/>
+          <a:p>
+            <a:r>
+              <a:t>One Versus One (OvO)</a:t>
+            </a:r>
+          </a:p>
+        </p:txBody>
+      </p:sp>
+      <p:sp>
+        <p:nvSpPr>
+          <p:cNvPr id="620" name="Train a binary classifier for every pair of classes…"/>
+          <p:cNvSpPr txBox="1">
+            <a:spLocks noGrp="1"/>
+          </p:cNvSpPr>
+          <p:nvPr>
+            <p:ph type="body" idx="1"/>
+          </p:nvPr>
+        </p:nvSpPr>
+        <p:spPr>
+          <a:prstGeom prst="rect">
+            <a:avLst/>
+          </a:prstGeom>
+        </p:spPr>
+        <p:txBody>
+          <a:bodyPr>
+            <a:normAutofit fontScale="62500" lnSpcReduction="20000"/>
+          </a:bodyPr>
+          <a:lstStyle/>
+          <a:p>
+            <a:pPr marL="271452" indent="-271452" defTabSz="168904">
+              <a:spcBef>
+                <a:spcPts val="2180"/>
+              </a:spcBef>
+              <a:buSzPct val="75000"/>
+              <a:defRPr sz="3230">
+                <a:latin typeface="Helvetica Neue Light"/>
+                <a:ea typeface="Helvetica Neue Light"/>
+                <a:cs typeface="Helvetica Neue Light"/>
+                <a:sym typeface="Helvetica Neue Light"/>
+              </a:defRPr>
+            </a:pPr>
+            <a:r>
+              <a:rPr dirty="0"/>
+              <a:t>Train a binary classifier for every pair of classes</a:t>
+            </a:r>
+          </a:p>
+          <a:p>
+            <a:pPr marL="814358" lvl="2" indent="-271452" defTabSz="168904">
+              <a:spcBef>
+                <a:spcPts val="2180"/>
+              </a:spcBef>
+              <a:buSzPct val="75000"/>
+              <a:defRPr sz="3230">
+                <a:latin typeface="Helvetica Neue Light"/>
+                <a:ea typeface="Helvetica Neue Light"/>
+                <a:cs typeface="Helvetica Neue Light"/>
+                <a:sym typeface="Helvetica Neue Light"/>
+              </a:defRPr>
+            </a:pPr>
+            <a:r>
+              <a:rPr b="1" dirty="0">
+                <a:solidFill>
+                  <a:srgbClr val="4F8F00"/>
+                </a:solidFill>
+                <a:latin typeface="Helvetica Neue"/>
+                <a:ea typeface="Helvetica Neue"/>
+                <a:cs typeface="Helvetica Neue"/>
+                <a:sym typeface="Helvetica Neue"/>
+              </a:rPr>
+              <a:t>1</a:t>
+            </a:r>
+            <a:r>
+              <a:rPr dirty="0"/>
+              <a:t> vs</a:t>
+            </a:r>
+            <a:r>
+              <a:rPr b="1" dirty="0">
+                <a:solidFill>
+                  <a:srgbClr val="005493"/>
+                </a:solidFill>
+                <a:latin typeface="Helvetica Neue"/>
+                <a:ea typeface="Helvetica Neue"/>
+                <a:cs typeface="Helvetica Neue"/>
+                <a:sym typeface="Helvetica Neue"/>
+              </a:rPr>
+              <a:t> 2</a:t>
+            </a:r>
+          </a:p>
+          <a:p>
+            <a:pPr marL="814358" lvl="2" indent="-271452" defTabSz="168904">
+              <a:spcBef>
+                <a:spcPts val="2180"/>
+              </a:spcBef>
+              <a:buSzPct val="75000"/>
+              <a:defRPr sz="3230">
+                <a:latin typeface="Helvetica Neue Light"/>
+                <a:ea typeface="Helvetica Neue Light"/>
+                <a:cs typeface="Helvetica Neue Light"/>
+                <a:sym typeface="Helvetica Neue Light"/>
+              </a:defRPr>
+            </a:pPr>
+            <a:r>
+              <a:rPr b="1" dirty="0">
+                <a:solidFill>
+                  <a:srgbClr val="4F8F00"/>
+                </a:solidFill>
+                <a:latin typeface="Helvetica Neue"/>
+                <a:ea typeface="Helvetica Neue"/>
+                <a:cs typeface="Helvetica Neue"/>
+                <a:sym typeface="Helvetica Neue"/>
+              </a:rPr>
+              <a:t>1</a:t>
+            </a:r>
+            <a:r>
+              <a:rPr dirty="0"/>
+              <a:t> vs</a:t>
+            </a:r>
+            <a:r>
+              <a:rPr b="1" dirty="0">
+                <a:solidFill>
+                  <a:srgbClr val="005493"/>
+                </a:solidFill>
+                <a:latin typeface="Helvetica Neue"/>
+                <a:ea typeface="Helvetica Neue"/>
+                <a:cs typeface="Helvetica Neue"/>
+                <a:sym typeface="Helvetica Neue"/>
+              </a:rPr>
+              <a:t> 3</a:t>
+            </a:r>
+          </a:p>
+          <a:p>
+            <a:pPr marL="814358" lvl="2" indent="-271452" defTabSz="168904">
+              <a:spcBef>
+                <a:spcPts val="2180"/>
+              </a:spcBef>
+              <a:buSzPct val="75000"/>
+              <a:defRPr sz="3230">
+                <a:latin typeface="Helvetica Neue Light"/>
+                <a:ea typeface="Helvetica Neue Light"/>
+                <a:cs typeface="Helvetica Neue Light"/>
+                <a:sym typeface="Helvetica Neue Light"/>
+              </a:defRPr>
+            </a:pPr>
+            <a:r>
+              <a:rPr b="1" dirty="0">
+                <a:solidFill>
+                  <a:srgbClr val="4F8F00"/>
+                </a:solidFill>
+                <a:latin typeface="Helvetica Neue"/>
+                <a:ea typeface="Helvetica Neue"/>
+                <a:cs typeface="Helvetica Neue"/>
+                <a:sym typeface="Helvetica Neue"/>
+              </a:rPr>
+              <a:t>2</a:t>
+            </a:r>
+            <a:r>
+              <a:rPr dirty="0"/>
+              <a:t> vs</a:t>
+            </a:r>
+            <a:r>
+              <a:rPr b="1" dirty="0">
+                <a:solidFill>
+                  <a:srgbClr val="005493"/>
+                </a:solidFill>
+                <a:latin typeface="Helvetica Neue"/>
+                <a:ea typeface="Helvetica Neue"/>
+                <a:cs typeface="Helvetica Neue"/>
+                <a:sym typeface="Helvetica Neue"/>
+              </a:rPr>
+              <a:t> 3</a:t>
+            </a:r>
+          </a:p>
+          <a:p>
+            <a:pPr marL="814358" lvl="2" indent="-271452" defTabSz="168904">
+              <a:spcBef>
+                <a:spcPts val="2180"/>
+              </a:spcBef>
+              <a:buSzPct val="75000"/>
+              <a:defRPr sz="3230">
+                <a:latin typeface="Helvetica Neue Light"/>
+                <a:ea typeface="Helvetica Neue Light"/>
+                <a:cs typeface="Helvetica Neue Light"/>
+                <a:sym typeface="Helvetica Neue Light"/>
+              </a:defRPr>
+            </a:pPr>
+            <a:r>
+              <a:rPr b="1" dirty="0">
+                <a:solidFill>
+                  <a:srgbClr val="4F8F00"/>
+                </a:solidFill>
+                <a:latin typeface="Helvetica Neue"/>
+                <a:ea typeface="Helvetica Neue"/>
+                <a:cs typeface="Helvetica Neue"/>
+                <a:sym typeface="Helvetica Neue"/>
+              </a:rPr>
+              <a:t>4</a:t>
+            </a:r>
+            <a:r>
+              <a:rPr dirty="0"/>
+              <a:t> vs</a:t>
+            </a:r>
+            <a:r>
+              <a:rPr b="1" dirty="0">
+                <a:solidFill>
+                  <a:srgbClr val="005493"/>
+                </a:solidFill>
+                <a:latin typeface="Helvetica Neue"/>
+                <a:ea typeface="Helvetica Neue"/>
+                <a:cs typeface="Helvetica Neue"/>
+                <a:sym typeface="Helvetica Neue"/>
+              </a:rPr>
+              <a:t> 5</a:t>
+            </a:r>
+          </a:p>
+          <a:p>
+            <a:pPr marL="814358" lvl="2" indent="-271452" defTabSz="168904">
+              <a:spcBef>
+                <a:spcPts val="2180"/>
+              </a:spcBef>
+              <a:buSzPct val="75000"/>
+              <a:defRPr sz="3230">
+                <a:latin typeface="Helvetica Neue Light"/>
+                <a:ea typeface="Helvetica Neue Light"/>
+                <a:cs typeface="Helvetica Neue Light"/>
+                <a:sym typeface="Helvetica Neue Light"/>
+              </a:defRPr>
+            </a:pPr>
+            <a:r>
+              <a:rPr lang="en-US"/>
+              <a:t>E</a:t>
+            </a:r>
+            <a:r>
+              <a:t>tc</a:t>
+            </a:r>
+            <a:r>
+              <a:rPr lang="en-US"/>
+              <a:t>.</a:t>
+            </a:r>
+            <a:endParaRPr/>
+          </a:p>
+          <a:p>
+            <a:pPr marL="271452" indent="-271452" defTabSz="168904">
+              <a:spcBef>
+                <a:spcPts val="2180"/>
+              </a:spcBef>
+              <a:buSzPct val="75000"/>
+              <a:defRPr sz="3230">
+                <a:latin typeface="Helvetica Neue Light"/>
+                <a:ea typeface="Helvetica Neue Light"/>
+                <a:cs typeface="Helvetica Neue Light"/>
+                <a:sym typeface="Helvetica Neue Light"/>
+              </a:defRPr>
+            </a:pPr>
+            <a:r>
+              <a:rPr dirty="0"/>
+              <a:t>Classify value into the class that wins the most duels </a:t>
+            </a:r>
+          </a:p>
+        </p:txBody>
+      </p:sp>
+    </p:spTree>
+  </p:cSld>
+  <p:clrMapOvr>
+    <a:masterClrMapping/>
+  </p:clrMapOvr>
+  <p:transition spd="med"/>
+</p:sld>
+</file>
+
+<file path=ppt/slides/slide23.xml><?xml version="1.0" encoding="utf-8"?>
+<p:sld xmlns:a="http://schemas.openxmlformats.org/drawingml/2006/main" xmlns:r="http://schemas.openxmlformats.org/officeDocument/2006/relationships" xmlns:p="http://schemas.openxmlformats.org/presentationml/2006/main">
+  <p:cSld>
+    <p:spTree>
+      <p:nvGrpSpPr>
+        <p:cNvPr id="1" name=""/>
+        <p:cNvGrpSpPr/>
+        <p:nvPr/>
+      </p:nvGrpSpPr>
+      <p:grpSpPr>
+        <a:xfrm>
+          <a:off x="0" y="0"/>
+          <a:ext cx="0" cy="0"/>
+          <a:chOff x="0" y="0"/>
+          <a:chExt cx="0" cy="0"/>
+        </a:xfrm>
+      </p:grpSpPr>
+      <p:sp>
+        <p:nvSpPr>
+          <p:cNvPr id="623" name="OvA Versus OvO"/>
+          <p:cNvSpPr txBox="1">
+            <a:spLocks noGrp="1"/>
+          </p:cNvSpPr>
+          <p:nvPr>
+            <p:ph type="title"/>
+          </p:nvPr>
+        </p:nvSpPr>
+        <p:spPr>
+          <a:prstGeom prst="rect">
+            <a:avLst/>
+          </a:prstGeom>
+        </p:spPr>
+        <p:txBody>
+          <a:bodyPr/>
+          <a:lstStyle/>
+          <a:p>
+            <a:r>
+              <a:t>OvA Versus OvO</a:t>
+            </a:r>
+          </a:p>
+        </p:txBody>
+      </p:sp>
+      <p:sp>
+        <p:nvSpPr>
+          <p:cNvPr id="624" name="Suppose there are q classes…"/>
+          <p:cNvSpPr txBox="1">
+            <a:spLocks noGrp="1"/>
+          </p:cNvSpPr>
+          <p:nvPr>
+            <p:ph type="body" idx="1"/>
+          </p:nvPr>
+        </p:nvSpPr>
+        <p:spPr>
+          <a:prstGeom prst="rect">
+            <a:avLst/>
+          </a:prstGeom>
+        </p:spPr>
+        <p:txBody>
+          <a:bodyPr>
+            <a:normAutofit fontScale="77500" lnSpcReduction="20000"/>
+          </a:bodyPr>
+          <a:lstStyle/>
+          <a:p>
+            <a:pPr marL="262881" indent="-262881" defTabSz="163570">
+              <a:spcBef>
+                <a:spcPts val="2109"/>
+              </a:spcBef>
+              <a:buSzPct val="75000"/>
+              <a:defRPr sz="3128">
+                <a:latin typeface="Helvetica Neue Light"/>
+                <a:ea typeface="Helvetica Neue Light"/>
+                <a:cs typeface="Helvetica Neue Light"/>
+                <a:sym typeface="Helvetica Neue Light"/>
+              </a:defRPr>
+            </a:pPr>
+            <a:r>
+              <a:rPr dirty="0"/>
+              <a:t>Suppose there are q classes</a:t>
+            </a:r>
+          </a:p>
+          <a:p>
+            <a:pPr marL="262881" indent="-262881" defTabSz="163570">
+              <a:spcBef>
+                <a:spcPts val="2109"/>
+              </a:spcBef>
+              <a:buSzPct val="75000"/>
+              <a:defRPr sz="3128">
+                <a:latin typeface="Helvetica Neue Light"/>
+                <a:ea typeface="Helvetica Neue Light"/>
+                <a:cs typeface="Helvetica Neue Light"/>
+                <a:sym typeface="Helvetica Neue Light"/>
+              </a:defRPr>
+            </a:pPr>
+            <a:r>
+              <a:rPr dirty="0" err="1"/>
+              <a:t>OvO</a:t>
+            </a:r>
+            <a:r>
+              <a:rPr dirty="0"/>
+              <a:t> requires training q(q-1)/2 classifiers </a:t>
+            </a:r>
+          </a:p>
+          <a:p>
+            <a:pPr marL="788641" lvl="2" indent="-262881" defTabSz="163570">
+              <a:spcBef>
+                <a:spcPts val="2109"/>
+              </a:spcBef>
+              <a:buSzPct val="75000"/>
+              <a:defRPr sz="3128">
+                <a:latin typeface="Helvetica Neue Light"/>
+                <a:ea typeface="Helvetica Neue Light"/>
+                <a:cs typeface="Helvetica Neue Light"/>
+                <a:sym typeface="Helvetica Neue Light"/>
+              </a:defRPr>
+            </a:pPr>
+            <a:r>
+              <a:rPr dirty="0"/>
+              <a:t>For the MNIST example this means 10(10-1)/2 = 45 classifiers</a:t>
+            </a:r>
+          </a:p>
+          <a:p>
+            <a:pPr marL="788641" lvl="2" indent="-262881" defTabSz="163570">
+              <a:spcBef>
+                <a:spcPts val="2109"/>
+              </a:spcBef>
+              <a:buSzPct val="75000"/>
+              <a:defRPr sz="3128">
+                <a:latin typeface="Helvetica Neue Light"/>
+                <a:ea typeface="Helvetica Neue Light"/>
+                <a:cs typeface="Helvetica Neue Light"/>
+                <a:sym typeface="Helvetica Neue Light"/>
+              </a:defRPr>
+            </a:pPr>
+            <a:r>
+              <a:rPr dirty="0"/>
+              <a:t>However, each classifier needs only use a small subset of the data</a:t>
+            </a:r>
+          </a:p>
+          <a:p>
+            <a:pPr marL="262881" indent="-262881" defTabSz="163570">
+              <a:spcBef>
+                <a:spcPts val="2109"/>
+              </a:spcBef>
+              <a:buSzPct val="75000"/>
+              <a:defRPr sz="3128">
+                <a:latin typeface="Helvetica Neue Light"/>
+                <a:ea typeface="Helvetica Neue Light"/>
+                <a:cs typeface="Helvetica Neue Light"/>
+                <a:sym typeface="Helvetica Neue Light"/>
+              </a:defRPr>
+            </a:pPr>
+            <a:r>
+              <a:rPr dirty="0"/>
+              <a:t>In general </a:t>
+            </a:r>
+            <a:r>
+              <a:rPr dirty="0" err="1"/>
+              <a:t>OvA</a:t>
+            </a:r>
+            <a:r>
+              <a:rPr dirty="0"/>
+              <a:t> is the preferred strategy</a:t>
+            </a:r>
+            <a:r>
+              <a:rPr lang="en-US" dirty="0"/>
+              <a:t> (only trains q classifiers)</a:t>
+            </a:r>
+          </a:p>
+          <a:p>
+            <a:pPr marL="262881" indent="-262881" defTabSz="163570">
+              <a:spcBef>
+                <a:spcPts val="2109"/>
+              </a:spcBef>
+              <a:buSzPct val="75000"/>
+              <a:defRPr sz="3128">
+                <a:latin typeface="Helvetica Neue Light"/>
+                <a:ea typeface="Helvetica Neue Light"/>
+                <a:cs typeface="Helvetica Neue Light"/>
+                <a:sym typeface="Helvetica Neue Light"/>
+              </a:defRPr>
+            </a:pPr>
+            <a:r>
+              <a:rPr lang="en-US" dirty="0"/>
+              <a:t>B</a:t>
+            </a:r>
+            <a:r>
+              <a:rPr dirty="0"/>
+              <a:t>ut for classifiers that scale poorly with the size of the training set (e.g., SVM) </a:t>
+            </a:r>
+            <a:r>
+              <a:rPr dirty="0" err="1"/>
+              <a:t>OvO</a:t>
+            </a:r>
+            <a:r>
+              <a:rPr dirty="0"/>
+              <a:t> is preferred</a:t>
+            </a:r>
+          </a:p>
+        </p:txBody>
+      </p:sp>
+    </p:spTree>
+  </p:cSld>
+  <p:clrMapOvr>
+    <a:masterClrMapping/>
+  </p:clrMapOvr>
+  <p:transition spd="med"/>
+</p:sld>
+</file>
+
+<file path=ppt/slides/slide24.xml><?xml version="1.0" encoding="utf-8"?>
+<p:sld xmlns:a="http://schemas.openxmlformats.org/drawingml/2006/main" xmlns:r="http://schemas.openxmlformats.org/officeDocument/2006/relationships" xmlns:p="http://schemas.openxmlformats.org/presentationml/2006/main">
+  <p:cSld>
+    <p:spTree>
+      <p:nvGrpSpPr>
+        <p:cNvPr id="1" name=""/>
+        <p:cNvGrpSpPr/>
+        <p:nvPr/>
+      </p:nvGrpSpPr>
+      <p:grpSpPr>
+        <a:xfrm>
+          <a:off x="0" y="0"/>
+          <a:ext cx="0" cy="0"/>
+          <a:chOff x="0" y="0"/>
+          <a:chExt cx="0" cy="0"/>
+        </a:xfrm>
+      </p:grpSpPr>
+      <p:sp>
+        <p:nvSpPr>
           <p:cNvPr id="627" name="Softmax function"/>
           <p:cNvSpPr txBox="1">
             <a:spLocks noGrp="1"/>
@@ -7374,46 +8869,85 @@
         </p:nvSpPr>
         <p:spPr>
           <a:xfrm>
-            <a:off x="1338858" y="1825415"/>
-            <a:ext cx="8161734" cy="2236294"/>
+            <a:off x="704088" y="1828800"/>
+            <a:ext cx="10689336" cy="2240280"/>
           </a:xfrm>
           <a:prstGeom prst="rect">
             <a:avLst/>
           </a:prstGeom>
         </p:spPr>
         <p:txBody>
-          <a:bodyPr/>
+          <a:bodyPr wrap="square"/>
           <a:lstStyle/>
           <a:p>
             <a:r>
+              <a:rPr lang="en-US"/>
+              <a:t>OvA and OvO combine binary classifiers to handle multiple classes.</a:t>
+            </a:r>
+          </a:p>
+          <a:p>
+            <a:r>
+              <a:rPr lang="en-US"/>
+              <a:t>Softmax supports another approach: extend logistic regression to predict all classes together.</a:t>
+            </a:r>
+          </a:p>
+          <a:p>
+            <a:r>
+              <a:rPr lang="en-US"/>
+              <a:t>It </a:t>
+            </a:r>
+            <a:r>
               <a:rPr dirty="0"/>
-              <a:t>A mathematical function that converts a vector of real-valued scores into a probability distribution</a:t>
-            </a:r>
-            <a:endParaRPr lang="en-US" dirty="0"/>
-          </a:p>
-          <a:p>
-            <a:r>
-              <a:rPr lang="en-US" dirty="0"/>
-              <a:t>Used to convert real-valued outputs to “probabilities”</a:t>
+              <a:t>converts </a:t>
+            </a:r>
+            <a:r>
+              <a:rPr lang="en-US"/>
+              <a:t>one </a:t>
+            </a:r>
+            <a:r>
+              <a:rPr dirty="0"/>
+              <a:t>real-valued </a:t>
+            </a:r>
+            <a:r>
+              <a:rPr lang="en-US"/>
+              <a:t>score per class </a:t>
+            </a:r>
+            <a:r>
+              <a:rPr dirty="0"/>
+              <a:t>into a probability distribution</a:t>
+            </a:r>
+            <a:r>
+              <a:rPr lang="en-US"/>
+              <a:t>.</a:t>
+            </a:r>
+          </a:p>
+          <a:p>
+            <a:r>
+              <a:rPr lang="en-US"/>
+              <a:t>Softmax also serves </a:t>
+            </a:r>
+            <a:r>
+              <a:rPr dirty="0"/>
+              <a:t>as </a:t>
+            </a:r>
+            <a:r>
+              <a:rPr lang="en-US"/>
+              <a:t>the output function </a:t>
+            </a:r>
+            <a:r>
+              <a:rPr dirty="0"/>
+              <a:t>in multi-class </a:t>
+            </a:r>
+            <a:r>
+              <a:rPr lang="en-US"/>
+              <a:t>neural networks.</a:t>
             </a:r>
             <a:endParaRPr dirty="0"/>
           </a:p>
-          <a:p>
-            <a:r>
-              <a:rPr dirty="0"/>
-              <a:t>Can be used as a way to extend logistic regression</a:t>
-            </a:r>
-          </a:p>
-          <a:p>
-            <a:r>
-              <a:rPr dirty="0"/>
-              <a:t>Often used in multi-class NN </a:t>
-            </a:r>
-          </a:p>
-        </p:txBody>
-      </p:sp>
-      <mc:AlternateContent xmlns:mc="http://schemas.openxmlformats.org/markup-compatibility/2006" xmlns:a14="http://schemas.microsoft.com/office/drawing/2010/main">
-        <mc:Choice Requires="a14">
+        </p:txBody>
+      </p:sp>
+      <mc:AlternateContent xmlns:mc="http://schemas.openxmlformats.org/markup-compatibility/2006">
+        <mc:Choice xmlns:a14="http://schemas.microsoft.com/office/drawing/2010/main" Requires="a14">
           <p:sp>
             <p:nvSpPr>
               <p:cNvPr id="629" name="equation.pdf"/>
@@ -7422,7 +8956,7 @@
             </p:nvSpPr>
             <p:spPr>
               <a:xfrm>
-                <a:off x="4649120" y="4508795"/>
+                <a:off x="4649120" y="4097315"/>
                 <a:ext cx="2608278" cy="993092"/>
               </a:xfrm>
               <a:prstGeom prst="rect">
@@ -7702,7 +9236,7 @@
             </p:txBody>
           </p:sp>
         </mc:Choice>
-        <mc:Fallback xmlns="">
+        <mc:Fallback>
           <p:sp>
             <p:nvSpPr>
               <p:cNvPr id="629" name="equation.pdf"/>
@@ -7713,7 +9247,7 @@
             </p:nvSpPr>
             <p:spPr>
               <a:xfrm>
-                <a:off x="4649120" y="4508795"/>
+                <a:off x="4649120" y="4097315"/>
                 <a:ext cx="2608278" cy="993092"/>
               </a:xfrm>
               <a:prstGeom prst="rect">
@@ -7754,7 +9288,7 @@
             </p:nvSpPr>
             <p:spPr>
               <a:xfrm>
-                <a:off x="3037725" y="5923597"/>
+                <a:off x="3037725" y="5512117"/>
                 <a:ext cx="1915333" cy="440057"/>
               </a:xfrm>
               <a:prstGeom prst="rect">
@@ -7765,7 +9299,7 @@
               </a:ln>
               <a:extLst>
                 <a:ext uri="{C572A759-6A51-4108-AA02-DFA0A04FC94B}">
-                  <ma14:wrappingTextBoxFlag xmlns="" xmlns:m="http://schemas.openxmlformats.org/officeDocument/2006/math" xmlns:ma14="http://schemas.microsoft.com/office/mac/drawingml/2011/main" val="1"/>
+                  <ma14:wrappingTextBoxFlag xmlns:ma14="http://schemas.microsoft.com/office/mac/drawingml/2011/main" xmlns:m="http://schemas.openxmlformats.org/officeDocument/2006/math" xmlns="" val="1"/>
                 </a:ext>
               </a:extLst>
             </p:spPr>
@@ -7837,7 +9371,7 @@
             </p:nvSpPr>
             <p:spPr>
               <a:xfrm>
-                <a:off x="3037725" y="5923597"/>
+                <a:off x="3037725" y="5512117"/>
                 <a:ext cx="1915333" cy="440057"/>
               </a:xfrm>
               <a:prstGeom prst="rect">
@@ -7854,7 +9388,7 @@
               </a:ln>
               <a:extLst>
                 <a:ext uri="{C572A759-6A51-4108-AA02-DFA0A04FC94B}">
-                  <ma14:wrappingTextBoxFlag xmlns="" xmlns:m="http://schemas.openxmlformats.org/officeDocument/2006/math" xmlns:ma14="http://schemas.microsoft.com/office/mac/drawingml/2011/main" xmlns:a14="http://schemas.microsoft.com/office/drawing/2010/main" val="1"/>
+                  <ma14:wrappingTextBoxFlag xmlns:ma14="http://schemas.microsoft.com/office/mac/drawingml/2011/main" xmlns:m="http://schemas.openxmlformats.org/officeDocument/2006/math" xmlns="" xmlns:a14="http://schemas.microsoft.com/office/drawing/2010/main" val="1"/>
                 </a:ext>
               </a:extLst>
             </p:spPr>
@@ -7881,7 +9415,7 @@
         </p:nvSpPr>
         <p:spPr>
           <a:xfrm>
-            <a:off x="6597694" y="6176513"/>
+            <a:off x="6597694" y="5765033"/>
             <a:ext cx="1684628" cy="302968"/>
           </a:xfrm>
           <a:prstGeom prst="rect">
@@ -7892,7 +9426,7 @@
           </a:ln>
           <a:extLst>
             <a:ext uri="{C572A759-6A51-4108-AA02-DFA0A04FC94B}">
-              <ma14:wrappingTextBoxFlag xmlns="" xmlns:m="http://schemas.openxmlformats.org/officeDocument/2006/math" xmlns:a14="http://schemas.microsoft.com/office/drawing/2010/main" xmlns:ma14="http://schemas.microsoft.com/office/mac/drawingml/2011/main" val="1"/>
+              <ma14:wrappingTextBoxFlag xmlns:ma14="http://schemas.microsoft.com/office/mac/drawingml/2011/main" xmlns:a14="http://schemas.microsoft.com/office/drawing/2010/main" xmlns:m="http://schemas.openxmlformats.org/officeDocument/2006/math" xmlns="" val="1"/>
             </a:ext>
           </a:extLst>
         </p:spPr>
@@ -7925,7 +9459,7 @@
         </p:blipFill>
         <p:spPr>
           <a:xfrm rot="17979901">
-            <a:off x="4148146" y="5461751"/>
+            <a:off x="4148146" y="5050271"/>
             <a:ext cx="832334" cy="234094"/>
           </a:xfrm>
           <a:prstGeom prst="rect">
@@ -7949,7 +9483,7 @@
         </p:blipFill>
         <p:spPr>
           <a:xfrm rot="12343661">
-            <a:off x="6338689" y="5760363"/>
+            <a:off x="6338689" y="5348883"/>
             <a:ext cx="1213820" cy="234094"/>
           </a:xfrm>
           <a:prstGeom prst="rect">
@@ -7967,7 +9501,7 @@
             </p:nvSpPr>
             <p:spPr>
               <a:xfrm>
-                <a:off x="8007989" y="4328131"/>
+                <a:off x="8007989" y="3916651"/>
                 <a:ext cx="2670449" cy="662297"/>
               </a:xfrm>
               <a:prstGeom prst="rect">
@@ -7978,7 +9512,7 @@
               </a:ln>
               <a:extLst>
                 <a:ext uri="{C572A759-6A51-4108-AA02-DFA0A04FC94B}">
-                  <ma14:wrappingTextBoxFlag xmlns="" xmlns:m="http://schemas.openxmlformats.org/officeDocument/2006/math" xmlns:ma14="http://schemas.microsoft.com/office/mac/drawingml/2011/main" val="1"/>
+                  <ma14:wrappingTextBoxFlag xmlns:ma14="http://schemas.microsoft.com/office/mac/drawingml/2011/main" xmlns:m="http://schemas.openxmlformats.org/officeDocument/2006/math" xmlns="" val="1"/>
                 </a:ext>
               </a:extLst>
             </p:spPr>
@@ -8054,7 +9588,7 @@
             </p:nvSpPr>
             <p:spPr>
               <a:xfrm>
-                <a:off x="8007989" y="4328131"/>
+                <a:off x="8007989" y="3916651"/>
                 <a:ext cx="2670449" cy="662297"/>
               </a:xfrm>
               <a:prstGeom prst="rect">
@@ -8063,7 +9597,7 @@
               <a:blipFill>
                 <a:blip r:embed="rId6"/>
                 <a:stretch>
-                  <a:fillRect l="-2968" b="-10092"/>
+                  <a:fillRect l="-2968" b="-11009"/>
                 </a:stretch>
               </a:blipFill>
               <a:ln w="3175">
@@ -8071,7 +9605,7 @@
               </a:ln>
               <a:extLst>
                 <a:ext uri="{C572A759-6A51-4108-AA02-DFA0A04FC94B}">
-                  <ma14:wrappingTextBoxFlag xmlns="" xmlns:m="http://schemas.openxmlformats.org/officeDocument/2006/math" xmlns:ma14="http://schemas.microsoft.com/office/mac/drawingml/2011/main" xmlns:a14="http://schemas.microsoft.com/office/drawing/2010/main" val="1"/>
+                  <ma14:wrappingTextBoxFlag xmlns:ma14="http://schemas.microsoft.com/office/mac/drawingml/2011/main" xmlns:m="http://schemas.openxmlformats.org/officeDocument/2006/math" xmlns="" xmlns:a14="http://schemas.microsoft.com/office/drawing/2010/main" val="1"/>
                 </a:ext>
               </a:extLst>
             </p:spPr>
@@ -8106,7 +9640,7 @@
         </p:blipFill>
         <p:spPr>
           <a:xfrm rot="10800000">
-            <a:off x="6959347" y="4542231"/>
+            <a:off x="6959347" y="4130751"/>
             <a:ext cx="927705" cy="234094"/>
           </a:xfrm>
           <a:prstGeom prst="rect">
@@ -8215,8 +9749,8 @@
           </a:p>
         </p:txBody>
       </p:sp>
-      <mc:AlternateContent xmlns:mc="http://schemas.openxmlformats.org/markup-compatibility/2006">
-        <mc:Choice xmlns:a14="http://schemas.microsoft.com/office/drawing/2010/main" Requires="a14">
+      <mc:AlternateContent xmlns:mc="http://schemas.openxmlformats.org/markup-compatibility/2006" xmlns:a14="http://schemas.microsoft.com/office/drawing/2010/main">
+        <mc:Choice Requires="a14">
           <p:sp>
             <p:nvSpPr>
               <p:cNvPr id="5" name="LaTeX equation" descr="\mathbf{ErrorRate}=\frac{1}{n}\sum_{i=1}^{n}1\{y_i\ne\hat{y}_i\}"/>
@@ -8470,7 +10004,7 @@
             </p:txBody>
           </p:sp>
         </mc:Choice>
-        <mc:Fallback>
+        <mc:Fallback xmlns="">
           <p:sp>
             <p:nvSpPr>
               <p:cNvPr id="5" name="LaTeX equation" descr="\mathbf{ErrorRate}=\frac{1}{n}\sum_{i=1}^{n}1\{y_i\ne\hat{y}_i\}"/>
@@ -8509,8 +10043,8 @@
           </p:sp>
         </mc:Fallback>
       </mc:AlternateContent>
-      <mc:AlternateContent xmlns:mc="http://schemas.openxmlformats.org/markup-compatibility/2006">
-        <mc:Choice xmlns:a14="http://schemas.microsoft.com/office/drawing/2010/main" Requires="a14">
+      <mc:AlternateContent xmlns:mc="http://schemas.openxmlformats.org/markup-compatibility/2006" xmlns:a14="http://schemas.microsoft.com/office/drawing/2010/main">
+        <mc:Choice Requires="a14">
           <p:sp>
             <p:nvSpPr>
               <p:cNvPr id="413" name="Accuracy and error rate equation"/>
@@ -8642,7 +10176,7 @@
             </p:txBody>
           </p:sp>
         </mc:Choice>
-        <mc:Fallback>
+        <mc:Fallback xmlns="">
           <p:sp>
             <p:nvSpPr>
               <p:cNvPr id="413" name="Accuracy and error rate equation"/>
@@ -8799,7 +10333,7 @@
           </a:effectLst>
           <a:extLst>
             <a:ext uri="{C572A759-6A51-4108-AA02-DFA0A04FC94B}">
-              <ma14:wrappingTextBoxFlag xmlns="" xmlns:m="http://schemas.openxmlformats.org/officeDocument/2006/math" xmlns:a14="http://schemas.microsoft.com/office/drawing/2010/main" xmlns:ma14="http://schemas.microsoft.com/office/mac/drawingml/2011/main" val="1"/>
+              <ma14:wrappingTextBoxFlag xmlns:ma14="http://schemas.microsoft.com/office/mac/drawingml/2011/main" xmlns:a14="http://schemas.microsoft.com/office/drawing/2010/main" xmlns:m="http://schemas.openxmlformats.org/officeDocument/2006/math" xmlns="" val="1"/>
             </a:ext>
           </a:extLst>
         </p:spPr>
@@ -8872,7 +10406,7 @@
           </a:effectLst>
           <a:extLst>
             <a:ext uri="{C572A759-6A51-4108-AA02-DFA0A04FC94B}">
-              <ma14:wrappingTextBoxFlag xmlns="" xmlns:m="http://schemas.openxmlformats.org/officeDocument/2006/math" xmlns:a14="http://schemas.microsoft.com/office/drawing/2010/main" xmlns:ma14="http://schemas.microsoft.com/office/mac/drawingml/2011/main" val="1"/>
+              <ma14:wrappingTextBoxFlag xmlns:ma14="http://schemas.microsoft.com/office/mac/drawingml/2011/main" xmlns:a14="http://schemas.microsoft.com/office/drawing/2010/main" xmlns:m="http://schemas.openxmlformats.org/officeDocument/2006/math" xmlns="" val="1"/>
             </a:ext>
           </a:extLst>
         </p:spPr>
@@ -8945,7 +10479,7 @@
           </a:effectLst>
           <a:extLst>
             <a:ext uri="{C572A759-6A51-4108-AA02-DFA0A04FC94B}">
-              <ma14:wrappingTextBoxFlag xmlns="" xmlns:m="http://schemas.openxmlformats.org/officeDocument/2006/math" xmlns:a14="http://schemas.microsoft.com/office/drawing/2010/main" xmlns:ma14="http://schemas.microsoft.com/office/mac/drawingml/2011/main" val="1"/>
+              <ma14:wrappingTextBoxFlag xmlns:ma14="http://schemas.microsoft.com/office/mac/drawingml/2011/main" xmlns:a14="http://schemas.microsoft.com/office/drawing/2010/main" xmlns:m="http://schemas.openxmlformats.org/officeDocument/2006/math" xmlns="" val="1"/>
             </a:ext>
           </a:extLst>
         </p:spPr>
@@ -9018,7 +10552,7 @@
           </a:effectLst>
           <a:extLst>
             <a:ext uri="{C572A759-6A51-4108-AA02-DFA0A04FC94B}">
-              <ma14:wrappingTextBoxFlag xmlns="" xmlns:m="http://schemas.openxmlformats.org/officeDocument/2006/math" xmlns:a14="http://schemas.microsoft.com/office/drawing/2010/main" xmlns:ma14="http://schemas.microsoft.com/office/mac/drawingml/2011/main" val="1"/>
+              <ma14:wrappingTextBoxFlag xmlns:ma14="http://schemas.microsoft.com/office/mac/drawingml/2011/main" xmlns:a14="http://schemas.microsoft.com/office/drawing/2010/main" xmlns:m="http://schemas.openxmlformats.org/officeDocument/2006/math" xmlns="" val="1"/>
             </a:ext>
           </a:extLst>
         </p:spPr>
@@ -9081,7 +10615,7 @@
           </a:ln>
           <a:extLst>
             <a:ext uri="{C572A759-6A51-4108-AA02-DFA0A04FC94B}">
-              <ma14:wrappingTextBoxFlag xmlns="" xmlns:m="http://schemas.openxmlformats.org/officeDocument/2006/math" xmlns:a14="http://schemas.microsoft.com/office/drawing/2010/main" xmlns:ma14="http://schemas.microsoft.com/office/mac/drawingml/2011/main" val="1"/>
+              <ma14:wrappingTextBoxFlag xmlns:ma14="http://schemas.microsoft.com/office/mac/drawingml/2011/main" xmlns:a14="http://schemas.microsoft.com/office/drawing/2010/main" xmlns:m="http://schemas.openxmlformats.org/officeDocument/2006/math" xmlns="" val="1"/>
             </a:ext>
           </a:extLst>
         </p:spPr>
@@ -9129,7 +10663,7 @@
           </a:ln>
           <a:extLst>
             <a:ext uri="{C572A759-6A51-4108-AA02-DFA0A04FC94B}">
-              <ma14:wrappingTextBoxFlag xmlns="" xmlns:m="http://schemas.openxmlformats.org/officeDocument/2006/math" xmlns:a14="http://schemas.microsoft.com/office/drawing/2010/main" xmlns:ma14="http://schemas.microsoft.com/office/mac/drawingml/2011/main" val="1"/>
+              <ma14:wrappingTextBoxFlag xmlns:ma14="http://schemas.microsoft.com/office/mac/drawingml/2011/main" xmlns:a14="http://schemas.microsoft.com/office/drawing/2010/main" xmlns:m="http://schemas.openxmlformats.org/officeDocument/2006/math" xmlns="" val="1"/>
             </a:ext>
           </a:extLst>
         </p:spPr>
@@ -9177,7 +10711,7 @@
           </a:ln>
           <a:extLst>
             <a:ext uri="{C572A759-6A51-4108-AA02-DFA0A04FC94B}">
-              <ma14:wrappingTextBoxFlag xmlns="" xmlns:m="http://schemas.openxmlformats.org/officeDocument/2006/math" xmlns:a14="http://schemas.microsoft.com/office/drawing/2010/main" xmlns:ma14="http://schemas.microsoft.com/office/mac/drawingml/2011/main" val="1"/>
+              <ma14:wrappingTextBoxFlag xmlns:ma14="http://schemas.microsoft.com/office/mac/drawingml/2011/main" xmlns:a14="http://schemas.microsoft.com/office/drawing/2010/main" xmlns:m="http://schemas.openxmlformats.org/officeDocument/2006/math" xmlns="" val="1"/>
             </a:ext>
           </a:extLst>
         </p:spPr>
@@ -9225,7 +10759,7 @@
           </a:ln>
           <a:extLst>
             <a:ext uri="{C572A759-6A51-4108-AA02-DFA0A04FC94B}">
-              <ma14:wrappingTextBoxFlag xmlns="" xmlns:m="http://schemas.openxmlformats.org/officeDocument/2006/math" xmlns:a14="http://schemas.microsoft.com/office/drawing/2010/main" xmlns:ma14="http://schemas.microsoft.com/office/mac/drawingml/2011/main" val="1"/>
+              <ma14:wrappingTextBoxFlag xmlns:ma14="http://schemas.microsoft.com/office/mac/drawingml/2011/main" xmlns:a14="http://schemas.microsoft.com/office/drawing/2010/main" xmlns:m="http://schemas.openxmlformats.org/officeDocument/2006/math" xmlns="" val="1"/>
             </a:ext>
           </a:extLst>
         </p:spPr>
@@ -9273,7 +10807,7 @@
           </a:ln>
           <a:extLst>
             <a:ext uri="{C572A759-6A51-4108-AA02-DFA0A04FC94B}">
-              <ma14:wrappingTextBoxFlag xmlns="" xmlns:m="http://schemas.openxmlformats.org/officeDocument/2006/math" xmlns:a14="http://schemas.microsoft.com/office/drawing/2010/main" xmlns:ma14="http://schemas.microsoft.com/office/mac/drawingml/2011/main" val="1"/>
+              <ma14:wrappingTextBoxFlag xmlns:ma14="http://schemas.microsoft.com/office/mac/drawingml/2011/main" xmlns:a14="http://schemas.microsoft.com/office/drawing/2010/main" xmlns:m="http://schemas.openxmlformats.org/officeDocument/2006/math" xmlns="" val="1"/>
             </a:ext>
           </a:extLst>
         </p:spPr>
@@ -9321,7 +10855,7 @@
           </a:ln>
           <a:extLst>
             <a:ext uri="{C572A759-6A51-4108-AA02-DFA0A04FC94B}">
-              <ma14:wrappingTextBoxFlag xmlns="" xmlns:m="http://schemas.openxmlformats.org/officeDocument/2006/math" xmlns:a14="http://schemas.microsoft.com/office/drawing/2010/main" xmlns:ma14="http://schemas.microsoft.com/office/mac/drawingml/2011/main" val="1"/>
+              <ma14:wrappingTextBoxFlag xmlns:ma14="http://schemas.microsoft.com/office/mac/drawingml/2011/main" xmlns:a14="http://schemas.microsoft.com/office/drawing/2010/main" xmlns:m="http://schemas.openxmlformats.org/officeDocument/2006/math" xmlns="" val="1"/>
             </a:ext>
           </a:extLst>
         </p:spPr>
@@ -9430,7 +10964,7 @@
           </a:effectLst>
           <a:extLst>
             <a:ext uri="{C572A759-6A51-4108-AA02-DFA0A04FC94B}">
-              <ma14:wrappingTextBoxFlag xmlns="" xmlns:m="http://schemas.openxmlformats.org/officeDocument/2006/math" xmlns:a14="http://schemas.microsoft.com/office/drawing/2010/main" xmlns:ma14="http://schemas.microsoft.com/office/mac/drawingml/2011/main" val="1"/>
+              <ma14:wrappingTextBoxFlag xmlns:ma14="http://schemas.microsoft.com/office/mac/drawingml/2011/main" xmlns:a14="http://schemas.microsoft.com/office/drawing/2010/main" xmlns:m="http://schemas.openxmlformats.org/officeDocument/2006/math" xmlns="" val="1"/>
             </a:ext>
           </a:extLst>
         </p:spPr>
@@ -9503,7 +11037,7 @@
           </a:effectLst>
           <a:extLst>
             <a:ext uri="{C572A759-6A51-4108-AA02-DFA0A04FC94B}">
-              <ma14:wrappingTextBoxFlag xmlns="" xmlns:m="http://schemas.openxmlformats.org/officeDocument/2006/math" xmlns:a14="http://schemas.microsoft.com/office/drawing/2010/main" xmlns:ma14="http://schemas.microsoft.com/office/mac/drawingml/2011/main" val="1"/>
+              <ma14:wrappingTextBoxFlag xmlns:ma14="http://schemas.microsoft.com/office/mac/drawingml/2011/main" xmlns:a14="http://schemas.microsoft.com/office/drawing/2010/main" xmlns:m="http://schemas.openxmlformats.org/officeDocument/2006/math" xmlns="" val="1"/>
             </a:ext>
           </a:extLst>
         </p:spPr>
@@ -9572,7 +11106,7 @@
           </a:effectLst>
           <a:extLst>
             <a:ext uri="{C572A759-6A51-4108-AA02-DFA0A04FC94B}">
-              <ma14:wrappingTextBoxFlag xmlns="" xmlns:m="http://schemas.openxmlformats.org/officeDocument/2006/math" xmlns:a14="http://schemas.microsoft.com/office/drawing/2010/main" xmlns:ma14="http://schemas.microsoft.com/office/mac/drawingml/2011/main" val="1"/>
+              <ma14:wrappingTextBoxFlag xmlns:ma14="http://schemas.microsoft.com/office/mac/drawingml/2011/main" xmlns:a14="http://schemas.microsoft.com/office/drawing/2010/main" xmlns:m="http://schemas.openxmlformats.org/officeDocument/2006/math" xmlns="" val="1"/>
             </a:ext>
           </a:extLst>
         </p:spPr>
@@ -9645,7 +11179,7 @@
           </a:effectLst>
           <a:extLst>
             <a:ext uri="{C572A759-6A51-4108-AA02-DFA0A04FC94B}">
-              <ma14:wrappingTextBoxFlag xmlns="" xmlns:m="http://schemas.openxmlformats.org/officeDocument/2006/math" xmlns:a14="http://schemas.microsoft.com/office/drawing/2010/main" xmlns:ma14="http://schemas.microsoft.com/office/mac/drawingml/2011/main" val="1"/>
+              <ma14:wrappingTextBoxFlag xmlns:ma14="http://schemas.microsoft.com/office/mac/drawingml/2011/main" xmlns:a14="http://schemas.microsoft.com/office/drawing/2010/main" xmlns:m="http://schemas.openxmlformats.org/officeDocument/2006/math" xmlns="" val="1"/>
             </a:ext>
           </a:extLst>
         </p:spPr>
@@ -9704,7 +11238,7 @@
           </a:ln>
           <a:extLst>
             <a:ext uri="{C572A759-6A51-4108-AA02-DFA0A04FC94B}">
-              <ma14:wrappingTextBoxFlag xmlns="" xmlns:m="http://schemas.openxmlformats.org/officeDocument/2006/math" xmlns:a14="http://schemas.microsoft.com/office/drawing/2010/main" xmlns:ma14="http://schemas.microsoft.com/office/mac/drawingml/2011/main" val="1"/>
+              <ma14:wrappingTextBoxFlag xmlns:ma14="http://schemas.microsoft.com/office/mac/drawingml/2011/main" xmlns:a14="http://schemas.microsoft.com/office/drawing/2010/main" xmlns:m="http://schemas.openxmlformats.org/officeDocument/2006/math" xmlns="" val="1"/>
             </a:ext>
           </a:extLst>
         </p:spPr>
@@ -9752,7 +11286,7 @@
           </a:ln>
           <a:extLst>
             <a:ext uri="{C572A759-6A51-4108-AA02-DFA0A04FC94B}">
-              <ma14:wrappingTextBoxFlag xmlns="" xmlns:m="http://schemas.openxmlformats.org/officeDocument/2006/math" xmlns:a14="http://schemas.microsoft.com/office/drawing/2010/main" xmlns:ma14="http://schemas.microsoft.com/office/mac/drawingml/2011/main" val="1"/>
+              <ma14:wrappingTextBoxFlag xmlns:ma14="http://schemas.microsoft.com/office/mac/drawingml/2011/main" xmlns:a14="http://schemas.microsoft.com/office/drawing/2010/main" xmlns:m="http://schemas.openxmlformats.org/officeDocument/2006/math" xmlns="" val="1"/>
             </a:ext>
           </a:extLst>
         </p:spPr>
@@ -9960,7 +11494,7 @@
           </a:ln>
           <a:extLst>
             <a:ext uri="{C572A759-6A51-4108-AA02-DFA0A04FC94B}">
-              <ma14:wrappingTextBoxFlag xmlns="" xmlns:m="http://schemas.openxmlformats.org/officeDocument/2006/math" xmlns:a14="http://schemas.microsoft.com/office/drawing/2010/main" xmlns:ma14="http://schemas.microsoft.com/office/mac/drawingml/2011/main" val="1"/>
+              <ma14:wrappingTextBoxFlag xmlns:ma14="http://schemas.microsoft.com/office/mac/drawingml/2011/main" xmlns:a14="http://schemas.microsoft.com/office/drawing/2010/main" xmlns:m="http://schemas.openxmlformats.org/officeDocument/2006/math" xmlns="" val="1"/>
             </a:ext>
           </a:extLst>
         </p:spPr>
@@ -10098,7 +11632,7 @@
           </a:ln>
           <a:extLst>
             <a:ext uri="{C572A759-6A51-4108-AA02-DFA0A04FC94B}">
-              <ma14:wrappingTextBoxFlag xmlns="" xmlns:m="http://schemas.openxmlformats.org/officeDocument/2006/math" xmlns:a14="http://schemas.microsoft.com/office/drawing/2010/main" xmlns:ma14="http://schemas.microsoft.com/office/mac/drawingml/2011/main" val="1"/>
+              <ma14:wrappingTextBoxFlag xmlns:ma14="http://schemas.microsoft.com/office/mac/drawingml/2011/main" xmlns:a14="http://schemas.microsoft.com/office/drawing/2010/main" xmlns:m="http://schemas.openxmlformats.org/officeDocument/2006/math" xmlns="" val="1"/>
             </a:ext>
           </a:extLst>
         </p:spPr>
@@ -10146,7 +11680,7 @@
           </a:ln>
           <a:extLst>
             <a:ext uri="{C572A759-6A51-4108-AA02-DFA0A04FC94B}">
-              <ma14:wrappingTextBoxFlag xmlns="" xmlns:m="http://schemas.openxmlformats.org/officeDocument/2006/math" xmlns:a14="http://schemas.microsoft.com/office/drawing/2010/main" xmlns:ma14="http://schemas.microsoft.com/office/mac/drawingml/2011/main" val="1"/>
+              <ma14:wrappingTextBoxFlag xmlns:ma14="http://schemas.microsoft.com/office/mac/drawingml/2011/main" xmlns:a14="http://schemas.microsoft.com/office/drawing/2010/main" xmlns:m="http://schemas.openxmlformats.org/officeDocument/2006/math" xmlns="" val="1"/>
             </a:ext>
           </a:extLst>
         </p:spPr>
@@ -10194,7 +11728,7 @@
           </a:ln>
           <a:extLst>
             <a:ext uri="{C572A759-6A51-4108-AA02-DFA0A04FC94B}">
-              <ma14:wrappingTextBoxFlag xmlns="" xmlns:m="http://schemas.openxmlformats.org/officeDocument/2006/math" xmlns:a14="http://schemas.microsoft.com/office/drawing/2010/main" xmlns:ma14="http://schemas.microsoft.com/office/mac/drawingml/2011/main" val="1"/>
+              <ma14:wrappingTextBoxFlag xmlns:ma14="http://schemas.microsoft.com/office/mac/drawingml/2011/main" xmlns:a14="http://schemas.microsoft.com/office/drawing/2010/main" xmlns:m="http://schemas.openxmlformats.org/officeDocument/2006/math" xmlns="" val="1"/>
             </a:ext>
           </a:extLst>
         </p:spPr>
@@ -10242,7 +11776,7 @@
           </a:ln>
           <a:extLst>
             <a:ext uri="{C572A759-6A51-4108-AA02-DFA0A04FC94B}">
-              <ma14:wrappingTextBoxFlag xmlns="" xmlns:m="http://schemas.openxmlformats.org/officeDocument/2006/math" xmlns:a14="http://schemas.microsoft.com/office/drawing/2010/main" xmlns:ma14="http://schemas.microsoft.com/office/mac/drawingml/2011/main" val="1"/>
+              <ma14:wrappingTextBoxFlag xmlns:ma14="http://schemas.microsoft.com/office/mac/drawingml/2011/main" xmlns:a14="http://schemas.microsoft.com/office/drawing/2010/main" xmlns:m="http://schemas.openxmlformats.org/officeDocument/2006/math" xmlns="" val="1"/>
             </a:ext>
           </a:extLst>
         </p:spPr>
@@ -10471,7 +12005,7 @@
           </a:effectLst>
           <a:extLst>
             <a:ext uri="{C572A759-6A51-4108-AA02-DFA0A04FC94B}">
-              <ma14:wrappingTextBoxFlag xmlns="" xmlns:m="http://schemas.openxmlformats.org/officeDocument/2006/math" xmlns:a14="http://schemas.microsoft.com/office/drawing/2010/main" xmlns:ma14="http://schemas.microsoft.com/office/mac/drawingml/2011/main" val="1"/>
+              <ma14:wrappingTextBoxFlag xmlns:ma14="http://schemas.microsoft.com/office/mac/drawingml/2011/main" xmlns:a14="http://schemas.microsoft.com/office/drawing/2010/main" xmlns:m="http://schemas.openxmlformats.org/officeDocument/2006/math" xmlns="" val="1"/>
             </a:ext>
           </a:extLst>
         </p:spPr>
@@ -10544,7 +12078,7 @@
           </a:effectLst>
           <a:extLst>
             <a:ext uri="{C572A759-6A51-4108-AA02-DFA0A04FC94B}">
-              <ma14:wrappingTextBoxFlag xmlns="" xmlns:m="http://schemas.openxmlformats.org/officeDocument/2006/math" xmlns:a14="http://schemas.microsoft.com/office/drawing/2010/main" xmlns:ma14="http://schemas.microsoft.com/office/mac/drawingml/2011/main" val="1"/>
+              <ma14:wrappingTextBoxFlag xmlns:ma14="http://schemas.microsoft.com/office/mac/drawingml/2011/main" xmlns:a14="http://schemas.microsoft.com/office/drawing/2010/main" xmlns:m="http://schemas.openxmlformats.org/officeDocument/2006/math" xmlns="" val="1"/>
             </a:ext>
           </a:extLst>
         </p:spPr>
@@ -10613,7 +12147,7 @@
           </a:effectLst>
           <a:extLst>
             <a:ext uri="{C572A759-6A51-4108-AA02-DFA0A04FC94B}">
-              <ma14:wrappingTextBoxFlag xmlns="" xmlns:m="http://schemas.openxmlformats.org/officeDocument/2006/math" xmlns:a14="http://schemas.microsoft.com/office/drawing/2010/main" xmlns:ma14="http://schemas.microsoft.com/office/mac/drawingml/2011/main" val="1"/>
+              <ma14:wrappingTextBoxFlag xmlns:ma14="http://schemas.microsoft.com/office/mac/drawingml/2011/main" xmlns:a14="http://schemas.microsoft.com/office/drawing/2010/main" xmlns:m="http://schemas.openxmlformats.org/officeDocument/2006/math" xmlns="" val="1"/>
             </a:ext>
           </a:extLst>
         </p:spPr>
@@ -10686,7 +12220,7 @@
           </a:effectLst>
           <a:extLst>
             <a:ext uri="{C572A759-6A51-4108-AA02-DFA0A04FC94B}">
-              <ma14:wrappingTextBoxFlag xmlns="" xmlns:m="http://schemas.openxmlformats.org/officeDocument/2006/math" xmlns:a14="http://schemas.microsoft.com/office/drawing/2010/main" xmlns:ma14="http://schemas.microsoft.com/office/mac/drawingml/2011/main" val="1"/>
+              <ma14:wrappingTextBoxFlag xmlns:ma14="http://schemas.microsoft.com/office/mac/drawingml/2011/main" xmlns:a14="http://schemas.microsoft.com/office/drawing/2010/main" xmlns:m="http://schemas.openxmlformats.org/officeDocument/2006/math" xmlns="" val="1"/>
             </a:ext>
           </a:extLst>
         </p:spPr>
@@ -10905,7 +12439,7 @@
           </a:ln>
           <a:extLst>
             <a:ext uri="{C572A759-6A51-4108-AA02-DFA0A04FC94B}">
-              <ma14:wrappingTextBoxFlag xmlns="" xmlns:m="http://schemas.openxmlformats.org/officeDocument/2006/math" xmlns:a14="http://schemas.microsoft.com/office/drawing/2010/main" xmlns:ma14="http://schemas.microsoft.com/office/mac/drawingml/2011/main" val="1"/>
+              <ma14:wrappingTextBoxFlag xmlns:ma14="http://schemas.microsoft.com/office/mac/drawingml/2011/main" xmlns:a14="http://schemas.microsoft.com/office/drawing/2010/main" xmlns:m="http://schemas.openxmlformats.org/officeDocument/2006/math" xmlns="" val="1"/>
             </a:ext>
           </a:extLst>
         </p:spPr>
@@ -11059,7 +12593,7 @@
           </a:ln>
           <a:extLst>
             <a:ext uri="{C572A759-6A51-4108-AA02-DFA0A04FC94B}">
-              <ma14:wrappingTextBoxFlag xmlns="" xmlns:m="http://schemas.openxmlformats.org/officeDocument/2006/math" xmlns:a14="http://schemas.microsoft.com/office/drawing/2010/main" xmlns:ma14="http://schemas.microsoft.com/office/mac/drawingml/2011/main" val="1"/>
+              <ma14:wrappingTextBoxFlag xmlns:ma14="http://schemas.microsoft.com/office/mac/drawingml/2011/main" xmlns:a14="http://schemas.microsoft.com/office/drawing/2010/main" xmlns:m="http://schemas.openxmlformats.org/officeDocument/2006/math" xmlns="" val="1"/>
             </a:ext>
           </a:extLst>
         </p:spPr>
@@ -11107,7 +12641,7 @@
           </a:ln>
           <a:extLst>
             <a:ext uri="{C572A759-6A51-4108-AA02-DFA0A04FC94B}">
-              <ma14:wrappingTextBoxFlag xmlns="" xmlns:m="http://schemas.openxmlformats.org/officeDocument/2006/math" xmlns:a14="http://schemas.microsoft.com/office/drawing/2010/main" xmlns:ma14="http://schemas.microsoft.com/office/mac/drawingml/2011/main" val="1"/>
+              <ma14:wrappingTextBoxFlag xmlns:ma14="http://schemas.microsoft.com/office/mac/drawingml/2011/main" xmlns:a14="http://schemas.microsoft.com/office/drawing/2010/main" xmlns:m="http://schemas.openxmlformats.org/officeDocument/2006/math" xmlns="" val="1"/>
             </a:ext>
           </a:extLst>
         </p:spPr>
@@ -11155,7 +12689,7 @@
           </a:ln>
           <a:extLst>
             <a:ext uri="{C572A759-6A51-4108-AA02-DFA0A04FC94B}">
-              <ma14:wrappingTextBoxFlag xmlns="" xmlns:m="http://schemas.openxmlformats.org/officeDocument/2006/math" xmlns:a14="http://schemas.microsoft.com/office/drawing/2010/main" xmlns:ma14="http://schemas.microsoft.com/office/mac/drawingml/2011/main" val="1"/>
+              <ma14:wrappingTextBoxFlag xmlns:ma14="http://schemas.microsoft.com/office/mac/drawingml/2011/main" xmlns:a14="http://schemas.microsoft.com/office/drawing/2010/main" xmlns:m="http://schemas.openxmlformats.org/officeDocument/2006/math" xmlns="" val="1"/>
             </a:ext>
           </a:extLst>
         </p:spPr>
@@ -11203,7 +12737,7 @@
           </a:ln>
           <a:extLst>
             <a:ext uri="{C572A759-6A51-4108-AA02-DFA0A04FC94B}">
-              <ma14:wrappingTextBoxFlag xmlns="" xmlns:m="http://schemas.openxmlformats.org/officeDocument/2006/math" xmlns:a14="http://schemas.microsoft.com/office/drawing/2010/main" xmlns:ma14="http://schemas.microsoft.com/office/mac/drawingml/2011/main" val="1"/>
+              <ma14:wrappingTextBoxFlag xmlns:ma14="http://schemas.microsoft.com/office/mac/drawingml/2011/main" xmlns:a14="http://schemas.microsoft.com/office/drawing/2010/main" xmlns:m="http://schemas.openxmlformats.org/officeDocument/2006/math" xmlns="" val="1"/>
             </a:ext>
           </a:extLst>
         </p:spPr>
@@ -11251,7 +12785,7 @@
           </a:ln>
           <a:extLst>
             <a:ext uri="{C572A759-6A51-4108-AA02-DFA0A04FC94B}">
-              <ma14:wrappingTextBoxFlag xmlns="" xmlns:m="http://schemas.openxmlformats.org/officeDocument/2006/math" xmlns:a14="http://schemas.microsoft.com/office/drawing/2010/main" xmlns:ma14="http://schemas.microsoft.com/office/mac/drawingml/2011/main" val="1"/>
+              <ma14:wrappingTextBoxFlag xmlns:ma14="http://schemas.microsoft.com/office/mac/drawingml/2011/main" xmlns:a14="http://schemas.microsoft.com/office/drawing/2010/main" xmlns:m="http://schemas.openxmlformats.org/officeDocument/2006/math" xmlns="" val="1"/>
             </a:ext>
           </a:extLst>
         </p:spPr>
@@ -11299,7 +12833,7 @@
           </a:ln>
           <a:extLst>
             <a:ext uri="{C572A759-6A51-4108-AA02-DFA0A04FC94B}">
-              <ma14:wrappingTextBoxFlag xmlns="" xmlns:m="http://schemas.openxmlformats.org/officeDocument/2006/math" xmlns:a14="http://schemas.microsoft.com/office/drawing/2010/main" xmlns:ma14="http://schemas.microsoft.com/office/mac/drawingml/2011/main" val="1"/>
+              <ma14:wrappingTextBoxFlag xmlns:ma14="http://schemas.microsoft.com/office/mac/drawingml/2011/main" xmlns:a14="http://schemas.microsoft.com/office/drawing/2010/main" xmlns:m="http://schemas.openxmlformats.org/officeDocument/2006/math" xmlns="" val="1"/>
             </a:ext>
           </a:extLst>
         </p:spPr>
@@ -11898,7 +13432,7 @@
           </a:ln>
           <a:extLst>
             <a:ext uri="{C572A759-6A51-4108-AA02-DFA0A04FC94B}">
-              <ma14:wrappingTextBoxFlag xmlns="" xmlns:m="http://schemas.openxmlformats.org/officeDocument/2006/math" xmlns:a14="http://schemas.microsoft.com/office/drawing/2010/main" xmlns:ma14="http://schemas.microsoft.com/office/mac/drawingml/2011/main" val="1"/>
+              <ma14:wrappingTextBoxFlag xmlns:ma14="http://schemas.microsoft.com/office/mac/drawingml/2011/main" xmlns:a14="http://schemas.microsoft.com/office/drawing/2010/main" xmlns:m="http://schemas.openxmlformats.org/officeDocument/2006/math" xmlns="" val="1"/>
             </a:ext>
           </a:extLst>
         </p:spPr>
@@ -12360,7 +13894,7 @@
           </a:ln>
           <a:extLst>
             <a:ext uri="{C572A759-6A51-4108-AA02-DFA0A04FC94B}">
-              <ma14:wrappingTextBoxFlag xmlns="" xmlns:m="http://schemas.openxmlformats.org/officeDocument/2006/math" xmlns:a14="http://schemas.microsoft.com/office/drawing/2010/main" xmlns:ma14="http://schemas.microsoft.com/office/mac/drawingml/2011/main" val="1"/>
+              <ma14:wrappingTextBoxFlag xmlns:ma14="http://schemas.microsoft.com/office/mac/drawingml/2011/main" xmlns:a14="http://schemas.microsoft.com/office/drawing/2010/main" xmlns:m="http://schemas.openxmlformats.org/officeDocument/2006/math" xmlns="" val="1"/>
             </a:ext>
           </a:extLst>
         </p:spPr>
@@ -12544,7 +14078,7 @@
           </a:effectLst>
           <a:extLst>
             <a:ext uri="{C572A759-6A51-4108-AA02-DFA0A04FC94B}">
-              <ma14:wrappingTextBoxFlag xmlns="" xmlns:m="http://schemas.openxmlformats.org/officeDocument/2006/math" xmlns:a14="http://schemas.microsoft.com/office/drawing/2010/main" xmlns:ma14="http://schemas.microsoft.com/office/mac/drawingml/2011/main" val="1"/>
+              <ma14:wrappingTextBoxFlag xmlns:ma14="http://schemas.microsoft.com/office/mac/drawingml/2011/main" xmlns:a14="http://schemas.microsoft.com/office/drawing/2010/main" xmlns:m="http://schemas.openxmlformats.org/officeDocument/2006/math" xmlns="" val="1"/>
             </a:ext>
           </a:extLst>
         </p:spPr>
@@ -12610,7 +14144,7 @@
           </a:effectLst>
           <a:extLst>
             <a:ext uri="{C572A759-6A51-4108-AA02-DFA0A04FC94B}">
-              <ma14:wrappingTextBoxFlag xmlns="" xmlns:m="http://schemas.openxmlformats.org/officeDocument/2006/math" xmlns:a14="http://schemas.microsoft.com/office/drawing/2010/main" xmlns:ma14="http://schemas.microsoft.com/office/mac/drawingml/2011/main" val="1"/>
+              <ma14:wrappingTextBoxFlag xmlns:ma14="http://schemas.microsoft.com/office/mac/drawingml/2011/main" xmlns:a14="http://schemas.microsoft.com/office/drawing/2010/main" xmlns:m="http://schemas.openxmlformats.org/officeDocument/2006/math" xmlns="" val="1"/>
             </a:ext>
           </a:extLst>
         </p:spPr>
@@ -12676,7 +14210,7 @@
           </a:effectLst>
           <a:extLst>
             <a:ext uri="{C572A759-6A51-4108-AA02-DFA0A04FC94B}">
-              <ma14:wrappingTextBoxFlag xmlns="" xmlns:m="http://schemas.openxmlformats.org/officeDocument/2006/math" xmlns:a14="http://schemas.microsoft.com/office/drawing/2010/main" xmlns:ma14="http://schemas.microsoft.com/office/mac/drawingml/2011/main" val="1"/>
+              <ma14:wrappingTextBoxFlag xmlns:ma14="http://schemas.microsoft.com/office/mac/drawingml/2011/main" xmlns:a14="http://schemas.microsoft.com/office/drawing/2010/main" xmlns:m="http://schemas.openxmlformats.org/officeDocument/2006/math" xmlns="" val="1"/>
             </a:ext>
           </a:extLst>
         </p:spPr>
@@ -12742,7 +14276,7 @@
           </a:effectLst>
           <a:extLst>
             <a:ext uri="{C572A759-6A51-4108-AA02-DFA0A04FC94B}">
-              <ma14:wrappingTextBoxFlag xmlns="" xmlns:m="http://schemas.openxmlformats.org/officeDocument/2006/math" xmlns:a14="http://schemas.microsoft.com/office/drawing/2010/main" xmlns:ma14="http://schemas.microsoft.com/office/mac/drawingml/2011/main" val="1"/>
+              <ma14:wrappingTextBoxFlag xmlns:ma14="http://schemas.microsoft.com/office/mac/drawingml/2011/main" xmlns:a14="http://schemas.microsoft.com/office/drawing/2010/main" xmlns:m="http://schemas.openxmlformats.org/officeDocument/2006/math" xmlns="" val="1"/>
             </a:ext>
           </a:extLst>
         </p:spPr>
@@ -12798,7 +14332,7 @@
           </a:ln>
           <a:extLst>
             <a:ext uri="{C572A759-6A51-4108-AA02-DFA0A04FC94B}">
-              <ma14:wrappingTextBoxFlag xmlns="" xmlns:m="http://schemas.openxmlformats.org/officeDocument/2006/math" xmlns:a14="http://schemas.microsoft.com/office/drawing/2010/main" xmlns:ma14="http://schemas.microsoft.com/office/mac/drawingml/2011/main" val="1"/>
+              <ma14:wrappingTextBoxFlag xmlns:ma14="http://schemas.microsoft.com/office/mac/drawingml/2011/main" xmlns:a14="http://schemas.microsoft.com/office/drawing/2010/main" xmlns:m="http://schemas.openxmlformats.org/officeDocument/2006/math" xmlns="" val="1"/>
             </a:ext>
           </a:extLst>
         </p:spPr>
@@ -12846,7 +14380,7 @@
           </a:ln>
           <a:extLst>
             <a:ext uri="{C572A759-6A51-4108-AA02-DFA0A04FC94B}">
-              <ma14:wrappingTextBoxFlag xmlns="" xmlns:m="http://schemas.openxmlformats.org/officeDocument/2006/math" xmlns:a14="http://schemas.microsoft.com/office/drawing/2010/main" xmlns:ma14="http://schemas.microsoft.com/office/mac/drawingml/2011/main" val="1"/>
+              <ma14:wrappingTextBoxFlag xmlns:ma14="http://schemas.microsoft.com/office/mac/drawingml/2011/main" xmlns:a14="http://schemas.microsoft.com/office/drawing/2010/main" xmlns:m="http://schemas.openxmlformats.org/officeDocument/2006/math" xmlns="" val="1"/>
             </a:ext>
           </a:extLst>
         </p:spPr>
@@ -12876,7 +14410,15 @@
             </a:br>
             <a:r>
               <a:rPr sz="1600"/>
-              <a:t>Positive Predictive Rate </a:t>
+              <a:t>Positive Predictive </a:t>
+            </a:r>
+            <a:r>
+              <a:rPr lang="en-US" sz="1600"/>
+              <a:t>Value</a:t>
+            </a:r>
+            <a:r>
+              <a:rPr sz="1600"/>
+              <a:t> </a:t>
             </a:r>
           </a:p>
         </p:txBody>
@@ -12900,7 +14442,7 @@
           </a:ln>
           <a:extLst>
             <a:ext uri="{C572A759-6A51-4108-AA02-DFA0A04FC94B}">
-              <ma14:wrappingTextBoxFlag xmlns="" xmlns:m="http://schemas.openxmlformats.org/officeDocument/2006/math" xmlns:a14="http://schemas.microsoft.com/office/drawing/2010/main" xmlns:ma14="http://schemas.microsoft.com/office/mac/drawingml/2011/main" val="1"/>
+              <ma14:wrappingTextBoxFlag xmlns:ma14="http://schemas.microsoft.com/office/mac/drawingml/2011/main" xmlns:a14="http://schemas.microsoft.com/office/drawing/2010/main" xmlns:m="http://schemas.openxmlformats.org/officeDocument/2006/math" xmlns="" val="1"/>
             </a:ext>
           </a:extLst>
         </p:spPr>
@@ -12964,7 +14506,7 @@
           </a:effectLst>
           <a:extLst>
             <a:ext uri="{C572A759-6A51-4108-AA02-DFA0A04FC94B}">
-              <ma14:wrappingTextBoxFlag xmlns="" xmlns:m="http://schemas.openxmlformats.org/officeDocument/2006/math" xmlns:a14="http://schemas.microsoft.com/office/drawing/2010/main" xmlns:ma14="http://schemas.microsoft.com/office/mac/drawingml/2011/main" val="1"/>
+              <ma14:wrappingTextBoxFlag xmlns:ma14="http://schemas.microsoft.com/office/mac/drawingml/2011/main" xmlns:a14="http://schemas.microsoft.com/office/drawing/2010/main" xmlns:m="http://schemas.openxmlformats.org/officeDocument/2006/math" xmlns="" val="1"/>
             </a:ext>
           </a:extLst>
         </p:spPr>
@@ -13030,7 +14572,7 @@
           </a:effectLst>
           <a:extLst>
             <a:ext uri="{C572A759-6A51-4108-AA02-DFA0A04FC94B}">
-              <ma14:wrappingTextBoxFlag xmlns="" xmlns:m="http://schemas.openxmlformats.org/officeDocument/2006/math" xmlns:a14="http://schemas.microsoft.com/office/drawing/2010/main" xmlns:ma14="http://schemas.microsoft.com/office/mac/drawingml/2011/main" val="1"/>
+              <ma14:wrappingTextBoxFlag xmlns:ma14="http://schemas.microsoft.com/office/mac/drawingml/2011/main" xmlns:a14="http://schemas.microsoft.com/office/drawing/2010/main" xmlns:m="http://schemas.openxmlformats.org/officeDocument/2006/math" xmlns="" val="1"/>
             </a:ext>
           </a:extLst>
         </p:spPr>
@@ -13096,7 +14638,7 @@
           </a:effectLst>
           <a:extLst>
             <a:ext uri="{C572A759-6A51-4108-AA02-DFA0A04FC94B}">
-              <ma14:wrappingTextBoxFlag xmlns="" xmlns:m="http://schemas.openxmlformats.org/officeDocument/2006/math" xmlns:a14="http://schemas.microsoft.com/office/drawing/2010/main" xmlns:ma14="http://schemas.microsoft.com/office/mac/drawingml/2011/main" val="1"/>
+              <ma14:wrappingTextBoxFlag xmlns:ma14="http://schemas.microsoft.com/office/mac/drawingml/2011/main" xmlns:a14="http://schemas.microsoft.com/office/drawing/2010/main" xmlns:m="http://schemas.openxmlformats.org/officeDocument/2006/math" xmlns="" val="1"/>
             </a:ext>
           </a:extLst>
         </p:spPr>
@@ -13162,7 +14704,7 @@
           </a:effectLst>
           <a:extLst>
             <a:ext uri="{C572A759-6A51-4108-AA02-DFA0A04FC94B}">
-              <ma14:wrappingTextBoxFlag xmlns="" xmlns:m="http://schemas.openxmlformats.org/officeDocument/2006/math" xmlns:a14="http://schemas.microsoft.com/office/drawing/2010/main" xmlns:ma14="http://schemas.microsoft.com/office/mac/drawingml/2011/main" val="1"/>
+              <ma14:wrappingTextBoxFlag xmlns:ma14="http://schemas.microsoft.com/office/mac/drawingml/2011/main" xmlns:a14="http://schemas.microsoft.com/office/drawing/2010/main" xmlns:m="http://schemas.openxmlformats.org/officeDocument/2006/math" xmlns="" val="1"/>
             </a:ext>
           </a:extLst>
         </p:spPr>
@@ -13228,7 +14770,7 @@
           </a:effectLst>
           <a:extLst>
             <a:ext uri="{C572A759-6A51-4108-AA02-DFA0A04FC94B}">
-              <ma14:wrappingTextBoxFlag xmlns="" xmlns:m="http://schemas.openxmlformats.org/officeDocument/2006/math" xmlns:a14="http://schemas.microsoft.com/office/drawing/2010/main" xmlns:ma14="http://schemas.microsoft.com/office/mac/drawingml/2011/main" val="1"/>
+              <ma14:wrappingTextBoxFlag xmlns:ma14="http://schemas.microsoft.com/office/mac/drawingml/2011/main" xmlns:a14="http://schemas.microsoft.com/office/drawing/2010/main" xmlns:m="http://schemas.openxmlformats.org/officeDocument/2006/math" xmlns="" val="1"/>
             </a:ext>
           </a:extLst>
         </p:spPr>
@@ -13284,7 +14826,7 @@
           </a:ln>
           <a:extLst>
             <a:ext uri="{C572A759-6A51-4108-AA02-DFA0A04FC94B}">
-              <ma14:wrappingTextBoxFlag xmlns="" xmlns:m="http://schemas.openxmlformats.org/officeDocument/2006/math" xmlns:a14="http://schemas.microsoft.com/office/drawing/2010/main" xmlns:ma14="http://schemas.microsoft.com/office/mac/drawingml/2011/main" val="1"/>
+              <ma14:wrappingTextBoxFlag xmlns:ma14="http://schemas.microsoft.com/office/mac/drawingml/2011/main" xmlns:a14="http://schemas.microsoft.com/office/drawing/2010/main" xmlns:m="http://schemas.openxmlformats.org/officeDocument/2006/math" xmlns="" val="1"/>
             </a:ext>
           </a:extLst>
         </p:spPr>
@@ -13342,7 +14884,7 @@
           </a:effectLst>
           <a:extLst>
             <a:ext uri="{C572A759-6A51-4108-AA02-DFA0A04FC94B}">
-              <ma14:wrappingTextBoxFlag xmlns="" xmlns:m="http://schemas.openxmlformats.org/officeDocument/2006/math" xmlns:a14="http://schemas.microsoft.com/office/drawing/2010/main" xmlns:ma14="http://schemas.microsoft.com/office/mac/drawingml/2011/main" val="1"/>
+              <ma14:wrappingTextBoxFlag xmlns:ma14="http://schemas.microsoft.com/office/mac/drawingml/2011/main" xmlns:a14="http://schemas.microsoft.com/office/drawing/2010/main" xmlns:m="http://schemas.openxmlformats.org/officeDocument/2006/math" xmlns="" val="1"/>
             </a:ext>
           </a:extLst>
         </p:spPr>
@@ -13408,7 +14950,7 @@
           </a:effectLst>
           <a:extLst>
             <a:ext uri="{C572A759-6A51-4108-AA02-DFA0A04FC94B}">
-              <ma14:wrappingTextBoxFlag xmlns="" xmlns:m="http://schemas.openxmlformats.org/officeDocument/2006/math" xmlns:a14="http://schemas.microsoft.com/office/drawing/2010/main" xmlns:ma14="http://schemas.microsoft.com/office/mac/drawingml/2011/main" val="1"/>
+              <ma14:wrappingTextBoxFlag xmlns:ma14="http://schemas.microsoft.com/office/mac/drawingml/2011/main" xmlns:a14="http://schemas.microsoft.com/office/drawing/2010/main" xmlns:m="http://schemas.openxmlformats.org/officeDocument/2006/math" xmlns="" val="1"/>
             </a:ext>
           </a:extLst>
         </p:spPr>
@@ -13474,7 +15016,7 @@
           </a:effectLst>
           <a:extLst>
             <a:ext uri="{C572A759-6A51-4108-AA02-DFA0A04FC94B}">
-              <ma14:wrappingTextBoxFlag xmlns="" xmlns:m="http://schemas.openxmlformats.org/officeDocument/2006/math" xmlns:a14="http://schemas.microsoft.com/office/drawing/2010/main" xmlns:ma14="http://schemas.microsoft.com/office/mac/drawingml/2011/main" val="1"/>
+              <ma14:wrappingTextBoxFlag xmlns:ma14="http://schemas.microsoft.com/office/mac/drawingml/2011/main" xmlns:a14="http://schemas.microsoft.com/office/drawing/2010/main" xmlns:m="http://schemas.openxmlformats.org/officeDocument/2006/math" xmlns="" val="1"/>
             </a:ext>
           </a:extLst>
         </p:spPr>
@@ -13540,7 +15082,7 @@
           </a:effectLst>
           <a:extLst>
             <a:ext uri="{C572A759-6A51-4108-AA02-DFA0A04FC94B}">
-              <ma14:wrappingTextBoxFlag xmlns="" xmlns:m="http://schemas.openxmlformats.org/officeDocument/2006/math" xmlns:a14="http://schemas.microsoft.com/office/drawing/2010/main" xmlns:ma14="http://schemas.microsoft.com/office/mac/drawingml/2011/main" val="1"/>
+              <ma14:wrappingTextBoxFlag xmlns:ma14="http://schemas.microsoft.com/office/mac/drawingml/2011/main" xmlns:a14="http://schemas.microsoft.com/office/drawing/2010/main" xmlns:m="http://schemas.openxmlformats.org/officeDocument/2006/math" xmlns="" val="1"/>
             </a:ext>
           </a:extLst>
         </p:spPr>
@@ -13606,7 +15148,7 @@
           </a:effectLst>
           <a:extLst>
             <a:ext uri="{C572A759-6A51-4108-AA02-DFA0A04FC94B}">
-              <ma14:wrappingTextBoxFlag xmlns="" xmlns:m="http://schemas.openxmlformats.org/officeDocument/2006/math" xmlns:a14="http://schemas.microsoft.com/office/drawing/2010/main" xmlns:ma14="http://schemas.microsoft.com/office/mac/drawingml/2011/main" val="1"/>
+              <ma14:wrappingTextBoxFlag xmlns:ma14="http://schemas.microsoft.com/office/mac/drawingml/2011/main" xmlns:a14="http://schemas.microsoft.com/office/drawing/2010/main" xmlns:m="http://schemas.openxmlformats.org/officeDocument/2006/math" xmlns="" val="1"/>
             </a:ext>
           </a:extLst>
         </p:spPr>
@@ -13672,7 +15214,7 @@
           </a:effectLst>
           <a:extLst>
             <a:ext uri="{C572A759-6A51-4108-AA02-DFA0A04FC94B}">
-              <ma14:wrappingTextBoxFlag xmlns="" xmlns:m="http://schemas.openxmlformats.org/officeDocument/2006/math" xmlns:a14="http://schemas.microsoft.com/office/drawing/2010/main" xmlns:ma14="http://schemas.microsoft.com/office/mac/drawingml/2011/main" val="1"/>
+              <ma14:wrappingTextBoxFlag xmlns:ma14="http://schemas.microsoft.com/office/mac/drawingml/2011/main" xmlns:a14="http://schemas.microsoft.com/office/drawing/2010/main" xmlns:m="http://schemas.openxmlformats.org/officeDocument/2006/math" xmlns="" val="1"/>
             </a:ext>
           </a:extLst>
         </p:spPr>
@@ -13738,7 +15280,7 @@
           </a:effectLst>
           <a:extLst>
             <a:ext uri="{C572A759-6A51-4108-AA02-DFA0A04FC94B}">
-              <ma14:wrappingTextBoxFlag xmlns="" xmlns:m="http://schemas.openxmlformats.org/officeDocument/2006/math" xmlns:a14="http://schemas.microsoft.com/office/drawing/2010/main" xmlns:ma14="http://schemas.microsoft.com/office/mac/drawingml/2011/main" val="1"/>
+              <ma14:wrappingTextBoxFlag xmlns:ma14="http://schemas.microsoft.com/office/mac/drawingml/2011/main" xmlns:a14="http://schemas.microsoft.com/office/drawing/2010/main" xmlns:m="http://schemas.openxmlformats.org/officeDocument/2006/math" xmlns="" val="1"/>
             </a:ext>
           </a:extLst>
         </p:spPr>
@@ -14362,7 +15904,7 @@
           </a:ln>
           <a:extLst>
             <a:ext uri="{C572A759-6A51-4108-AA02-DFA0A04FC94B}">
-              <ma14:wrappingTextBoxFlag xmlns="" xmlns:m="http://schemas.openxmlformats.org/officeDocument/2006/math" xmlns:a14="http://schemas.microsoft.com/office/drawing/2010/main" xmlns:ma14="http://schemas.microsoft.com/office/mac/drawingml/2011/main" val="1"/>
+              <ma14:wrappingTextBoxFlag xmlns:ma14="http://schemas.microsoft.com/office/mac/drawingml/2011/main" xmlns:a14="http://schemas.microsoft.com/office/drawing/2010/main" xmlns:m="http://schemas.openxmlformats.org/officeDocument/2006/math" xmlns="" val="1"/>
             </a:ext>
           </a:extLst>
         </p:spPr>
@@ -14410,7 +15952,7 @@
           </a:ln>
           <a:extLst>
             <a:ext uri="{C572A759-6A51-4108-AA02-DFA0A04FC94B}">
-              <ma14:wrappingTextBoxFlag xmlns="" xmlns:m="http://schemas.openxmlformats.org/officeDocument/2006/math" xmlns:a14="http://schemas.microsoft.com/office/drawing/2010/main" xmlns:ma14="http://schemas.microsoft.com/office/mac/drawingml/2011/main" val="1"/>
+              <ma14:wrappingTextBoxFlag xmlns:ma14="http://schemas.microsoft.com/office/mac/drawingml/2011/main" xmlns:a14="http://schemas.microsoft.com/office/drawing/2010/main" xmlns:m="http://schemas.openxmlformats.org/officeDocument/2006/math" xmlns="" val="1"/>
             </a:ext>
           </a:extLst>
         </p:spPr>
@@ -14458,7 +16000,7 @@
           </a:ln>
           <a:extLst>
             <a:ext uri="{C572A759-6A51-4108-AA02-DFA0A04FC94B}">
-              <ma14:wrappingTextBoxFlag xmlns="" xmlns:m="http://schemas.openxmlformats.org/officeDocument/2006/math" xmlns:a14="http://schemas.microsoft.com/office/drawing/2010/main" xmlns:ma14="http://schemas.microsoft.com/office/mac/drawingml/2011/main" val="1"/>
+              <ma14:wrappingTextBoxFlag xmlns:ma14="http://schemas.microsoft.com/office/mac/drawingml/2011/main" xmlns:a14="http://schemas.microsoft.com/office/drawing/2010/main" xmlns:m="http://schemas.openxmlformats.org/officeDocument/2006/math" xmlns="" val="1"/>
             </a:ext>
           </a:extLst>
         </p:spPr>
@@ -14506,7 +16048,7 @@
           </a:ln>
           <a:extLst>
             <a:ext uri="{C572A759-6A51-4108-AA02-DFA0A04FC94B}">
-              <ma14:wrappingTextBoxFlag xmlns="" xmlns:m="http://schemas.openxmlformats.org/officeDocument/2006/math" xmlns:a14="http://schemas.microsoft.com/office/drawing/2010/main" xmlns:ma14="http://schemas.microsoft.com/office/mac/drawingml/2011/main" val="1"/>
+              <ma14:wrappingTextBoxFlag xmlns:ma14="http://schemas.microsoft.com/office/mac/drawingml/2011/main" xmlns:a14="http://schemas.microsoft.com/office/drawing/2010/main" xmlns:m="http://schemas.openxmlformats.org/officeDocument/2006/math" xmlns="" val="1"/>
             </a:ext>
           </a:extLst>
         </p:spPr>
@@ -14554,7 +16096,7 @@
           </a:ln>
           <a:extLst>
             <a:ext uri="{C572A759-6A51-4108-AA02-DFA0A04FC94B}">
-              <ma14:wrappingTextBoxFlag xmlns="" xmlns:m="http://schemas.openxmlformats.org/officeDocument/2006/math" xmlns:a14="http://schemas.microsoft.com/office/drawing/2010/main" xmlns:ma14="http://schemas.microsoft.com/office/mac/drawingml/2011/main" val="1"/>
+              <ma14:wrappingTextBoxFlag xmlns:ma14="http://schemas.microsoft.com/office/mac/drawingml/2011/main" xmlns:a14="http://schemas.microsoft.com/office/drawing/2010/main" xmlns:m="http://schemas.openxmlformats.org/officeDocument/2006/math" xmlns="" val="1"/>
             </a:ext>
           </a:extLst>
         </p:spPr>
@@ -14602,7 +16144,7 @@
           </a:ln>
           <a:extLst>
             <a:ext uri="{C572A759-6A51-4108-AA02-DFA0A04FC94B}">
-              <ma14:wrappingTextBoxFlag xmlns="" xmlns:m="http://schemas.openxmlformats.org/officeDocument/2006/math" xmlns:a14="http://schemas.microsoft.com/office/drawing/2010/main" xmlns:ma14="http://schemas.microsoft.com/office/mac/drawingml/2011/main" val="1"/>
+              <ma14:wrappingTextBoxFlag xmlns:ma14="http://schemas.microsoft.com/office/mac/drawingml/2011/main" xmlns:a14="http://schemas.microsoft.com/office/drawing/2010/main" xmlns:m="http://schemas.openxmlformats.org/officeDocument/2006/math" xmlns="" val="1"/>
             </a:ext>
           </a:extLst>
         </p:spPr>
@@ -14650,7 +16192,7 @@
           </a:ln>
           <a:extLst>
             <a:ext uri="{C572A759-6A51-4108-AA02-DFA0A04FC94B}">
-              <ma14:wrappingTextBoxFlag xmlns="" xmlns:m="http://schemas.openxmlformats.org/officeDocument/2006/math" xmlns:a14="http://schemas.microsoft.com/office/drawing/2010/main" xmlns:ma14="http://schemas.microsoft.com/office/mac/drawingml/2011/main" val="1"/>
+              <ma14:wrappingTextBoxFlag xmlns:ma14="http://schemas.microsoft.com/office/mac/drawingml/2011/main" xmlns:a14="http://schemas.microsoft.com/office/drawing/2010/main" xmlns:m="http://schemas.openxmlformats.org/officeDocument/2006/math" xmlns="" val="1"/>
             </a:ext>
           </a:extLst>
         </p:spPr>
@@ -14698,7 +16240,7 @@
           </a:ln>
           <a:extLst>
             <a:ext uri="{C572A759-6A51-4108-AA02-DFA0A04FC94B}">
-              <ma14:wrappingTextBoxFlag xmlns="" xmlns:m="http://schemas.openxmlformats.org/officeDocument/2006/math" xmlns:a14="http://schemas.microsoft.com/office/drawing/2010/main" xmlns:ma14="http://schemas.microsoft.com/office/mac/drawingml/2011/main" val="1"/>
+              <ma14:wrappingTextBoxFlag xmlns:ma14="http://schemas.microsoft.com/office/mac/drawingml/2011/main" xmlns:a14="http://schemas.microsoft.com/office/drawing/2010/main" xmlns:m="http://schemas.openxmlformats.org/officeDocument/2006/math" xmlns="" val="1"/>
             </a:ext>
           </a:extLst>
         </p:spPr>
@@ -14746,7 +16288,7 @@
           </a:ln>
           <a:extLst>
             <a:ext uri="{C572A759-6A51-4108-AA02-DFA0A04FC94B}">
-              <ma14:wrappingTextBoxFlag xmlns="" xmlns:m="http://schemas.openxmlformats.org/officeDocument/2006/math" xmlns:a14="http://schemas.microsoft.com/office/drawing/2010/main" xmlns:ma14="http://schemas.microsoft.com/office/mac/drawingml/2011/main" val="1"/>
+              <ma14:wrappingTextBoxFlag xmlns:ma14="http://schemas.microsoft.com/office/mac/drawingml/2011/main" xmlns:a14="http://schemas.microsoft.com/office/drawing/2010/main" xmlns:m="http://schemas.openxmlformats.org/officeDocument/2006/math" xmlns="" val="1"/>
             </a:ext>
           </a:extLst>
         </p:spPr>
@@ -14794,7 +16336,7 @@
           </a:ln>
           <a:extLst>
             <a:ext uri="{C572A759-6A51-4108-AA02-DFA0A04FC94B}">
-              <ma14:wrappingTextBoxFlag xmlns="" xmlns:m="http://schemas.openxmlformats.org/officeDocument/2006/math" xmlns:a14="http://schemas.microsoft.com/office/drawing/2010/main" xmlns:ma14="http://schemas.microsoft.com/office/mac/drawingml/2011/main" val="1"/>
+              <ma14:wrappingTextBoxFlag xmlns:ma14="http://schemas.microsoft.com/office/mac/drawingml/2011/main" xmlns:a14="http://schemas.microsoft.com/office/drawing/2010/main" xmlns:m="http://schemas.openxmlformats.org/officeDocument/2006/math" xmlns="" val="1"/>
             </a:ext>
           </a:extLst>
         </p:spPr>
@@ -14842,7 +16384,7 @@
           </a:ln>
           <a:extLst>
             <a:ext uri="{C572A759-6A51-4108-AA02-DFA0A04FC94B}">
-              <ma14:wrappingTextBoxFlag xmlns="" xmlns:m="http://schemas.openxmlformats.org/officeDocument/2006/math" xmlns:a14="http://schemas.microsoft.com/office/drawing/2010/main" xmlns:ma14="http://schemas.microsoft.com/office/mac/drawingml/2011/main" val="1"/>
+              <ma14:wrappingTextBoxFlag xmlns:ma14="http://schemas.microsoft.com/office/mac/drawingml/2011/main" xmlns:a14="http://schemas.microsoft.com/office/drawing/2010/main" xmlns:m="http://schemas.openxmlformats.org/officeDocument/2006/math" xmlns="" val="1"/>
             </a:ext>
           </a:extLst>
         </p:spPr>
@@ -14890,7 +16432,7 @@
           </a:ln>
           <a:extLst>
             <a:ext uri="{C572A759-6A51-4108-AA02-DFA0A04FC94B}">
-              <ma14:wrappingTextBoxFlag xmlns="" xmlns:m="http://schemas.openxmlformats.org/officeDocument/2006/math" xmlns:a14="http://schemas.microsoft.com/office/drawing/2010/main" xmlns:ma14="http://schemas.microsoft.com/office/mac/drawingml/2011/main" val="1"/>
+              <ma14:wrappingTextBoxFlag xmlns:ma14="http://schemas.microsoft.com/office/mac/drawingml/2011/main" xmlns:a14="http://schemas.microsoft.com/office/drawing/2010/main" xmlns:m="http://schemas.openxmlformats.org/officeDocument/2006/math" xmlns="" val="1"/>
             </a:ext>
           </a:extLst>
         </p:spPr>
@@ -14938,7 +16480,7 @@
           </a:ln>
           <a:extLst>
             <a:ext uri="{C572A759-6A51-4108-AA02-DFA0A04FC94B}">
-              <ma14:wrappingTextBoxFlag xmlns="" xmlns:m="http://schemas.openxmlformats.org/officeDocument/2006/math" xmlns:a14="http://schemas.microsoft.com/office/drawing/2010/main" xmlns:ma14="http://schemas.microsoft.com/office/mac/drawingml/2011/main" val="1"/>
+              <ma14:wrappingTextBoxFlag xmlns:ma14="http://schemas.microsoft.com/office/mac/drawingml/2011/main" xmlns:a14="http://schemas.microsoft.com/office/drawing/2010/main" xmlns:m="http://schemas.openxmlformats.org/officeDocument/2006/math" xmlns="" val="1"/>
             </a:ext>
           </a:extLst>
         </p:spPr>
@@ -14986,7 +16528,7 @@
           </a:ln>
           <a:extLst>
             <a:ext uri="{C572A759-6A51-4108-AA02-DFA0A04FC94B}">
-              <ma14:wrappingTextBoxFlag xmlns="" xmlns:m="http://schemas.openxmlformats.org/officeDocument/2006/math" xmlns:a14="http://schemas.microsoft.com/office/drawing/2010/main" xmlns:ma14="http://schemas.microsoft.com/office/mac/drawingml/2011/main" val="1"/>
+              <ma14:wrappingTextBoxFlag xmlns:ma14="http://schemas.microsoft.com/office/mac/drawingml/2011/main" xmlns:a14="http://schemas.microsoft.com/office/drawing/2010/main" xmlns:m="http://schemas.openxmlformats.org/officeDocument/2006/math" xmlns="" val="1"/>
             </a:ext>
           </a:extLst>
         </p:spPr>
@@ -15034,7 +16576,7 @@
           </a:ln>
           <a:extLst>
             <a:ext uri="{C572A759-6A51-4108-AA02-DFA0A04FC94B}">
-              <ma14:wrappingTextBoxFlag xmlns="" xmlns:m="http://schemas.openxmlformats.org/officeDocument/2006/math" xmlns:a14="http://schemas.microsoft.com/office/drawing/2010/main" xmlns:ma14="http://schemas.microsoft.com/office/mac/drawingml/2011/main" val="1"/>
+              <ma14:wrappingTextBoxFlag xmlns:ma14="http://schemas.microsoft.com/office/mac/drawingml/2011/main" xmlns:a14="http://schemas.microsoft.com/office/drawing/2010/main" xmlns:m="http://schemas.openxmlformats.org/officeDocument/2006/math" xmlns="" val="1"/>
             </a:ext>
           </a:extLst>
         </p:spPr>
@@ -15082,7 +16624,7 @@
           </a:ln>
           <a:extLst>
             <a:ext uri="{C572A759-6A51-4108-AA02-DFA0A04FC94B}">
-              <ma14:wrappingTextBoxFlag xmlns="" xmlns:m="http://schemas.openxmlformats.org/officeDocument/2006/math" xmlns:a14="http://schemas.microsoft.com/office/drawing/2010/main" xmlns:ma14="http://schemas.microsoft.com/office/mac/drawingml/2011/main" val="1"/>
+              <ma14:wrappingTextBoxFlag xmlns:ma14="http://schemas.microsoft.com/office/mac/drawingml/2011/main" xmlns:a14="http://schemas.microsoft.com/office/drawing/2010/main" xmlns:m="http://schemas.openxmlformats.org/officeDocument/2006/math" xmlns="" val="1"/>
             </a:ext>
           </a:extLst>
         </p:spPr>
@@ -15130,7 +16672,7 @@
           </a:ln>
           <a:extLst>
             <a:ext uri="{C572A759-6A51-4108-AA02-DFA0A04FC94B}">
-              <ma14:wrappingTextBoxFlag xmlns="" xmlns:m="http://schemas.openxmlformats.org/officeDocument/2006/math" xmlns:a14="http://schemas.microsoft.com/office/drawing/2010/main" xmlns:ma14="http://schemas.microsoft.com/office/mac/drawingml/2011/main" val="1"/>
+              <ma14:wrappingTextBoxFlag xmlns:ma14="http://schemas.microsoft.com/office/mac/drawingml/2011/main" xmlns:a14="http://schemas.microsoft.com/office/drawing/2010/main" xmlns:m="http://schemas.openxmlformats.org/officeDocument/2006/math" xmlns="" val="1"/>
             </a:ext>
           </a:extLst>
         </p:spPr>
@@ -15178,7 +16720,7 @@
           </a:ln>
           <a:extLst>
             <a:ext uri="{C572A759-6A51-4108-AA02-DFA0A04FC94B}">
-              <ma14:wrappingTextBoxFlag xmlns="" xmlns:m="http://schemas.openxmlformats.org/officeDocument/2006/math" xmlns:a14="http://schemas.microsoft.com/office/drawing/2010/main" xmlns:ma14="http://schemas.microsoft.com/office/mac/drawingml/2011/main" val="1"/>
+              <ma14:wrappingTextBoxFlag xmlns:ma14="http://schemas.microsoft.com/office/mac/drawingml/2011/main" xmlns:a14="http://schemas.microsoft.com/office/drawing/2010/main" xmlns:m="http://schemas.openxmlformats.org/officeDocument/2006/math" xmlns="" val="1"/>
             </a:ext>
           </a:extLst>
         </p:spPr>
@@ -15226,7 +16768,7 @@
           </a:ln>
           <a:extLst>
             <a:ext uri="{C572A759-6A51-4108-AA02-DFA0A04FC94B}">
-              <ma14:wrappingTextBoxFlag xmlns="" xmlns:m="http://schemas.openxmlformats.org/officeDocument/2006/math" xmlns:a14="http://schemas.microsoft.com/office/drawing/2010/main" xmlns:ma14="http://schemas.microsoft.com/office/mac/drawingml/2011/main" val="1"/>
+              <ma14:wrappingTextBoxFlag xmlns:ma14="http://schemas.microsoft.com/office/mac/drawingml/2011/main" xmlns:a14="http://schemas.microsoft.com/office/drawing/2010/main" xmlns:m="http://schemas.openxmlformats.org/officeDocument/2006/math" xmlns="" val="1"/>
             </a:ext>
           </a:extLst>
         </p:spPr>
@@ -15274,7 +16816,7 @@
           </a:ln>
           <a:extLst>
             <a:ext uri="{C572A759-6A51-4108-AA02-DFA0A04FC94B}">
-              <ma14:wrappingTextBoxFlag xmlns="" xmlns:m="http://schemas.openxmlformats.org/officeDocument/2006/math" xmlns:a14="http://schemas.microsoft.com/office/drawing/2010/main" xmlns:ma14="http://schemas.microsoft.com/office/mac/drawingml/2011/main" val="1"/>
+              <ma14:wrappingTextBoxFlag xmlns:ma14="http://schemas.microsoft.com/office/mac/drawingml/2011/main" xmlns:a14="http://schemas.microsoft.com/office/drawing/2010/main" xmlns:m="http://schemas.openxmlformats.org/officeDocument/2006/math" xmlns="" val="1"/>
             </a:ext>
           </a:extLst>
         </p:spPr>
@@ -15322,7 +16864,7 @@
           </a:ln>
           <a:extLst>
             <a:ext uri="{C572A759-6A51-4108-AA02-DFA0A04FC94B}">
-              <ma14:wrappingTextBoxFlag xmlns="" xmlns:m="http://schemas.openxmlformats.org/officeDocument/2006/math" xmlns:a14="http://schemas.microsoft.com/office/drawing/2010/main" xmlns:ma14="http://schemas.microsoft.com/office/mac/drawingml/2011/main" val="1"/>
+              <ma14:wrappingTextBoxFlag xmlns:ma14="http://schemas.microsoft.com/office/mac/drawingml/2011/main" xmlns:a14="http://schemas.microsoft.com/office/drawing/2010/main" xmlns:m="http://schemas.openxmlformats.org/officeDocument/2006/math" xmlns="" val="1"/>
             </a:ext>
           </a:extLst>
         </p:spPr>
@@ -15370,7 +16912,7 @@
           </a:ln>
           <a:extLst>
             <a:ext uri="{C572A759-6A51-4108-AA02-DFA0A04FC94B}">
-              <ma14:wrappingTextBoxFlag xmlns="" xmlns:m="http://schemas.openxmlformats.org/officeDocument/2006/math" xmlns:a14="http://schemas.microsoft.com/office/drawing/2010/main" xmlns:ma14="http://schemas.microsoft.com/office/mac/drawingml/2011/main" val="1"/>
+              <ma14:wrappingTextBoxFlag xmlns:ma14="http://schemas.microsoft.com/office/mac/drawingml/2011/main" xmlns:a14="http://schemas.microsoft.com/office/drawing/2010/main" xmlns:m="http://schemas.openxmlformats.org/officeDocument/2006/math" xmlns="" val="1"/>
             </a:ext>
           </a:extLst>
         </p:spPr>
@@ -15418,7 +16960,7 @@
           </a:ln>
           <a:extLst>
             <a:ext uri="{C572A759-6A51-4108-AA02-DFA0A04FC94B}">
-              <ma14:wrappingTextBoxFlag xmlns="" xmlns:m="http://schemas.openxmlformats.org/officeDocument/2006/math" xmlns:a14="http://schemas.microsoft.com/office/drawing/2010/main" xmlns:ma14="http://schemas.microsoft.com/office/mac/drawingml/2011/main" val="1"/>
+              <ma14:wrappingTextBoxFlag xmlns:ma14="http://schemas.microsoft.com/office/mac/drawingml/2011/main" xmlns:a14="http://schemas.microsoft.com/office/drawing/2010/main" xmlns:m="http://schemas.openxmlformats.org/officeDocument/2006/math" xmlns="" val="1"/>
             </a:ext>
           </a:extLst>
         </p:spPr>
@@ -15466,7 +17008,7 @@
           </a:ln>
           <a:extLst>
             <a:ext uri="{C572A759-6A51-4108-AA02-DFA0A04FC94B}">
-              <ma14:wrappingTextBoxFlag xmlns="" xmlns:m="http://schemas.openxmlformats.org/officeDocument/2006/math" xmlns:a14="http://schemas.microsoft.com/office/drawing/2010/main" xmlns:ma14="http://schemas.microsoft.com/office/mac/drawingml/2011/main" val="1"/>
+              <ma14:wrappingTextBoxFlag xmlns:ma14="http://schemas.microsoft.com/office/mac/drawingml/2011/main" xmlns:a14="http://schemas.microsoft.com/office/drawing/2010/main" xmlns:m="http://schemas.openxmlformats.org/officeDocument/2006/math" xmlns="" val="1"/>
             </a:ext>
           </a:extLst>
         </p:spPr>
@@ -15574,7 +17116,7 @@
             <a:effectLst/>
             <a:extLst>
               <a:ext uri="{C572A759-6A51-4108-AA02-DFA0A04FC94B}">
-                <ma14:wrappingTextBoxFlag xmlns="" xmlns:m="http://schemas.openxmlformats.org/officeDocument/2006/math" xmlns:a14="http://schemas.microsoft.com/office/drawing/2010/main" xmlns:ma14="http://schemas.microsoft.com/office/mac/drawingml/2011/main" val="1"/>
+                <ma14:wrappingTextBoxFlag xmlns:ma14="http://schemas.microsoft.com/office/mac/drawingml/2011/main" xmlns:a14="http://schemas.microsoft.com/office/drawing/2010/main" xmlns:m="http://schemas.openxmlformats.org/officeDocument/2006/math" xmlns="" val="1"/>
               </a:ext>
             </a:extLst>
           </p:spPr>
@@ -15686,7 +17228,7 @@
             <a:effectLst/>
             <a:extLst>
               <a:ext uri="{C572A759-6A51-4108-AA02-DFA0A04FC94B}">
-                <ma14:wrappingTextBoxFlag xmlns="" xmlns:m="http://schemas.openxmlformats.org/officeDocument/2006/math" xmlns:a14="http://schemas.microsoft.com/office/drawing/2010/main" xmlns:ma14="http://schemas.microsoft.com/office/mac/drawingml/2011/main" val="1"/>
+                <ma14:wrappingTextBoxFlag xmlns:ma14="http://schemas.microsoft.com/office/mac/drawingml/2011/main" xmlns:a14="http://schemas.microsoft.com/office/drawing/2010/main" xmlns:m="http://schemas.openxmlformats.org/officeDocument/2006/math" xmlns="" val="1"/>
               </a:ext>
             </a:extLst>
           </p:spPr>
